--- a/ai-marketing-6week/수강생용/4회차_GEO_인용되는_브랜드.pptx
+++ b/ai-marketing-6week/수강생용/4회차_GEO_인용되는_브랜드.pptx
@@ -3115,7 +3115,7 @@
             <a:avLst/>
           </a:prstGeom>
           <a:solidFill>
-            <a:srgbClr val="14213D"/>
+            <a:srgbClr val="161E3A"/>
           </a:solidFill>
           <a:ln>
             <a:noFill/>
@@ -3152,14 +3152,14 @@
         </p:nvSpPr>
         <p:spPr>
           <a:xfrm>
-            <a:off x="0" y="6729984"/>
-            <a:ext cx="12191695" cy="128016"/>
+            <a:off x="0" y="6711696"/>
+            <a:ext cx="12191695" cy="146304"/>
           </a:xfrm>
           <a:prstGeom prst="rect">
             <a:avLst/>
           </a:prstGeom>
           <a:solidFill>
-            <a:srgbClr val="F59E0B"/>
+            <a:srgbClr val="4338CA"/>
           </a:solidFill>
           <a:ln>
             <a:noFill/>
@@ -3190,20 +3190,22 @@
       </p:sp>
       <p:sp>
         <p:nvSpPr>
-          <p:cNvPr id="4" name="Rectangle 3"/>
+          <p:cNvPr id="4" name="Rounded Rectangle 3"/>
           <p:cNvSpPr/>
           <p:nvPr/>
         </p:nvSpPr>
         <p:spPr>
           <a:xfrm>
-            <a:off x="594360" y="1847088"/>
-            <a:ext cx="566928" cy="68580"/>
-          </a:xfrm>
-          <a:prstGeom prst="rect">
-            <a:avLst/>
+            <a:off x="585216" y="1975104"/>
+            <a:ext cx="47548" cy="146304"/>
+          </a:xfrm>
+          <a:prstGeom prst="roundRect">
+            <a:avLst>
+              <a:gd name="adj" fmla="val 40000"/>
+            </a:avLst>
           </a:prstGeom>
           <a:solidFill>
-            <a:srgbClr val="F59E0B"/>
+            <a:srgbClr val="A5B4FC"/>
           </a:solidFill>
           <a:ln>
             <a:noFill/>
@@ -3234,13 +3236,289 @@
       </p:sp>
       <p:sp>
         <p:nvSpPr>
-          <p:cNvPr id="5" name="TextBox 4"/>
+          <p:cNvPr id="5" name="Rounded Rectangle 4"/>
+          <p:cNvSpPr/>
+          <p:nvPr/>
+        </p:nvSpPr>
+        <p:spPr>
+          <a:xfrm>
+            <a:off x="671168" y="1874520"/>
+            <a:ext cx="47548" cy="246888"/>
+          </a:xfrm>
+          <a:prstGeom prst="roundRect">
+            <a:avLst>
+              <a:gd name="adj" fmla="val 40000"/>
+            </a:avLst>
+          </a:prstGeom>
+          <a:solidFill>
+            <a:srgbClr val="A5B4FC"/>
+          </a:solidFill>
+          <a:ln>
+            <a:noFill/>
+          </a:ln>
+          <a:effectLst/>
+        </p:spPr>
+        <p:style>
+          <a:lnRef idx="1">
+            <a:schemeClr val="accent1"/>
+          </a:lnRef>
+          <a:fillRef idx="3">
+            <a:schemeClr val="accent1"/>
+          </a:fillRef>
+          <a:effectRef idx="2">
+            <a:schemeClr val="accent1"/>
+          </a:effectRef>
+          <a:fontRef idx="minor">
+            <a:schemeClr val="lt1"/>
+          </a:fontRef>
+        </p:style>
+        <p:txBody>
+          <a:bodyPr rtlCol="0" anchor="ctr"/>
+          <a:lstStyle/>
+          <a:p>
+            <a:pPr algn="ctr"/>
+          </a:p>
+        </p:txBody>
+      </p:sp>
+      <p:sp>
+        <p:nvSpPr>
+          <p:cNvPr id="6" name="Rounded Rectangle 5"/>
+          <p:cNvSpPr/>
+          <p:nvPr/>
+        </p:nvSpPr>
+        <p:spPr>
+          <a:xfrm>
+            <a:off x="757120" y="1938528"/>
+            <a:ext cx="47548" cy="182880"/>
+          </a:xfrm>
+          <a:prstGeom prst="roundRect">
+            <a:avLst>
+              <a:gd name="adj" fmla="val 40000"/>
+            </a:avLst>
+          </a:prstGeom>
+          <a:solidFill>
+            <a:srgbClr val="A5B4FC"/>
+          </a:solidFill>
+          <a:ln>
+            <a:noFill/>
+          </a:ln>
+          <a:effectLst/>
+        </p:spPr>
+        <p:style>
+          <a:lnRef idx="1">
+            <a:schemeClr val="accent1"/>
+          </a:lnRef>
+          <a:fillRef idx="3">
+            <a:schemeClr val="accent1"/>
+          </a:fillRef>
+          <a:effectRef idx="2">
+            <a:schemeClr val="accent1"/>
+          </a:effectRef>
+          <a:fontRef idx="minor">
+            <a:schemeClr val="lt1"/>
+          </a:fontRef>
+        </p:style>
+        <p:txBody>
+          <a:bodyPr rtlCol="0" anchor="ctr"/>
+          <a:lstStyle/>
+          <a:p>
+            <a:pPr algn="ctr"/>
+          </a:p>
+        </p:txBody>
+      </p:sp>
+      <p:sp>
+        <p:nvSpPr>
+          <p:cNvPr id="7" name="Rounded Rectangle 6"/>
+          <p:cNvSpPr/>
+          <p:nvPr/>
+        </p:nvSpPr>
+        <p:spPr>
+          <a:xfrm>
+            <a:off x="843072" y="1810512"/>
+            <a:ext cx="47548" cy="310896"/>
+          </a:xfrm>
+          <a:prstGeom prst="roundRect">
+            <a:avLst>
+              <a:gd name="adj" fmla="val 40000"/>
+            </a:avLst>
+          </a:prstGeom>
+          <a:solidFill>
+            <a:srgbClr val="A5B4FC"/>
+          </a:solidFill>
+          <a:ln>
+            <a:noFill/>
+          </a:ln>
+          <a:effectLst/>
+        </p:spPr>
+        <p:style>
+          <a:lnRef idx="1">
+            <a:schemeClr val="accent1"/>
+          </a:lnRef>
+          <a:fillRef idx="3">
+            <a:schemeClr val="accent1"/>
+          </a:fillRef>
+          <a:effectRef idx="2">
+            <a:schemeClr val="accent1"/>
+          </a:effectRef>
+          <a:fontRef idx="minor">
+            <a:schemeClr val="lt1"/>
+          </a:fontRef>
+        </p:style>
+        <p:txBody>
+          <a:bodyPr rtlCol="0" anchor="ctr"/>
+          <a:lstStyle/>
+          <a:p>
+            <a:pPr algn="ctr"/>
+          </a:p>
+        </p:txBody>
+      </p:sp>
+      <p:sp>
+        <p:nvSpPr>
+          <p:cNvPr id="8" name="Rounded Rectangle 7"/>
+          <p:cNvSpPr/>
+          <p:nvPr/>
+        </p:nvSpPr>
+        <p:spPr>
+          <a:xfrm>
+            <a:off x="929024" y="1901952"/>
+            <a:ext cx="47548" cy="219456"/>
+          </a:xfrm>
+          <a:prstGeom prst="roundRect">
+            <a:avLst>
+              <a:gd name="adj" fmla="val 40000"/>
+            </a:avLst>
+          </a:prstGeom>
+          <a:solidFill>
+            <a:srgbClr val="A5B4FC"/>
+          </a:solidFill>
+          <a:ln>
+            <a:noFill/>
+          </a:ln>
+          <a:effectLst/>
+        </p:spPr>
+        <p:style>
+          <a:lnRef idx="1">
+            <a:schemeClr val="accent1"/>
+          </a:lnRef>
+          <a:fillRef idx="3">
+            <a:schemeClr val="accent1"/>
+          </a:fillRef>
+          <a:effectRef idx="2">
+            <a:schemeClr val="accent1"/>
+          </a:effectRef>
+          <a:fontRef idx="minor">
+            <a:schemeClr val="lt1"/>
+          </a:fontRef>
+        </p:style>
+        <p:txBody>
+          <a:bodyPr rtlCol="0" anchor="ctr"/>
+          <a:lstStyle/>
+          <a:p>
+            <a:pPr algn="ctr"/>
+          </a:p>
+        </p:txBody>
+      </p:sp>
+      <p:sp>
+        <p:nvSpPr>
+          <p:cNvPr id="9" name="Rounded Rectangle 8"/>
+          <p:cNvSpPr/>
+          <p:nvPr/>
+        </p:nvSpPr>
+        <p:spPr>
+          <a:xfrm>
+            <a:off x="1014976" y="1847088"/>
+            <a:ext cx="47548" cy="274320"/>
+          </a:xfrm>
+          <a:prstGeom prst="roundRect">
+            <a:avLst>
+              <a:gd name="adj" fmla="val 40000"/>
+            </a:avLst>
+          </a:prstGeom>
+          <a:solidFill>
+            <a:srgbClr val="A5B4FC"/>
+          </a:solidFill>
+          <a:ln>
+            <a:noFill/>
+          </a:ln>
+          <a:effectLst/>
+        </p:spPr>
+        <p:style>
+          <a:lnRef idx="1">
+            <a:schemeClr val="accent1"/>
+          </a:lnRef>
+          <a:fillRef idx="3">
+            <a:schemeClr val="accent1"/>
+          </a:fillRef>
+          <a:effectRef idx="2">
+            <a:schemeClr val="accent1"/>
+          </a:effectRef>
+          <a:fontRef idx="minor">
+            <a:schemeClr val="lt1"/>
+          </a:fontRef>
+        </p:style>
+        <p:txBody>
+          <a:bodyPr rtlCol="0" anchor="ctr"/>
+          <a:lstStyle/>
+          <a:p>
+            <a:pPr algn="ctr"/>
+          </a:p>
+        </p:txBody>
+      </p:sp>
+      <p:sp>
+        <p:nvSpPr>
+          <p:cNvPr id="10" name="Rounded Rectangle 9"/>
+          <p:cNvSpPr/>
+          <p:nvPr/>
+        </p:nvSpPr>
+        <p:spPr>
+          <a:xfrm>
+            <a:off x="1100928" y="1993392"/>
+            <a:ext cx="47548" cy="128016"/>
+          </a:xfrm>
+          <a:prstGeom prst="roundRect">
+            <a:avLst>
+              <a:gd name="adj" fmla="val 40000"/>
+            </a:avLst>
+          </a:prstGeom>
+          <a:solidFill>
+            <a:srgbClr val="A5B4FC"/>
+          </a:solidFill>
+          <a:ln>
+            <a:noFill/>
+          </a:ln>
+          <a:effectLst/>
+        </p:spPr>
+        <p:style>
+          <a:lnRef idx="1">
+            <a:schemeClr val="accent1"/>
+          </a:lnRef>
+          <a:fillRef idx="3">
+            <a:schemeClr val="accent1"/>
+          </a:fillRef>
+          <a:effectRef idx="2">
+            <a:schemeClr val="accent1"/>
+          </a:effectRef>
+          <a:fontRef idx="minor">
+            <a:schemeClr val="lt1"/>
+          </a:fontRef>
+        </p:style>
+        <p:txBody>
+          <a:bodyPr rtlCol="0" anchor="ctr"/>
+          <a:lstStyle/>
+          <a:p>
+            <a:pPr algn="ctr"/>
+          </a:p>
+        </p:txBody>
+      </p:sp>
+      <p:sp>
+        <p:nvSpPr>
+          <p:cNvPr id="11" name="TextBox 10"/>
           <p:cNvSpPr txBox="1"/>
           <p:nvPr/>
         </p:nvSpPr>
         <p:spPr>
           <a:xfrm>
-            <a:off x="594360" y="2057400"/>
+            <a:off x="585216" y="2231136"/>
             <a:ext cx="10515600" cy="457200"/>
           </a:xfrm>
           <a:prstGeom prst="rect">
@@ -3256,13 +3534,13 @@
           <a:p>
             <a:pPr algn="l">
               <a:lnSpc>
-                <a:spcPct val="112000"/>
+                <a:spcPct val="114000"/>
               </a:lnSpc>
             </a:pPr>
             <a:r>
-              <a:rPr sz="1600" b="1" i="0">
-                <a:solidFill>
-                  <a:srgbClr val="FBBF24"/>
+              <a:rPr sz="1450" b="1" i="0" spc="60">
+                <a:solidFill>
+                  <a:srgbClr val="A5B4FC"/>
                 </a:solidFill>
                 <a:latin typeface="맑은 고딕"/>
                 <a:ea typeface="맑은 고딕"/>
@@ -3274,13 +3552,13 @@
       </p:sp>
       <p:sp>
         <p:nvSpPr>
-          <p:cNvPr id="6" name="TextBox 5"/>
+          <p:cNvPr id="12" name="TextBox 11"/>
           <p:cNvSpPr txBox="1"/>
           <p:nvPr/>
         </p:nvSpPr>
         <p:spPr>
           <a:xfrm>
-            <a:off x="594360" y="2487168"/>
+            <a:off x="585216" y="2651760"/>
             <a:ext cx="10972800" cy="1737360"/>
           </a:xfrm>
           <a:prstGeom prst="rect">
@@ -3296,11 +3574,11 @@
           <a:p>
             <a:pPr algn="l">
               <a:lnSpc>
-                <a:spcPct val="108000"/>
+                <a:spcPct val="106000"/>
               </a:lnSpc>
             </a:pPr>
             <a:r>
-              <a:rPr sz="3800" b="1" i="0">
+              <a:rPr sz="3900" b="1" i="0">
                 <a:solidFill>
                   <a:srgbClr val="FFFFFF"/>
                 </a:solidFill>
@@ -3314,14 +3592,58 @@
       </p:sp>
       <p:sp>
         <p:nvSpPr>
-          <p:cNvPr id="7" name="TextBox 6"/>
+          <p:cNvPr id="13" name="Rectangle 12"/>
+          <p:cNvSpPr/>
+          <p:nvPr/>
+        </p:nvSpPr>
+        <p:spPr>
+          <a:xfrm>
+            <a:off x="612648" y="4261104"/>
+            <a:ext cx="457200" cy="32004"/>
+          </a:xfrm>
+          <a:prstGeom prst="rect">
+            <a:avLst/>
+          </a:prstGeom>
+          <a:solidFill>
+            <a:srgbClr val="4338CA"/>
+          </a:solidFill>
+          <a:ln>
+            <a:noFill/>
+          </a:ln>
+          <a:effectLst/>
+        </p:spPr>
+        <p:style>
+          <a:lnRef idx="1">
+            <a:schemeClr val="accent1"/>
+          </a:lnRef>
+          <a:fillRef idx="3">
+            <a:schemeClr val="accent1"/>
+          </a:fillRef>
+          <a:effectRef idx="2">
+            <a:schemeClr val="accent1"/>
+          </a:effectRef>
+          <a:fontRef idx="minor">
+            <a:schemeClr val="lt1"/>
+          </a:fontRef>
+        </p:style>
+        <p:txBody>
+          <a:bodyPr rtlCol="0" anchor="ctr"/>
+          <a:lstStyle/>
+          <a:p>
+            <a:pPr algn="ctr"/>
+          </a:p>
+        </p:txBody>
+      </p:sp>
+      <p:sp>
+        <p:nvSpPr>
+          <p:cNvPr id="14" name="TextBox 13"/>
           <p:cNvSpPr txBox="1"/>
           <p:nvPr/>
         </p:nvSpPr>
         <p:spPr>
           <a:xfrm>
-            <a:off x="594360" y="4160520"/>
-            <a:ext cx="10607040" cy="1097280"/>
+            <a:off x="585216" y="4443984"/>
+            <a:ext cx="10515600" cy="1097280"/>
           </a:xfrm>
           <a:prstGeom prst="rect">
             <a:avLst/>
@@ -3336,13 +3658,13 @@
           <a:p>
             <a:pPr algn="l">
               <a:lnSpc>
-                <a:spcPct val="125000"/>
+                <a:spcPct val="132000"/>
               </a:lnSpc>
             </a:pPr>
             <a:r>
-              <a:rPr sz="1650" b="0" i="0">
-                <a:solidFill>
-                  <a:srgbClr val="CBD5E1"/>
+              <a:rPr sz="1600" b="0" i="0">
+                <a:solidFill>
+                  <a:srgbClr val="D5DAE6"/>
                 </a:solidFill>
                 <a:latin typeface="맑은 고딕"/>
                 <a:ea typeface="맑은 고딕"/>
@@ -3354,13 +3676,13 @@
       </p:sp>
       <p:sp>
         <p:nvSpPr>
-          <p:cNvPr id="8" name="TextBox 7"/>
+          <p:cNvPr id="15" name="TextBox 14"/>
           <p:cNvSpPr txBox="1"/>
           <p:nvPr/>
         </p:nvSpPr>
         <p:spPr>
           <a:xfrm>
-            <a:off x="594360" y="5989320"/>
+            <a:off x="585216" y="6089904"/>
             <a:ext cx="10607040" cy="457200"/>
           </a:xfrm>
           <a:prstGeom prst="rect">
@@ -3376,13 +3698,13 @@
           <a:p>
             <a:pPr algn="l">
               <a:lnSpc>
-                <a:spcPct val="112000"/>
+                <a:spcPct val="114000"/>
               </a:lnSpc>
             </a:pPr>
             <a:r>
-              <a:rPr sz="1150" b="0" i="0">
-                <a:solidFill>
-                  <a:srgbClr val="8DA2C0"/>
+              <a:rPr sz="1100" b="0" i="0">
+                <a:solidFill>
+                  <a:srgbClr val="8A94B2"/>
                 </a:solidFill>
                 <a:latin typeface="맑은 고딕"/>
                 <a:ea typeface="맑은 고딕"/>
@@ -3418,14 +3740,14 @@
         </p:nvSpPr>
         <p:spPr>
           <a:xfrm>
-            <a:off x="548640" y="475488"/>
-            <a:ext cx="91440" cy="475488"/>
+            <a:off x="0" y="0"/>
+            <a:ext cx="12191695" cy="6858000"/>
           </a:xfrm>
           <a:prstGeom prst="rect">
             <a:avLst/>
           </a:prstGeom>
           <a:solidFill>
-            <a:srgbClr val="2563EB"/>
+            <a:srgbClr val="F6F7F9"/>
           </a:solidFill>
           <a:ln>
             <a:noFill/>
@@ -3456,14 +3778,104 @@
       </p:sp>
       <p:sp>
         <p:nvSpPr>
-          <p:cNvPr id="3" name="TextBox 2"/>
+          <p:cNvPr id="3" name="Rectangle 2"/>
+          <p:cNvSpPr/>
+          <p:nvPr/>
+        </p:nvSpPr>
+        <p:spPr>
+          <a:xfrm>
+            <a:off x="0" y="0"/>
+            <a:ext cx="12191695" cy="128016"/>
+          </a:xfrm>
+          <a:prstGeom prst="rect">
+            <a:avLst/>
+          </a:prstGeom>
+          <a:solidFill>
+            <a:srgbClr val="4338CA"/>
+          </a:solidFill>
+          <a:ln>
+            <a:noFill/>
+          </a:ln>
+          <a:effectLst/>
+        </p:spPr>
+        <p:style>
+          <a:lnRef idx="1">
+            <a:schemeClr val="accent1"/>
+          </a:lnRef>
+          <a:fillRef idx="3">
+            <a:schemeClr val="accent1"/>
+          </a:fillRef>
+          <a:effectRef idx="2">
+            <a:schemeClr val="accent1"/>
+          </a:effectRef>
+          <a:fontRef idx="minor">
+            <a:schemeClr val="lt1"/>
+          </a:fontRef>
+        </p:style>
+        <p:txBody>
+          <a:bodyPr rtlCol="0" anchor="ctr"/>
+          <a:lstStyle/>
+          <a:p>
+            <a:pPr algn="ctr"/>
+          </a:p>
+        </p:txBody>
+      </p:sp>
+      <p:sp>
+        <p:nvSpPr>
+          <p:cNvPr id="4" name="Rounded Rectangle 3"/>
+          <p:cNvSpPr/>
+          <p:nvPr/>
+        </p:nvSpPr>
+        <p:spPr>
+          <a:xfrm>
+            <a:off x="566928" y="457200"/>
+            <a:ext cx="82296" cy="457200"/>
+          </a:xfrm>
+          <a:prstGeom prst="roundRect">
+            <a:avLst>
+              <a:gd name="adj" fmla="val 50000"/>
+            </a:avLst>
+          </a:prstGeom>
+          <a:solidFill>
+            <a:srgbClr val="4338CA"/>
+          </a:solidFill>
+          <a:ln>
+            <a:noFill/>
+          </a:ln>
+          <a:effectLst/>
+        </p:spPr>
+        <p:style>
+          <a:lnRef idx="1">
+            <a:schemeClr val="accent1"/>
+          </a:lnRef>
+          <a:fillRef idx="3">
+            <a:schemeClr val="accent1"/>
+          </a:fillRef>
+          <a:effectRef idx="2">
+            <a:schemeClr val="accent1"/>
+          </a:effectRef>
+          <a:fontRef idx="minor">
+            <a:schemeClr val="lt1"/>
+          </a:fontRef>
+        </p:style>
+        <p:txBody>
+          <a:bodyPr rtlCol="0" anchor="ctr"/>
+          <a:lstStyle/>
+          <a:p>
+            <a:pPr algn="ctr"/>
+          </a:p>
+        </p:txBody>
+      </p:sp>
+      <p:sp>
+        <p:nvSpPr>
+          <p:cNvPr id="5" name="TextBox 4"/>
           <p:cNvSpPr txBox="1"/>
           <p:nvPr/>
         </p:nvSpPr>
         <p:spPr>
           <a:xfrm>
-            <a:off x="786384" y="402336"/>
-            <a:ext cx="9326880" cy="640080"/>
+            <a:off x="804672" y="384048"/>
+            <a:ext cx="9144000" cy="603504"/>
           </a:xfrm>
           <a:prstGeom prst="rect">
             <a:avLst/>
@@ -3478,13 +3890,13 @@
           <a:p>
             <a:pPr algn="l">
               <a:lnSpc>
-                <a:spcPct val="112000"/>
+                <a:spcPct val="114000"/>
               </a:lnSpc>
             </a:pPr>
             <a:r>
-              <a:rPr sz="2300" b="1" i="0">
-                <a:solidFill>
-                  <a:srgbClr val="14213D"/>
+              <a:rPr sz="2200" b="1" i="0">
+                <a:solidFill>
+                  <a:srgbClr val="111927"/>
                 </a:solidFill>
                 <a:latin typeface="맑은 고딕"/>
                 <a:ea typeface="맑은 고딕"/>
@@ -3496,14 +3908,98 @@
       </p:sp>
       <p:sp>
         <p:nvSpPr>
-          <p:cNvPr id="4" name="TextBox 3"/>
+          <p:cNvPr id="6" name="Rectangle 5"/>
+          <p:cNvSpPr/>
+          <p:nvPr/>
+        </p:nvSpPr>
+        <p:spPr>
+          <a:xfrm>
+            <a:off x="566928" y="6547104"/>
+            <a:ext cx="182880" cy="25603"/>
+          </a:xfrm>
+          <a:prstGeom prst="rect">
+            <a:avLst/>
+          </a:prstGeom>
+          <a:solidFill>
+            <a:srgbClr val="4338CA"/>
+          </a:solidFill>
+          <a:ln>
+            <a:noFill/>
+          </a:ln>
+          <a:effectLst/>
+        </p:spPr>
+        <p:style>
+          <a:lnRef idx="1">
+            <a:schemeClr val="accent1"/>
+          </a:lnRef>
+          <a:fillRef idx="3">
+            <a:schemeClr val="accent1"/>
+          </a:fillRef>
+          <a:effectRef idx="2">
+            <a:schemeClr val="accent1"/>
+          </a:effectRef>
+          <a:fontRef idx="minor">
+            <a:schemeClr val="lt1"/>
+          </a:fontRef>
+        </p:style>
+        <p:txBody>
+          <a:bodyPr rtlCol="0" anchor="ctr"/>
+          <a:lstStyle/>
+          <a:p>
+            <a:pPr algn="ctr"/>
+          </a:p>
+        </p:txBody>
+      </p:sp>
+      <p:sp>
+        <p:nvSpPr>
+          <p:cNvPr id="7" name="TextBox 6"/>
           <p:cNvSpPr txBox="1"/>
           <p:nvPr/>
         </p:nvSpPr>
         <p:spPr>
           <a:xfrm>
-            <a:off x="548640" y="6510528"/>
-            <a:ext cx="11094415" cy="274320"/>
+            <a:off x="841248" y="6446520"/>
+            <a:ext cx="11057839" cy="274320"/>
+          </a:xfrm>
+          <a:prstGeom prst="rect">
+            <a:avLst/>
+          </a:prstGeom>
+          <a:noFill/>
+        </p:spPr>
+        <p:txBody>
+          <a:bodyPr wrap="square" anchor="ctr" lIns="0" rIns="0" tIns="0" bIns="0">
+            <a:spAutoFit/>
+          </a:bodyPr>
+          <a:lstStyle/>
+          <a:p>
+            <a:pPr algn="l">
+              <a:lnSpc>
+                <a:spcPct val="114000"/>
+              </a:lnSpc>
+            </a:pPr>
+            <a:r>
+              <a:rPr sz="900" b="0" i="0">
+                <a:solidFill>
+                  <a:srgbClr val="9AA4B2"/>
+                </a:solidFill>
+                <a:latin typeface="맑은 고딕"/>
+                <a:ea typeface="맑은 고딕"/>
+              </a:rPr>
+              <a:t>AI 시대 마케팅, 누가 살아남을까? — 6주 실무 스터디   |   4회차 · GEO 인용되는 브랜드</a:t>
+            </a:r>
+          </a:p>
+        </p:txBody>
+      </p:sp>
+      <p:sp>
+        <p:nvSpPr>
+          <p:cNvPr id="8" name="TextBox 7"/>
+          <p:cNvSpPr txBox="1"/>
+          <p:nvPr/>
+        </p:nvSpPr>
+        <p:spPr>
+          <a:xfrm>
+            <a:off x="713232" y="1225295"/>
+            <a:ext cx="10607040" cy="4709159"/>
           </a:xfrm>
           <a:prstGeom prst="rect">
             <a:avLst/>
@@ -3518,79 +4014,29 @@
           <a:p>
             <a:pPr algn="l">
               <a:lnSpc>
-                <a:spcPct val="112000"/>
-              </a:lnSpc>
-            </a:pPr>
-            <a:r>
-              <a:rPr sz="950" b="0" i="0">
-                <a:solidFill>
-                  <a:srgbClr val="94A3B8"/>
-                </a:solidFill>
-                <a:latin typeface="맑은 고딕"/>
-                <a:ea typeface="맑은 고딕"/>
-              </a:rPr>
-              <a:t>AI 시대 마케팅, 누가 살아남을까? — 6주 실무 스터디   |   4회차 · GEO 인용되는 브랜드</a:t>
-            </a:r>
-            <a:r>
-              <a:rPr sz="950" b="0" i="0">
-                <a:solidFill>
-                  <a:srgbClr val="94A3B8"/>
-                </a:solidFill>
-                <a:latin typeface="맑은 고딕"/>
-                <a:ea typeface="맑은 고딕"/>
-              </a:rPr>
-              <a:t/>
-            </a:r>
-          </a:p>
-        </p:txBody>
-      </p:sp>
-      <p:sp>
-        <p:nvSpPr>
-          <p:cNvPr id="5" name="TextBox 4"/>
-          <p:cNvSpPr txBox="1"/>
-          <p:nvPr/>
-        </p:nvSpPr>
-        <p:spPr>
-          <a:xfrm>
-            <a:off x="685800" y="1225295"/>
-            <a:ext cx="10698480" cy="4736592"/>
-          </a:xfrm>
-          <a:prstGeom prst="rect">
-            <a:avLst/>
-          </a:prstGeom>
-          <a:noFill/>
-        </p:spPr>
-        <p:txBody>
-          <a:bodyPr wrap="square" anchor="t" lIns="0" rIns="0" tIns="0" bIns="0">
-            <a:spAutoFit/>
-          </a:bodyPr>
-          <a:lstStyle/>
-          <a:p>
-            <a:pPr algn="l">
-              <a:lnSpc>
-                <a:spcPct val="118000"/>
+                <a:spcPct val="120000"/>
               </a:lnSpc>
               <a:spcBef>
-                <a:spcPts val="600"/>
+                <a:spcPts val="700"/>
               </a:spcBef>
               <a:spcAft>
                 <a:spcPts val="500"/>
               </a:spcAft>
             </a:pPr>
             <a:r>
-              <a:rPr sz="1150" b="0" i="0">
-                <a:solidFill>
-                  <a:srgbClr val="2563EB"/>
-                </a:solidFill>
-                <a:latin typeface="맑은 고딕"/>
-                <a:ea typeface="맑은 고딕"/>
-              </a:rPr>
-              <a:t>●  </a:t>
+              <a:rPr sz="950" b="0" i="0">
+                <a:solidFill>
+                  <a:srgbClr val="4338CA"/>
+                </a:solidFill>
+                <a:latin typeface="맑은 고딕"/>
+                <a:ea typeface="맑은 고딕"/>
+              </a:rPr>
+              <a:t>■  </a:t>
             </a:r>
             <a:r>
               <a:rPr sz="1550" b="1" i="0">
                 <a:solidFill>
-                  <a:srgbClr val="1F2937"/>
+                  <a:srgbClr val="111927"/>
                 </a:solidFill>
                 <a:latin typeface="맑은 고딕"/>
                 <a:ea typeface="맑은 고딕"/>
@@ -3601,7 +4047,7 @@
           <a:p>
             <a:pPr algn="l">
               <a:lnSpc>
-                <a:spcPct val="115000"/>
+                <a:spcPct val="116000"/>
               </a:lnSpc>
               <a:spcBef>
                 <a:spcPts val="100"/>
@@ -3613,7 +4059,7 @@
             <a:r>
               <a:rPr sz="1250" b="0" i="0">
                 <a:solidFill>
-                  <a:srgbClr val="9CA3AF"/>
+                  <a:srgbClr val="9AA4B2"/>
                 </a:solidFill>
                 <a:latin typeface="맑은 고딕"/>
                 <a:ea typeface="맑은 고딕"/>
@@ -3623,7 +4069,7 @@
             <a:r>
               <a:rPr sz="1300" b="0" i="0">
                 <a:solidFill>
-                  <a:srgbClr val="4B5563"/>
+                  <a:srgbClr val="374151"/>
                 </a:solidFill>
                 <a:latin typeface="맑은 고딕"/>
                 <a:ea typeface="맑은 고딕"/>
@@ -3634,29 +4080,29 @@
           <a:p>
             <a:pPr algn="l">
               <a:lnSpc>
-                <a:spcPct val="118000"/>
+                <a:spcPct val="120000"/>
               </a:lnSpc>
               <a:spcBef>
-                <a:spcPts val="600"/>
+                <a:spcPts val="700"/>
               </a:spcBef>
               <a:spcAft>
                 <a:spcPts val="500"/>
               </a:spcAft>
             </a:pPr>
             <a:r>
-              <a:rPr sz="1150" b="0" i="0">
-                <a:solidFill>
-                  <a:srgbClr val="2563EB"/>
-                </a:solidFill>
-                <a:latin typeface="맑은 고딕"/>
-                <a:ea typeface="맑은 고딕"/>
-              </a:rPr>
-              <a:t>●  </a:t>
+              <a:rPr sz="950" b="0" i="0">
+                <a:solidFill>
+                  <a:srgbClr val="4338CA"/>
+                </a:solidFill>
+                <a:latin typeface="맑은 고딕"/>
+                <a:ea typeface="맑은 고딕"/>
+              </a:rPr>
+              <a:t>■  </a:t>
             </a:r>
             <a:r>
               <a:rPr sz="1550" b="0" i="0">
                 <a:solidFill>
-                  <a:srgbClr val="1F2937"/>
+                  <a:srgbClr val="374151"/>
                 </a:solidFill>
                 <a:latin typeface="맑은 고딕"/>
                 <a:ea typeface="맑은 고딕"/>
@@ -3667,7 +4113,7 @@
           <a:p>
             <a:pPr algn="l">
               <a:lnSpc>
-                <a:spcPct val="115000"/>
+                <a:spcPct val="116000"/>
               </a:lnSpc>
               <a:spcBef>
                 <a:spcPts val="100"/>
@@ -3679,7 +4125,7 @@
             <a:r>
               <a:rPr sz="1250" b="0" i="0">
                 <a:solidFill>
-                  <a:srgbClr val="9CA3AF"/>
+                  <a:srgbClr val="9AA4B2"/>
                 </a:solidFill>
                 <a:latin typeface="맑은 고딕"/>
                 <a:ea typeface="맑은 고딕"/>
@@ -3689,7 +4135,7 @@
             <a:r>
               <a:rPr sz="1300" b="0" i="0">
                 <a:solidFill>
-                  <a:srgbClr val="4B5563"/>
+                  <a:srgbClr val="374151"/>
                 </a:solidFill>
                 <a:latin typeface="맑은 고딕"/>
                 <a:ea typeface="맑은 고딕"/>
@@ -3700,7 +4146,7 @@
           <a:p>
             <a:pPr algn="l">
               <a:lnSpc>
-                <a:spcPct val="115000"/>
+                <a:spcPct val="116000"/>
               </a:lnSpc>
               <a:spcBef>
                 <a:spcPts val="100"/>
@@ -3712,7 +4158,7 @@
             <a:r>
               <a:rPr sz="1250" b="0" i="0">
                 <a:solidFill>
-                  <a:srgbClr val="9CA3AF"/>
+                  <a:srgbClr val="9AA4B2"/>
                 </a:solidFill>
                 <a:latin typeface="맑은 고딕"/>
                 <a:ea typeface="맑은 고딕"/>
@@ -3722,7 +4168,7 @@
             <a:r>
               <a:rPr sz="1300" b="0" i="0">
                 <a:solidFill>
-                  <a:srgbClr val="4B5563"/>
+                  <a:srgbClr val="374151"/>
                 </a:solidFill>
                 <a:latin typeface="맑은 고딕"/>
                 <a:ea typeface="맑은 고딕"/>
@@ -3733,7 +4179,7 @@
           <a:p>
             <a:pPr algn="l">
               <a:lnSpc>
-                <a:spcPct val="115000"/>
+                <a:spcPct val="116000"/>
               </a:lnSpc>
               <a:spcBef>
                 <a:spcPts val="100"/>
@@ -3745,7 +4191,7 @@
             <a:r>
               <a:rPr sz="1250" b="0" i="0">
                 <a:solidFill>
-                  <a:srgbClr val="9CA3AF"/>
+                  <a:srgbClr val="9AA4B2"/>
                 </a:solidFill>
                 <a:latin typeface="맑은 고딕"/>
                 <a:ea typeface="맑은 고딕"/>
@@ -3755,7 +4201,7 @@
             <a:r>
               <a:rPr sz="1300" b="0" i="0">
                 <a:solidFill>
-                  <a:srgbClr val="4B5563"/>
+                  <a:srgbClr val="374151"/>
                 </a:solidFill>
                 <a:latin typeface="맑은 고딕"/>
                 <a:ea typeface="맑은 고딕"/>
@@ -3766,24 +4212,24 @@
           <a:p>
             <a:pPr algn="l">
               <a:lnSpc>
-                <a:spcPct val="118000"/>
+                <a:spcPct val="120000"/>
               </a:lnSpc>
               <a:spcBef>
-                <a:spcPts val="600"/>
+                <a:spcPts val="700"/>
               </a:spcBef>
               <a:spcAft>
                 <a:spcPts val="500"/>
               </a:spcAft>
             </a:pPr>
             <a:r>
-              <a:rPr sz="1150" b="0" i="0">
-                <a:solidFill>
-                  <a:srgbClr val="2563EB"/>
-                </a:solidFill>
-                <a:latin typeface="맑은 고딕"/>
-                <a:ea typeface="맑은 고딕"/>
-              </a:rPr>
-              <a:t>●  </a:t>
+              <a:rPr sz="950" b="0" i="0">
+                <a:solidFill>
+                  <a:srgbClr val="4338CA"/>
+                </a:solidFill>
+                <a:latin typeface="맑은 고딕"/>
+                <a:ea typeface="맑은 고딕"/>
+              </a:rPr>
+              <a:t>■  </a:t>
             </a:r>
             <a:r>
               <a:rPr sz="1550" b="1" i="0">
@@ -3824,14 +4270,14 @@
         </p:nvSpPr>
         <p:spPr>
           <a:xfrm>
-            <a:off x="548640" y="475488"/>
-            <a:ext cx="91440" cy="475488"/>
+            <a:off x="0" y="0"/>
+            <a:ext cx="12191695" cy="6858000"/>
           </a:xfrm>
           <a:prstGeom prst="rect">
             <a:avLst/>
           </a:prstGeom>
           <a:solidFill>
-            <a:srgbClr val="2563EB"/>
+            <a:srgbClr val="F6F7F9"/>
           </a:solidFill>
           <a:ln>
             <a:noFill/>
@@ -3862,14 +4308,104 @@
       </p:sp>
       <p:sp>
         <p:nvSpPr>
-          <p:cNvPr id="3" name="TextBox 2"/>
+          <p:cNvPr id="3" name="Rectangle 2"/>
+          <p:cNvSpPr/>
+          <p:nvPr/>
+        </p:nvSpPr>
+        <p:spPr>
+          <a:xfrm>
+            <a:off x="0" y="0"/>
+            <a:ext cx="12191695" cy="128016"/>
+          </a:xfrm>
+          <a:prstGeom prst="rect">
+            <a:avLst/>
+          </a:prstGeom>
+          <a:solidFill>
+            <a:srgbClr val="4338CA"/>
+          </a:solidFill>
+          <a:ln>
+            <a:noFill/>
+          </a:ln>
+          <a:effectLst/>
+        </p:spPr>
+        <p:style>
+          <a:lnRef idx="1">
+            <a:schemeClr val="accent1"/>
+          </a:lnRef>
+          <a:fillRef idx="3">
+            <a:schemeClr val="accent1"/>
+          </a:fillRef>
+          <a:effectRef idx="2">
+            <a:schemeClr val="accent1"/>
+          </a:effectRef>
+          <a:fontRef idx="minor">
+            <a:schemeClr val="lt1"/>
+          </a:fontRef>
+        </p:style>
+        <p:txBody>
+          <a:bodyPr rtlCol="0" anchor="ctr"/>
+          <a:lstStyle/>
+          <a:p>
+            <a:pPr algn="ctr"/>
+          </a:p>
+        </p:txBody>
+      </p:sp>
+      <p:sp>
+        <p:nvSpPr>
+          <p:cNvPr id="4" name="Rounded Rectangle 3"/>
+          <p:cNvSpPr/>
+          <p:nvPr/>
+        </p:nvSpPr>
+        <p:spPr>
+          <a:xfrm>
+            <a:off x="566928" y="457200"/>
+            <a:ext cx="82296" cy="457200"/>
+          </a:xfrm>
+          <a:prstGeom prst="roundRect">
+            <a:avLst>
+              <a:gd name="adj" fmla="val 50000"/>
+            </a:avLst>
+          </a:prstGeom>
+          <a:solidFill>
+            <a:srgbClr val="4338CA"/>
+          </a:solidFill>
+          <a:ln>
+            <a:noFill/>
+          </a:ln>
+          <a:effectLst/>
+        </p:spPr>
+        <p:style>
+          <a:lnRef idx="1">
+            <a:schemeClr val="accent1"/>
+          </a:lnRef>
+          <a:fillRef idx="3">
+            <a:schemeClr val="accent1"/>
+          </a:fillRef>
+          <a:effectRef idx="2">
+            <a:schemeClr val="accent1"/>
+          </a:effectRef>
+          <a:fontRef idx="minor">
+            <a:schemeClr val="lt1"/>
+          </a:fontRef>
+        </p:style>
+        <p:txBody>
+          <a:bodyPr rtlCol="0" anchor="ctr"/>
+          <a:lstStyle/>
+          <a:p>
+            <a:pPr algn="ctr"/>
+          </a:p>
+        </p:txBody>
+      </p:sp>
+      <p:sp>
+        <p:nvSpPr>
+          <p:cNvPr id="5" name="TextBox 4"/>
           <p:cNvSpPr txBox="1"/>
           <p:nvPr/>
         </p:nvSpPr>
         <p:spPr>
           <a:xfrm>
-            <a:off x="786384" y="402336"/>
-            <a:ext cx="9326880" cy="640080"/>
+            <a:off x="804672" y="384048"/>
+            <a:ext cx="9144000" cy="603504"/>
           </a:xfrm>
           <a:prstGeom prst="rect">
             <a:avLst/>
@@ -3884,13 +4420,13 @@
           <a:p>
             <a:pPr algn="l">
               <a:lnSpc>
-                <a:spcPct val="112000"/>
+                <a:spcPct val="114000"/>
               </a:lnSpc>
             </a:pPr>
             <a:r>
-              <a:rPr sz="2300" b="1" i="0">
-                <a:solidFill>
-                  <a:srgbClr val="14213D"/>
+              <a:rPr sz="2200" b="1" i="0">
+                <a:solidFill>
+                  <a:srgbClr val="111927"/>
                 </a:solidFill>
                 <a:latin typeface="맑은 고딕"/>
                 <a:ea typeface="맑은 고딕"/>
@@ -3902,14 +4438,14 @@
       </p:sp>
       <p:sp>
         <p:nvSpPr>
-          <p:cNvPr id="4" name="TextBox 3"/>
+          <p:cNvPr id="6" name="TextBox 5"/>
           <p:cNvSpPr txBox="1"/>
           <p:nvPr/>
         </p:nvSpPr>
         <p:spPr>
           <a:xfrm>
-            <a:off x="786384" y="1005840"/>
-            <a:ext cx="10241280" cy="365760"/>
+            <a:off x="813816" y="932688"/>
+            <a:ext cx="10424160" cy="365760"/>
           </a:xfrm>
           <a:prstGeom prst="rect">
             <a:avLst/>
@@ -3924,7 +4460,7 @@
           <a:p>
             <a:pPr algn="l">
               <a:lnSpc>
-                <a:spcPct val="112000"/>
+                <a:spcPct val="115000"/>
               </a:lnSpc>
             </a:pPr>
             <a:r>
@@ -3942,78 +4478,112 @@
       </p:sp>
       <p:sp>
         <p:nvSpPr>
-          <p:cNvPr id="5" name="TextBox 4"/>
-          <p:cNvSpPr txBox="1"/>
-          <p:nvPr/>
-        </p:nvSpPr>
-        <p:spPr>
-          <a:xfrm>
-            <a:off x="548640" y="6510528"/>
-            <a:ext cx="11094415" cy="274320"/>
+          <p:cNvPr id="7" name="Rectangle 6"/>
+          <p:cNvSpPr/>
+          <p:nvPr/>
+        </p:nvSpPr>
+        <p:spPr>
+          <a:xfrm>
+            <a:off x="566928" y="6547104"/>
+            <a:ext cx="182880" cy="25603"/>
           </a:xfrm>
           <a:prstGeom prst="rect">
             <a:avLst/>
           </a:prstGeom>
+          <a:solidFill>
+            <a:srgbClr val="4338CA"/>
+          </a:solidFill>
+          <a:ln>
+            <a:noFill/>
+          </a:ln>
+          <a:effectLst/>
+        </p:spPr>
+        <p:style>
+          <a:lnRef idx="1">
+            <a:schemeClr val="accent1"/>
+          </a:lnRef>
+          <a:fillRef idx="3">
+            <a:schemeClr val="accent1"/>
+          </a:fillRef>
+          <a:effectRef idx="2">
+            <a:schemeClr val="accent1"/>
+          </a:effectRef>
+          <a:fontRef idx="minor">
+            <a:schemeClr val="lt1"/>
+          </a:fontRef>
+        </p:style>
+        <p:txBody>
+          <a:bodyPr rtlCol="0" anchor="ctr"/>
+          <a:lstStyle/>
+          <a:p>
+            <a:pPr algn="ctr"/>
+          </a:p>
+        </p:txBody>
+      </p:sp>
+      <p:sp>
+        <p:nvSpPr>
+          <p:cNvPr id="8" name="TextBox 7"/>
+          <p:cNvSpPr txBox="1"/>
+          <p:nvPr/>
+        </p:nvSpPr>
+        <p:spPr>
+          <a:xfrm>
+            <a:off x="841248" y="6446520"/>
+            <a:ext cx="11057839" cy="274320"/>
+          </a:xfrm>
+          <a:prstGeom prst="rect">
+            <a:avLst/>
+          </a:prstGeom>
           <a:noFill/>
         </p:spPr>
         <p:txBody>
-          <a:bodyPr wrap="square" anchor="t" lIns="0" rIns="0" tIns="0" bIns="0">
+          <a:bodyPr wrap="square" anchor="ctr" lIns="0" rIns="0" tIns="0" bIns="0">
             <a:spAutoFit/>
           </a:bodyPr>
           <a:lstStyle/>
           <a:p>
             <a:pPr algn="l">
               <a:lnSpc>
-                <a:spcPct val="112000"/>
+                <a:spcPct val="114000"/>
               </a:lnSpc>
             </a:pPr>
             <a:r>
-              <a:rPr sz="950" b="0" i="0">
-                <a:solidFill>
-                  <a:srgbClr val="94A3B8"/>
+              <a:rPr sz="900" b="0" i="0">
+                <a:solidFill>
+                  <a:srgbClr val="9AA4B2"/>
                 </a:solidFill>
                 <a:latin typeface="맑은 고딕"/>
                 <a:ea typeface="맑은 고딕"/>
               </a:rPr>
               <a:t>AI 시대 마케팅, 누가 살아남을까? — 6주 실무 스터디   |   4회차 · GEO 인용되는 브랜드</a:t>
-            </a:r>
-            <a:r>
-              <a:rPr sz="950" b="0" i="0">
-                <a:solidFill>
-                  <a:srgbClr val="94A3B8"/>
-                </a:solidFill>
-                <a:latin typeface="맑은 고딕"/>
-                <a:ea typeface="맑은 고딕"/>
-              </a:rPr>
-              <a:t/>
             </a:r>
           </a:p>
         </p:txBody>
       </p:sp>
       <p:graphicFrame>
         <p:nvGraphicFramePr>
-          <p:cNvPr id="6" name="Table 5"/>
+          <p:cNvPr id="9" name="Table 8"/>
           <p:cNvGraphicFramePr>
             <a:graphicFrameLocks noGrp="1"/>
           </p:cNvGraphicFramePr>
           <p:nvPr/>
         </p:nvGraphicFramePr>
         <p:xfrm>
-          <a:off x="548640" y="1517904"/>
-          <a:ext cx="11094413" cy="1456944"/>
+          <a:off x="566928" y="1499616"/>
+          <a:ext cx="11057837" cy="1427480"/>
         </p:xfrm>
         <a:graphic>
           <a:graphicData uri="http://schemas.openxmlformats.org/drawingml/2006/table">
             <a:tbl>
-              <a:tblPr firstRow="1" bandRow="1">
+              <a:tblPr>
                 <a:tableStyleId>{5C22544A-7EE6-4342-B048-85BDC9FD1C3A}</a:tableStyleId>
               </a:tblPr>
               <a:tblGrid>
-                <a:gridCol w="2750681"/>
-                <a:gridCol w="5959809"/>
-                <a:gridCol w="2383923"/>
+                <a:gridCol w="2741612"/>
+                <a:gridCol w="5940161"/>
+                <a:gridCol w="2376064"/>
               </a:tblGrid>
-              <a:tr h="304800">
+              <a:tr h="330200">
                 <a:tc>
                   <a:txBody>
                     <a:bodyPr wrap="square"/>
@@ -4021,7 +4591,7 @@
                     <a:p>
                       <a:pPr algn="ctr">
                         <a:lnSpc>
-                          <a:spcPct val="108000"/>
+                          <a:spcPct val="110000"/>
                         </a:lnSpc>
                       </a:pPr>
                       <a:r>
@@ -4036,9 +4606,9 @@
                       </a:r>
                     </a:p>
                   </a:txBody>
-                  <a:tcPr anchor="ctr" marL="73152" marR="73152" marT="27432" marB="27432">
+                  <a:tcPr anchor="ctr" marL="100584" marR="91440" marT="41148" marB="41148">
                     <a:solidFill>
-                      <a:srgbClr val="14213D"/>
+                      <a:srgbClr val="4338CA"/>
                     </a:solidFill>
                   </a:tcPr>
                 </a:tc>
@@ -4049,7 +4619,7 @@
                     <a:p>
                       <a:pPr algn="ctr">
                         <a:lnSpc>
-                          <a:spcPct val="108000"/>
+                          <a:spcPct val="110000"/>
                         </a:lnSpc>
                       </a:pPr>
                       <a:r>
@@ -4064,9 +4634,9 @@
                       </a:r>
                     </a:p>
                   </a:txBody>
-                  <a:tcPr anchor="ctr" marL="73152" marR="73152" marT="27432" marB="27432">
+                  <a:tcPr anchor="ctr" marL="100584" marR="91440" marT="41148" marB="41148">
                     <a:solidFill>
-                      <a:srgbClr val="14213D"/>
+                      <a:srgbClr val="4338CA"/>
                     </a:solidFill>
                   </a:tcPr>
                 </a:tc>
@@ -4077,7 +4647,7 @@
                     <a:p>
                       <a:pPr algn="ctr">
                         <a:lnSpc>
-                          <a:spcPct val="108000"/>
+                          <a:spcPct val="110000"/>
                         </a:lnSpc>
                       </a:pPr>
                       <a:r>
@@ -4092,14 +4662,14 @@
                       </a:r>
                     </a:p>
                   </a:txBody>
-                  <a:tcPr anchor="ctr" marL="73152" marR="73152" marT="27432" marB="27432">
+                  <a:tcPr anchor="ctr" marL="100584" marR="91440" marT="41148" marB="41148">
                     <a:solidFill>
-                      <a:srgbClr val="14213D"/>
+                      <a:srgbClr val="4338CA"/>
                     </a:solidFill>
                   </a:tcPr>
                 </a:tc>
               </a:tr>
-              <a:tr h="384048">
+              <a:tr h="365760">
                 <a:tc>
                   <a:txBody>
                     <a:bodyPr wrap="square"/>
@@ -4107,13 +4677,13 @@
                     <a:p>
                       <a:pPr algn="l">
                         <a:lnSpc>
-                          <a:spcPct val="108000"/>
+                          <a:spcPct val="110000"/>
                         </a:lnSpc>
                       </a:pPr>
                       <a:r>
                         <a:rPr sz="1200" b="1" i="0">
                           <a:solidFill>
-                            <a:srgbClr val="14213D"/>
+                            <a:srgbClr val="111927"/>
                           </a:solidFill>
                           <a:latin typeface="맑은 고딕"/>
                           <a:ea typeface="맑은 고딕"/>
@@ -4122,7 +4692,7 @@
                       </a:r>
                     </a:p>
                   </a:txBody>
-                  <a:tcPr anchor="ctr" marL="73152" marR="73152" marT="27432" marB="27432">
+                  <a:tcPr anchor="ctr" marL="100584" marR="91440" marT="41148" marB="41148">
                     <a:solidFill>
                       <a:srgbClr val="FFFFFF"/>
                     </a:solidFill>
@@ -4135,7 +4705,7 @@
                     <a:p>
                       <a:pPr algn="l">
                         <a:lnSpc>
-                          <a:spcPct val="108000"/>
+                          <a:spcPct val="110000"/>
                         </a:lnSpc>
                       </a:pPr>
                       <a:r>
@@ -4150,7 +4720,7 @@
                       </a:r>
                     </a:p>
                   </a:txBody>
-                  <a:tcPr anchor="ctr" marL="73152" marR="73152" marT="27432" marB="27432">
+                  <a:tcPr anchor="ctr" marL="100584" marR="91440" marT="41148" marB="41148">
                     <a:solidFill>
                       <a:srgbClr val="FFFFFF"/>
                     </a:solidFill>
@@ -4163,7 +4733,7 @@
                     <a:p>
                       <a:pPr algn="l">
                         <a:lnSpc>
-                          <a:spcPct val="108000"/>
+                          <a:spcPct val="110000"/>
                         </a:lnSpc>
                       </a:pPr>
                       <a:r>
@@ -4178,14 +4748,14 @@
                       </a:r>
                     </a:p>
                   </a:txBody>
-                  <a:tcPr anchor="ctr" marL="73152" marR="73152" marT="27432" marB="27432">
+                  <a:tcPr anchor="ctr" marL="100584" marR="91440" marT="41148" marB="41148">
                     <a:solidFill>
                       <a:srgbClr val="FFFFFF"/>
                     </a:solidFill>
                   </a:tcPr>
                 </a:tc>
               </a:tr>
-              <a:tr h="384048">
+              <a:tr h="365760">
                 <a:tc>
                   <a:txBody>
                     <a:bodyPr wrap="square"/>
@@ -4193,13 +4763,13 @@
                     <a:p>
                       <a:pPr algn="l">
                         <a:lnSpc>
-                          <a:spcPct val="108000"/>
+                          <a:spcPct val="110000"/>
                         </a:lnSpc>
                       </a:pPr>
                       <a:r>
                         <a:rPr sz="1200" b="1" i="0">
                           <a:solidFill>
-                            <a:srgbClr val="14213D"/>
+                            <a:srgbClr val="111927"/>
                           </a:solidFill>
                           <a:latin typeface="맑은 고딕"/>
                           <a:ea typeface="맑은 고딕"/>
@@ -4208,9 +4778,9 @@
                       </a:r>
                     </a:p>
                   </a:txBody>
-                  <a:tcPr anchor="ctr" marL="73152" marR="73152" marT="27432" marB="27432">
+                  <a:tcPr anchor="ctr" marL="100584" marR="91440" marT="41148" marB="41148">
                     <a:solidFill>
-                      <a:srgbClr val="EEF2F7"/>
+                      <a:srgbClr val="EEF0FB"/>
                     </a:solidFill>
                   </a:tcPr>
                 </a:tc>
@@ -4221,7 +4791,7 @@
                     <a:p>
                       <a:pPr algn="l">
                         <a:lnSpc>
-                          <a:spcPct val="108000"/>
+                          <a:spcPct val="110000"/>
                         </a:lnSpc>
                       </a:pPr>
                       <a:r>
@@ -4236,9 +4806,9 @@
                       </a:r>
                     </a:p>
                   </a:txBody>
-                  <a:tcPr anchor="ctr" marL="73152" marR="73152" marT="27432" marB="27432">
+                  <a:tcPr anchor="ctr" marL="100584" marR="91440" marT="41148" marB="41148">
                     <a:solidFill>
-                      <a:srgbClr val="EEF2F7"/>
+                      <a:srgbClr val="EEF0FB"/>
                     </a:solidFill>
                   </a:tcPr>
                 </a:tc>
@@ -4249,7 +4819,7 @@
                     <a:p>
                       <a:pPr algn="l">
                         <a:lnSpc>
-                          <a:spcPct val="108000"/>
+                          <a:spcPct val="110000"/>
                         </a:lnSpc>
                       </a:pPr>
                       <a:r>
@@ -4264,14 +4834,14 @@
                       </a:r>
                     </a:p>
                   </a:txBody>
-                  <a:tcPr anchor="ctr" marL="73152" marR="73152" marT="27432" marB="27432">
+                  <a:tcPr anchor="ctr" marL="100584" marR="91440" marT="41148" marB="41148">
                     <a:solidFill>
-                      <a:srgbClr val="EEF2F7"/>
+                      <a:srgbClr val="EEF0FB"/>
                     </a:solidFill>
                   </a:tcPr>
                 </a:tc>
               </a:tr>
-              <a:tr h="384048">
+              <a:tr h="365760">
                 <a:tc>
                   <a:txBody>
                     <a:bodyPr wrap="square"/>
@@ -4279,13 +4849,13 @@
                     <a:p>
                       <a:pPr algn="l">
                         <a:lnSpc>
-                          <a:spcPct val="108000"/>
+                          <a:spcPct val="110000"/>
                         </a:lnSpc>
                       </a:pPr>
                       <a:r>
                         <a:rPr sz="1200" b="1" i="0">
                           <a:solidFill>
-                            <a:srgbClr val="14213D"/>
+                            <a:srgbClr val="111927"/>
                           </a:solidFill>
                           <a:latin typeface="맑은 고딕"/>
                           <a:ea typeface="맑은 고딕"/>
@@ -4294,7 +4864,7 @@
                       </a:r>
                     </a:p>
                   </a:txBody>
-                  <a:tcPr anchor="ctr" marL="73152" marR="73152" marT="27432" marB="27432">
+                  <a:tcPr anchor="ctr" marL="100584" marR="91440" marT="41148" marB="41148">
                     <a:solidFill>
                       <a:srgbClr val="FFFFFF"/>
                     </a:solidFill>
@@ -4307,7 +4877,7 @@
                     <a:p>
                       <a:pPr algn="l">
                         <a:lnSpc>
-                          <a:spcPct val="108000"/>
+                          <a:spcPct val="110000"/>
                         </a:lnSpc>
                       </a:pPr>
                       <a:r>
@@ -4322,7 +4892,7 @@
                       </a:r>
                     </a:p>
                   </a:txBody>
-                  <a:tcPr anchor="ctr" marL="73152" marR="73152" marT="27432" marB="27432">
+                  <a:tcPr anchor="ctr" marL="100584" marR="91440" marT="41148" marB="41148">
                     <a:solidFill>
                       <a:srgbClr val="FFFFFF"/>
                     </a:solidFill>
@@ -4335,7 +4905,7 @@
                     <a:p>
                       <a:pPr algn="l">
                         <a:lnSpc>
-                          <a:spcPct val="108000"/>
+                          <a:spcPct val="110000"/>
                         </a:lnSpc>
                       </a:pPr>
                       <a:r>
@@ -4350,7 +4920,7 @@
                       </a:r>
                     </a:p>
                   </a:txBody>
-                  <a:tcPr anchor="ctr" marL="73152" marR="73152" marT="27432" marB="27432">
+                  <a:tcPr anchor="ctr" marL="100584" marR="91440" marT="41148" marB="41148">
                     <a:solidFill>
                       <a:srgbClr val="FFFFFF"/>
                     </a:solidFill>
@@ -4387,14 +4957,14 @@
         </p:nvSpPr>
         <p:spPr>
           <a:xfrm>
-            <a:off x="548640" y="475488"/>
-            <a:ext cx="91440" cy="475488"/>
+            <a:off x="0" y="0"/>
+            <a:ext cx="12191695" cy="6858000"/>
           </a:xfrm>
           <a:prstGeom prst="rect">
             <a:avLst/>
           </a:prstGeom>
           <a:solidFill>
-            <a:srgbClr val="2563EB"/>
+            <a:srgbClr val="F6F7F9"/>
           </a:solidFill>
           <a:ln>
             <a:noFill/>
@@ -4425,14 +4995,104 @@
       </p:sp>
       <p:sp>
         <p:nvSpPr>
-          <p:cNvPr id="3" name="TextBox 2"/>
+          <p:cNvPr id="3" name="Rectangle 2"/>
+          <p:cNvSpPr/>
+          <p:nvPr/>
+        </p:nvSpPr>
+        <p:spPr>
+          <a:xfrm>
+            <a:off x="0" y="0"/>
+            <a:ext cx="12191695" cy="128016"/>
+          </a:xfrm>
+          <a:prstGeom prst="rect">
+            <a:avLst/>
+          </a:prstGeom>
+          <a:solidFill>
+            <a:srgbClr val="4338CA"/>
+          </a:solidFill>
+          <a:ln>
+            <a:noFill/>
+          </a:ln>
+          <a:effectLst/>
+        </p:spPr>
+        <p:style>
+          <a:lnRef idx="1">
+            <a:schemeClr val="accent1"/>
+          </a:lnRef>
+          <a:fillRef idx="3">
+            <a:schemeClr val="accent1"/>
+          </a:fillRef>
+          <a:effectRef idx="2">
+            <a:schemeClr val="accent1"/>
+          </a:effectRef>
+          <a:fontRef idx="minor">
+            <a:schemeClr val="lt1"/>
+          </a:fontRef>
+        </p:style>
+        <p:txBody>
+          <a:bodyPr rtlCol="0" anchor="ctr"/>
+          <a:lstStyle/>
+          <a:p>
+            <a:pPr algn="ctr"/>
+          </a:p>
+        </p:txBody>
+      </p:sp>
+      <p:sp>
+        <p:nvSpPr>
+          <p:cNvPr id="4" name="Rounded Rectangle 3"/>
+          <p:cNvSpPr/>
+          <p:nvPr/>
+        </p:nvSpPr>
+        <p:spPr>
+          <a:xfrm>
+            <a:off x="566928" y="457200"/>
+            <a:ext cx="82296" cy="457200"/>
+          </a:xfrm>
+          <a:prstGeom prst="roundRect">
+            <a:avLst>
+              <a:gd name="adj" fmla="val 50000"/>
+            </a:avLst>
+          </a:prstGeom>
+          <a:solidFill>
+            <a:srgbClr val="4338CA"/>
+          </a:solidFill>
+          <a:ln>
+            <a:noFill/>
+          </a:ln>
+          <a:effectLst/>
+        </p:spPr>
+        <p:style>
+          <a:lnRef idx="1">
+            <a:schemeClr val="accent1"/>
+          </a:lnRef>
+          <a:fillRef idx="3">
+            <a:schemeClr val="accent1"/>
+          </a:fillRef>
+          <a:effectRef idx="2">
+            <a:schemeClr val="accent1"/>
+          </a:effectRef>
+          <a:fontRef idx="minor">
+            <a:schemeClr val="lt1"/>
+          </a:fontRef>
+        </p:style>
+        <p:txBody>
+          <a:bodyPr rtlCol="0" anchor="ctr"/>
+          <a:lstStyle/>
+          <a:p>
+            <a:pPr algn="ctr"/>
+          </a:p>
+        </p:txBody>
+      </p:sp>
+      <p:sp>
+        <p:nvSpPr>
+          <p:cNvPr id="5" name="TextBox 4"/>
           <p:cNvSpPr txBox="1"/>
           <p:nvPr/>
         </p:nvSpPr>
         <p:spPr>
           <a:xfrm>
-            <a:off x="786384" y="402336"/>
-            <a:ext cx="9326880" cy="640080"/>
+            <a:off x="804672" y="384048"/>
+            <a:ext cx="9144000" cy="603504"/>
           </a:xfrm>
           <a:prstGeom prst="rect">
             <a:avLst/>
@@ -4447,13 +5107,13 @@
           <a:p>
             <a:pPr algn="l">
               <a:lnSpc>
-                <a:spcPct val="112000"/>
+                <a:spcPct val="114000"/>
               </a:lnSpc>
             </a:pPr>
             <a:r>
-              <a:rPr sz="2300" b="1" i="0">
-                <a:solidFill>
-                  <a:srgbClr val="14213D"/>
+              <a:rPr sz="2200" b="1" i="0">
+                <a:solidFill>
+                  <a:srgbClr val="111927"/>
                 </a:solidFill>
                 <a:latin typeface="맑은 고딕"/>
                 <a:ea typeface="맑은 고딕"/>
@@ -4465,14 +5125,98 @@
       </p:sp>
       <p:sp>
         <p:nvSpPr>
-          <p:cNvPr id="4" name="TextBox 3"/>
+          <p:cNvPr id="6" name="Rectangle 5"/>
+          <p:cNvSpPr/>
+          <p:nvPr/>
+        </p:nvSpPr>
+        <p:spPr>
+          <a:xfrm>
+            <a:off x="566928" y="6547104"/>
+            <a:ext cx="182880" cy="25603"/>
+          </a:xfrm>
+          <a:prstGeom prst="rect">
+            <a:avLst/>
+          </a:prstGeom>
+          <a:solidFill>
+            <a:srgbClr val="4338CA"/>
+          </a:solidFill>
+          <a:ln>
+            <a:noFill/>
+          </a:ln>
+          <a:effectLst/>
+        </p:spPr>
+        <p:style>
+          <a:lnRef idx="1">
+            <a:schemeClr val="accent1"/>
+          </a:lnRef>
+          <a:fillRef idx="3">
+            <a:schemeClr val="accent1"/>
+          </a:fillRef>
+          <a:effectRef idx="2">
+            <a:schemeClr val="accent1"/>
+          </a:effectRef>
+          <a:fontRef idx="minor">
+            <a:schemeClr val="lt1"/>
+          </a:fontRef>
+        </p:style>
+        <p:txBody>
+          <a:bodyPr rtlCol="0" anchor="ctr"/>
+          <a:lstStyle/>
+          <a:p>
+            <a:pPr algn="ctr"/>
+          </a:p>
+        </p:txBody>
+      </p:sp>
+      <p:sp>
+        <p:nvSpPr>
+          <p:cNvPr id="7" name="TextBox 6"/>
           <p:cNvSpPr txBox="1"/>
           <p:nvPr/>
         </p:nvSpPr>
         <p:spPr>
           <a:xfrm>
-            <a:off x="548640" y="6510528"/>
-            <a:ext cx="11094415" cy="274320"/>
+            <a:off x="841248" y="6446520"/>
+            <a:ext cx="11057839" cy="274320"/>
+          </a:xfrm>
+          <a:prstGeom prst="rect">
+            <a:avLst/>
+          </a:prstGeom>
+          <a:noFill/>
+        </p:spPr>
+        <p:txBody>
+          <a:bodyPr wrap="square" anchor="ctr" lIns="0" rIns="0" tIns="0" bIns="0">
+            <a:spAutoFit/>
+          </a:bodyPr>
+          <a:lstStyle/>
+          <a:p>
+            <a:pPr algn="l">
+              <a:lnSpc>
+                <a:spcPct val="114000"/>
+              </a:lnSpc>
+            </a:pPr>
+            <a:r>
+              <a:rPr sz="900" b="0" i="0">
+                <a:solidFill>
+                  <a:srgbClr val="9AA4B2"/>
+                </a:solidFill>
+                <a:latin typeface="맑은 고딕"/>
+                <a:ea typeface="맑은 고딕"/>
+              </a:rPr>
+              <a:t>AI 시대 마케팅, 누가 살아남을까? — 6주 실무 스터디   |   4회차 · GEO 인용되는 브랜드</a:t>
+            </a:r>
+          </a:p>
+        </p:txBody>
+      </p:sp>
+      <p:sp>
+        <p:nvSpPr>
+          <p:cNvPr id="8" name="TextBox 7"/>
+          <p:cNvSpPr txBox="1"/>
+          <p:nvPr/>
+        </p:nvSpPr>
+        <p:spPr>
+          <a:xfrm>
+            <a:off x="713232" y="1225295"/>
+            <a:ext cx="10607040" cy="4709159"/>
           </a:xfrm>
           <a:prstGeom prst="rect">
             <a:avLst/>
@@ -4487,79 +5231,29 @@
           <a:p>
             <a:pPr algn="l">
               <a:lnSpc>
-                <a:spcPct val="112000"/>
-              </a:lnSpc>
-            </a:pPr>
-            <a:r>
-              <a:rPr sz="950" b="0" i="0">
-                <a:solidFill>
-                  <a:srgbClr val="94A3B8"/>
-                </a:solidFill>
-                <a:latin typeface="맑은 고딕"/>
-                <a:ea typeface="맑은 고딕"/>
-              </a:rPr>
-              <a:t>AI 시대 마케팅, 누가 살아남을까? — 6주 실무 스터디   |   4회차 · GEO 인용되는 브랜드</a:t>
-            </a:r>
-            <a:r>
-              <a:rPr sz="950" b="0" i="0">
-                <a:solidFill>
-                  <a:srgbClr val="94A3B8"/>
-                </a:solidFill>
-                <a:latin typeface="맑은 고딕"/>
-                <a:ea typeface="맑은 고딕"/>
-              </a:rPr>
-              <a:t/>
-            </a:r>
-          </a:p>
-        </p:txBody>
-      </p:sp>
-      <p:sp>
-        <p:nvSpPr>
-          <p:cNvPr id="5" name="TextBox 4"/>
-          <p:cNvSpPr txBox="1"/>
-          <p:nvPr/>
-        </p:nvSpPr>
-        <p:spPr>
-          <a:xfrm>
-            <a:off x="685800" y="1225295"/>
-            <a:ext cx="10698480" cy="4736592"/>
-          </a:xfrm>
-          <a:prstGeom prst="rect">
-            <a:avLst/>
-          </a:prstGeom>
-          <a:noFill/>
-        </p:spPr>
-        <p:txBody>
-          <a:bodyPr wrap="square" anchor="t" lIns="0" rIns="0" tIns="0" bIns="0">
-            <a:spAutoFit/>
-          </a:bodyPr>
-          <a:lstStyle/>
-          <a:p>
-            <a:pPr algn="l">
-              <a:lnSpc>
-                <a:spcPct val="118000"/>
+                <a:spcPct val="120000"/>
               </a:lnSpc>
               <a:spcBef>
-                <a:spcPts val="600"/>
+                <a:spcPts val="700"/>
               </a:spcBef>
               <a:spcAft>
                 <a:spcPts val="500"/>
               </a:spcAft>
             </a:pPr>
             <a:r>
-              <a:rPr sz="1150" b="0" i="0">
-                <a:solidFill>
-                  <a:srgbClr val="2563EB"/>
-                </a:solidFill>
-                <a:latin typeface="맑은 고딕"/>
-                <a:ea typeface="맑은 고딕"/>
-              </a:rPr>
-              <a:t>●  </a:t>
+              <a:rPr sz="950" b="0" i="0">
+                <a:solidFill>
+                  <a:srgbClr val="4338CA"/>
+                </a:solidFill>
+                <a:latin typeface="맑은 고딕"/>
+                <a:ea typeface="맑은 고딕"/>
+              </a:rPr>
+              <a:t>■  </a:t>
             </a:r>
             <a:r>
               <a:rPr sz="1700" b="1" i="0">
                 <a:solidFill>
-                  <a:srgbClr val="1F2937"/>
+                  <a:srgbClr val="111927"/>
                 </a:solidFill>
                 <a:latin typeface="맑은 고딕"/>
                 <a:ea typeface="맑은 고딕"/>
@@ -4570,29 +5264,29 @@
           <a:p>
             <a:pPr algn="l">
               <a:lnSpc>
-                <a:spcPct val="118000"/>
+                <a:spcPct val="120000"/>
               </a:lnSpc>
               <a:spcBef>
-                <a:spcPts val="600"/>
+                <a:spcPts val="700"/>
               </a:spcBef>
               <a:spcAft>
                 <a:spcPts val="500"/>
               </a:spcAft>
             </a:pPr>
             <a:r>
-              <a:rPr sz="1150" b="0" i="0">
-                <a:solidFill>
-                  <a:srgbClr val="2563EB"/>
-                </a:solidFill>
-                <a:latin typeface="맑은 고딕"/>
-                <a:ea typeface="맑은 고딕"/>
-              </a:rPr>
-              <a:t>●  </a:t>
+              <a:rPr sz="950" b="0" i="0">
+                <a:solidFill>
+                  <a:srgbClr val="4338CA"/>
+                </a:solidFill>
+                <a:latin typeface="맑은 고딕"/>
+                <a:ea typeface="맑은 고딕"/>
+              </a:rPr>
+              <a:t>■  </a:t>
             </a:r>
             <a:r>
               <a:rPr sz="1700" b="1" i="0">
                 <a:solidFill>
-                  <a:srgbClr val="1F2937"/>
+                  <a:srgbClr val="111927"/>
                 </a:solidFill>
                 <a:latin typeface="맑은 고딕"/>
                 <a:ea typeface="맑은 고딕"/>
@@ -4603,29 +5297,29 @@
           <a:p>
             <a:pPr algn="l">
               <a:lnSpc>
-                <a:spcPct val="118000"/>
+                <a:spcPct val="120000"/>
               </a:lnSpc>
               <a:spcBef>
-                <a:spcPts val="600"/>
+                <a:spcPts val="700"/>
               </a:spcBef>
               <a:spcAft>
                 <a:spcPts val="500"/>
               </a:spcAft>
             </a:pPr>
             <a:r>
-              <a:rPr sz="1150" b="0" i="0">
-                <a:solidFill>
-                  <a:srgbClr val="2563EB"/>
-                </a:solidFill>
-                <a:latin typeface="맑은 고딕"/>
-                <a:ea typeface="맑은 고딕"/>
-              </a:rPr>
-              <a:t>●  </a:t>
+              <a:rPr sz="950" b="0" i="0">
+                <a:solidFill>
+                  <a:srgbClr val="4338CA"/>
+                </a:solidFill>
+                <a:latin typeface="맑은 고딕"/>
+                <a:ea typeface="맑은 고딕"/>
+              </a:rPr>
+              <a:t>■  </a:t>
             </a:r>
             <a:r>
               <a:rPr sz="1700" b="1" i="0">
                 <a:solidFill>
-                  <a:srgbClr val="1F2937"/>
+                  <a:srgbClr val="111927"/>
                 </a:solidFill>
                 <a:latin typeface="맑은 고딕"/>
                 <a:ea typeface="맑은 고딕"/>
@@ -4661,14 +5355,14 @@
         </p:nvSpPr>
         <p:spPr>
           <a:xfrm>
-            <a:off x="548640" y="475488"/>
-            <a:ext cx="91440" cy="475488"/>
+            <a:off x="0" y="0"/>
+            <a:ext cx="12191695" cy="6858000"/>
           </a:xfrm>
           <a:prstGeom prst="rect">
             <a:avLst/>
           </a:prstGeom>
           <a:solidFill>
-            <a:srgbClr val="2563EB"/>
+            <a:srgbClr val="F6F7F9"/>
           </a:solidFill>
           <a:ln>
             <a:noFill/>
@@ -4699,14 +5393,104 @@
       </p:sp>
       <p:sp>
         <p:nvSpPr>
-          <p:cNvPr id="3" name="TextBox 2"/>
+          <p:cNvPr id="3" name="Rectangle 2"/>
+          <p:cNvSpPr/>
+          <p:nvPr/>
+        </p:nvSpPr>
+        <p:spPr>
+          <a:xfrm>
+            <a:off x="0" y="0"/>
+            <a:ext cx="12191695" cy="128016"/>
+          </a:xfrm>
+          <a:prstGeom prst="rect">
+            <a:avLst/>
+          </a:prstGeom>
+          <a:solidFill>
+            <a:srgbClr val="4338CA"/>
+          </a:solidFill>
+          <a:ln>
+            <a:noFill/>
+          </a:ln>
+          <a:effectLst/>
+        </p:spPr>
+        <p:style>
+          <a:lnRef idx="1">
+            <a:schemeClr val="accent1"/>
+          </a:lnRef>
+          <a:fillRef idx="3">
+            <a:schemeClr val="accent1"/>
+          </a:fillRef>
+          <a:effectRef idx="2">
+            <a:schemeClr val="accent1"/>
+          </a:effectRef>
+          <a:fontRef idx="minor">
+            <a:schemeClr val="lt1"/>
+          </a:fontRef>
+        </p:style>
+        <p:txBody>
+          <a:bodyPr rtlCol="0" anchor="ctr"/>
+          <a:lstStyle/>
+          <a:p>
+            <a:pPr algn="ctr"/>
+          </a:p>
+        </p:txBody>
+      </p:sp>
+      <p:sp>
+        <p:nvSpPr>
+          <p:cNvPr id="4" name="Rounded Rectangle 3"/>
+          <p:cNvSpPr/>
+          <p:nvPr/>
+        </p:nvSpPr>
+        <p:spPr>
+          <a:xfrm>
+            <a:off x="566928" y="457200"/>
+            <a:ext cx="82296" cy="457200"/>
+          </a:xfrm>
+          <a:prstGeom prst="roundRect">
+            <a:avLst>
+              <a:gd name="adj" fmla="val 50000"/>
+            </a:avLst>
+          </a:prstGeom>
+          <a:solidFill>
+            <a:srgbClr val="4338CA"/>
+          </a:solidFill>
+          <a:ln>
+            <a:noFill/>
+          </a:ln>
+          <a:effectLst/>
+        </p:spPr>
+        <p:style>
+          <a:lnRef idx="1">
+            <a:schemeClr val="accent1"/>
+          </a:lnRef>
+          <a:fillRef idx="3">
+            <a:schemeClr val="accent1"/>
+          </a:fillRef>
+          <a:effectRef idx="2">
+            <a:schemeClr val="accent1"/>
+          </a:effectRef>
+          <a:fontRef idx="minor">
+            <a:schemeClr val="lt1"/>
+          </a:fontRef>
+        </p:style>
+        <p:txBody>
+          <a:bodyPr rtlCol="0" anchor="ctr"/>
+          <a:lstStyle/>
+          <a:p>
+            <a:pPr algn="ctr"/>
+          </a:p>
+        </p:txBody>
+      </p:sp>
+      <p:sp>
+        <p:nvSpPr>
+          <p:cNvPr id="5" name="TextBox 4"/>
           <p:cNvSpPr txBox="1"/>
           <p:nvPr/>
         </p:nvSpPr>
         <p:spPr>
           <a:xfrm>
-            <a:off x="786384" y="402336"/>
-            <a:ext cx="9326880" cy="640080"/>
+            <a:off x="804672" y="384048"/>
+            <a:ext cx="9144000" cy="603504"/>
           </a:xfrm>
           <a:prstGeom prst="rect">
             <a:avLst/>
@@ -4721,13 +5505,13 @@
           <a:p>
             <a:pPr algn="l">
               <a:lnSpc>
-                <a:spcPct val="112000"/>
+                <a:spcPct val="114000"/>
               </a:lnSpc>
             </a:pPr>
             <a:r>
-              <a:rPr sz="2300" b="1" i="0">
-                <a:solidFill>
-                  <a:srgbClr val="14213D"/>
+              <a:rPr sz="2200" b="1" i="0">
+                <a:solidFill>
+                  <a:srgbClr val="111927"/>
                 </a:solidFill>
                 <a:latin typeface="맑은 고딕"/>
                 <a:ea typeface="맑은 고딕"/>
@@ -4739,14 +5523,98 @@
       </p:sp>
       <p:sp>
         <p:nvSpPr>
-          <p:cNvPr id="4" name="TextBox 3"/>
+          <p:cNvPr id="6" name="Rectangle 5"/>
+          <p:cNvSpPr/>
+          <p:nvPr/>
+        </p:nvSpPr>
+        <p:spPr>
+          <a:xfrm>
+            <a:off x="566928" y="6547104"/>
+            <a:ext cx="182880" cy="25603"/>
+          </a:xfrm>
+          <a:prstGeom prst="rect">
+            <a:avLst/>
+          </a:prstGeom>
+          <a:solidFill>
+            <a:srgbClr val="4338CA"/>
+          </a:solidFill>
+          <a:ln>
+            <a:noFill/>
+          </a:ln>
+          <a:effectLst/>
+        </p:spPr>
+        <p:style>
+          <a:lnRef idx="1">
+            <a:schemeClr val="accent1"/>
+          </a:lnRef>
+          <a:fillRef idx="3">
+            <a:schemeClr val="accent1"/>
+          </a:fillRef>
+          <a:effectRef idx="2">
+            <a:schemeClr val="accent1"/>
+          </a:effectRef>
+          <a:fontRef idx="minor">
+            <a:schemeClr val="lt1"/>
+          </a:fontRef>
+        </p:style>
+        <p:txBody>
+          <a:bodyPr rtlCol="0" anchor="ctr"/>
+          <a:lstStyle/>
+          <a:p>
+            <a:pPr algn="ctr"/>
+          </a:p>
+        </p:txBody>
+      </p:sp>
+      <p:sp>
+        <p:nvSpPr>
+          <p:cNvPr id="7" name="TextBox 6"/>
           <p:cNvSpPr txBox="1"/>
           <p:nvPr/>
         </p:nvSpPr>
         <p:spPr>
           <a:xfrm>
-            <a:off x="548640" y="6510528"/>
-            <a:ext cx="11094415" cy="274320"/>
+            <a:off x="841248" y="6446520"/>
+            <a:ext cx="11057839" cy="274320"/>
+          </a:xfrm>
+          <a:prstGeom prst="rect">
+            <a:avLst/>
+          </a:prstGeom>
+          <a:noFill/>
+        </p:spPr>
+        <p:txBody>
+          <a:bodyPr wrap="square" anchor="ctr" lIns="0" rIns="0" tIns="0" bIns="0">
+            <a:spAutoFit/>
+          </a:bodyPr>
+          <a:lstStyle/>
+          <a:p>
+            <a:pPr algn="l">
+              <a:lnSpc>
+                <a:spcPct val="114000"/>
+              </a:lnSpc>
+            </a:pPr>
+            <a:r>
+              <a:rPr sz="900" b="0" i="0">
+                <a:solidFill>
+                  <a:srgbClr val="9AA4B2"/>
+                </a:solidFill>
+                <a:latin typeface="맑은 고딕"/>
+                <a:ea typeface="맑은 고딕"/>
+              </a:rPr>
+              <a:t>AI 시대 마케팅, 누가 살아남을까? — 6주 실무 스터디   |   4회차 · GEO 인용되는 브랜드</a:t>
+            </a:r>
+          </a:p>
+        </p:txBody>
+      </p:sp>
+      <p:sp>
+        <p:nvSpPr>
+          <p:cNvPr id="8" name="TextBox 7"/>
+          <p:cNvSpPr txBox="1"/>
+          <p:nvPr/>
+        </p:nvSpPr>
+        <p:spPr>
+          <a:xfrm>
+            <a:off x="713232" y="1225295"/>
+            <a:ext cx="10607040" cy="4709159"/>
           </a:xfrm>
           <a:prstGeom prst="rect">
             <a:avLst/>
@@ -4761,79 +5629,29 @@
           <a:p>
             <a:pPr algn="l">
               <a:lnSpc>
-                <a:spcPct val="112000"/>
-              </a:lnSpc>
-            </a:pPr>
-            <a:r>
-              <a:rPr sz="950" b="0" i="0">
-                <a:solidFill>
-                  <a:srgbClr val="94A3B8"/>
-                </a:solidFill>
-                <a:latin typeface="맑은 고딕"/>
-                <a:ea typeface="맑은 고딕"/>
-              </a:rPr>
-              <a:t>AI 시대 마케팅, 누가 살아남을까? — 6주 실무 스터디   |   4회차 · GEO 인용되는 브랜드</a:t>
-            </a:r>
-            <a:r>
-              <a:rPr sz="950" b="0" i="0">
-                <a:solidFill>
-                  <a:srgbClr val="94A3B8"/>
-                </a:solidFill>
-                <a:latin typeface="맑은 고딕"/>
-                <a:ea typeface="맑은 고딕"/>
-              </a:rPr>
-              <a:t/>
-            </a:r>
-          </a:p>
-        </p:txBody>
-      </p:sp>
-      <p:sp>
-        <p:nvSpPr>
-          <p:cNvPr id="5" name="TextBox 4"/>
-          <p:cNvSpPr txBox="1"/>
-          <p:nvPr/>
-        </p:nvSpPr>
-        <p:spPr>
-          <a:xfrm>
-            <a:off x="685800" y="1225295"/>
-            <a:ext cx="10698480" cy="4736592"/>
-          </a:xfrm>
-          <a:prstGeom prst="rect">
-            <a:avLst/>
-          </a:prstGeom>
-          <a:noFill/>
-        </p:spPr>
-        <p:txBody>
-          <a:bodyPr wrap="square" anchor="t" lIns="0" rIns="0" tIns="0" bIns="0">
-            <a:spAutoFit/>
-          </a:bodyPr>
-          <a:lstStyle/>
-          <a:p>
-            <a:pPr algn="l">
-              <a:lnSpc>
-                <a:spcPct val="118000"/>
+                <a:spcPct val="120000"/>
               </a:lnSpc>
               <a:spcBef>
-                <a:spcPts val="600"/>
+                <a:spcPts val="700"/>
               </a:spcBef>
               <a:spcAft>
                 <a:spcPts val="500"/>
               </a:spcAft>
             </a:pPr>
             <a:r>
-              <a:rPr sz="1150" b="0" i="0">
-                <a:solidFill>
-                  <a:srgbClr val="2563EB"/>
-                </a:solidFill>
-                <a:latin typeface="맑은 고딕"/>
-                <a:ea typeface="맑은 고딕"/>
-              </a:rPr>
-              <a:t>●  </a:t>
+              <a:rPr sz="950" b="0" i="0">
+                <a:solidFill>
+                  <a:srgbClr val="4338CA"/>
+                </a:solidFill>
+                <a:latin typeface="맑은 고딕"/>
+                <a:ea typeface="맑은 고딕"/>
+              </a:rPr>
+              <a:t>■  </a:t>
             </a:r>
             <a:r>
               <a:rPr sz="1600" b="1" i="0">
                 <a:solidFill>
-                  <a:srgbClr val="1F2937"/>
+                  <a:srgbClr val="111927"/>
                 </a:solidFill>
                 <a:latin typeface="맑은 고딕"/>
                 <a:ea typeface="맑은 고딕"/>
@@ -4844,7 +5662,7 @@
           <a:p>
             <a:pPr algn="l">
               <a:lnSpc>
-                <a:spcPct val="115000"/>
+                <a:spcPct val="116000"/>
               </a:lnSpc>
               <a:spcBef>
                 <a:spcPts val="100"/>
@@ -4856,7 +5674,7 @@
             <a:r>
               <a:rPr sz="1250" b="0" i="0">
                 <a:solidFill>
-                  <a:srgbClr val="9CA3AF"/>
+                  <a:srgbClr val="9AA4B2"/>
                 </a:solidFill>
                 <a:latin typeface="맑은 고딕"/>
                 <a:ea typeface="맑은 고딕"/>
@@ -4866,7 +5684,7 @@
             <a:r>
               <a:rPr sz="1300" b="0" i="0">
                 <a:solidFill>
-                  <a:srgbClr val="4B5563"/>
+                  <a:srgbClr val="374151"/>
                 </a:solidFill>
                 <a:latin typeface="맑은 고딕"/>
                 <a:ea typeface="맑은 고딕"/>
@@ -4877,7 +5695,7 @@
           <a:p>
             <a:pPr algn="l">
               <a:lnSpc>
-                <a:spcPct val="115000"/>
+                <a:spcPct val="116000"/>
               </a:lnSpc>
               <a:spcBef>
                 <a:spcPts val="100"/>
@@ -4889,7 +5707,7 @@
             <a:r>
               <a:rPr sz="1250" b="0" i="0">
                 <a:solidFill>
-                  <a:srgbClr val="9CA3AF"/>
+                  <a:srgbClr val="9AA4B2"/>
                 </a:solidFill>
                 <a:latin typeface="맑은 고딕"/>
                 <a:ea typeface="맑은 고딕"/>
@@ -4899,7 +5717,7 @@
             <a:r>
               <a:rPr sz="1300" b="0" i="0">
                 <a:solidFill>
-                  <a:srgbClr val="4B5563"/>
+                  <a:srgbClr val="374151"/>
                 </a:solidFill>
                 <a:latin typeface="맑은 고딕"/>
                 <a:ea typeface="맑은 고딕"/>
@@ -4910,7 +5728,7 @@
           <a:p>
             <a:pPr algn="l">
               <a:lnSpc>
-                <a:spcPct val="115000"/>
+                <a:spcPct val="116000"/>
               </a:lnSpc>
               <a:spcBef>
                 <a:spcPts val="100"/>
@@ -4922,7 +5740,7 @@
             <a:r>
               <a:rPr sz="1250" b="0" i="0">
                 <a:solidFill>
-                  <a:srgbClr val="9CA3AF"/>
+                  <a:srgbClr val="9AA4B2"/>
                 </a:solidFill>
                 <a:latin typeface="맑은 고딕"/>
                 <a:ea typeface="맑은 고딕"/>
@@ -4932,7 +5750,7 @@
             <a:r>
               <a:rPr sz="1300" b="0" i="0">
                 <a:solidFill>
-                  <a:srgbClr val="4B5563"/>
+                  <a:srgbClr val="374151"/>
                 </a:solidFill>
                 <a:latin typeface="맑은 고딕"/>
                 <a:ea typeface="맑은 고딕"/>
@@ -4943,24 +5761,24 @@
           <a:p>
             <a:pPr algn="l">
               <a:lnSpc>
-                <a:spcPct val="118000"/>
+                <a:spcPct val="120000"/>
               </a:lnSpc>
               <a:spcBef>
-                <a:spcPts val="600"/>
+                <a:spcPts val="700"/>
               </a:spcBef>
               <a:spcAft>
                 <a:spcPts val="500"/>
               </a:spcAft>
             </a:pPr>
             <a:r>
-              <a:rPr sz="1150" b="0" i="0">
-                <a:solidFill>
-                  <a:srgbClr val="2563EB"/>
-                </a:solidFill>
-                <a:latin typeface="맑은 고딕"/>
-                <a:ea typeface="맑은 고딕"/>
-              </a:rPr>
-              <a:t>●  </a:t>
+              <a:rPr sz="950" b="0" i="0">
+                <a:solidFill>
+                  <a:srgbClr val="4338CA"/>
+                </a:solidFill>
+                <a:latin typeface="맑은 고딕"/>
+                <a:ea typeface="맑은 고딕"/>
+              </a:rPr>
+              <a:t>■  </a:t>
             </a:r>
             <a:r>
               <a:rPr sz="1550" b="0" i="0">
@@ -4976,7 +5794,7 @@
           <a:p>
             <a:pPr algn="l">
               <a:lnSpc>
-                <a:spcPct val="115000"/>
+                <a:spcPct val="116000"/>
               </a:lnSpc>
               <a:spcBef>
                 <a:spcPts val="100"/>
@@ -4988,7 +5806,7 @@
             <a:r>
               <a:rPr sz="1250" b="0" i="0">
                 <a:solidFill>
-                  <a:srgbClr val="9CA3AF"/>
+                  <a:srgbClr val="9AA4B2"/>
                 </a:solidFill>
                 <a:latin typeface="맑은 고딕"/>
                 <a:ea typeface="맑은 고딕"/>
@@ -4998,7 +5816,7 @@
             <a:r>
               <a:rPr sz="1300" b="0" i="0">
                 <a:solidFill>
-                  <a:srgbClr val="4B5563"/>
+                  <a:srgbClr val="374151"/>
                 </a:solidFill>
                 <a:latin typeface="맑은 고딕"/>
                 <a:ea typeface="맑은 고딕"/>
@@ -5034,14 +5852,14 @@
         </p:nvSpPr>
         <p:spPr>
           <a:xfrm>
-            <a:off x="548640" y="475488"/>
-            <a:ext cx="91440" cy="475488"/>
+            <a:off x="0" y="0"/>
+            <a:ext cx="12191695" cy="6858000"/>
           </a:xfrm>
           <a:prstGeom prst="rect">
             <a:avLst/>
           </a:prstGeom>
           <a:solidFill>
-            <a:srgbClr val="2563EB"/>
+            <a:srgbClr val="F6F7F9"/>
           </a:solidFill>
           <a:ln>
             <a:noFill/>
@@ -5072,14 +5890,104 @@
       </p:sp>
       <p:sp>
         <p:nvSpPr>
-          <p:cNvPr id="3" name="TextBox 2"/>
+          <p:cNvPr id="3" name="Rectangle 2"/>
+          <p:cNvSpPr/>
+          <p:nvPr/>
+        </p:nvSpPr>
+        <p:spPr>
+          <a:xfrm>
+            <a:off x="0" y="0"/>
+            <a:ext cx="12191695" cy="128016"/>
+          </a:xfrm>
+          <a:prstGeom prst="rect">
+            <a:avLst/>
+          </a:prstGeom>
+          <a:solidFill>
+            <a:srgbClr val="4338CA"/>
+          </a:solidFill>
+          <a:ln>
+            <a:noFill/>
+          </a:ln>
+          <a:effectLst/>
+        </p:spPr>
+        <p:style>
+          <a:lnRef idx="1">
+            <a:schemeClr val="accent1"/>
+          </a:lnRef>
+          <a:fillRef idx="3">
+            <a:schemeClr val="accent1"/>
+          </a:fillRef>
+          <a:effectRef idx="2">
+            <a:schemeClr val="accent1"/>
+          </a:effectRef>
+          <a:fontRef idx="minor">
+            <a:schemeClr val="lt1"/>
+          </a:fontRef>
+        </p:style>
+        <p:txBody>
+          <a:bodyPr rtlCol="0" anchor="ctr"/>
+          <a:lstStyle/>
+          <a:p>
+            <a:pPr algn="ctr"/>
+          </a:p>
+        </p:txBody>
+      </p:sp>
+      <p:sp>
+        <p:nvSpPr>
+          <p:cNvPr id="4" name="Rounded Rectangle 3"/>
+          <p:cNvSpPr/>
+          <p:nvPr/>
+        </p:nvSpPr>
+        <p:spPr>
+          <a:xfrm>
+            <a:off x="566928" y="457200"/>
+            <a:ext cx="82296" cy="457200"/>
+          </a:xfrm>
+          <a:prstGeom prst="roundRect">
+            <a:avLst>
+              <a:gd name="adj" fmla="val 50000"/>
+            </a:avLst>
+          </a:prstGeom>
+          <a:solidFill>
+            <a:srgbClr val="4338CA"/>
+          </a:solidFill>
+          <a:ln>
+            <a:noFill/>
+          </a:ln>
+          <a:effectLst/>
+        </p:spPr>
+        <p:style>
+          <a:lnRef idx="1">
+            <a:schemeClr val="accent1"/>
+          </a:lnRef>
+          <a:fillRef idx="3">
+            <a:schemeClr val="accent1"/>
+          </a:fillRef>
+          <a:effectRef idx="2">
+            <a:schemeClr val="accent1"/>
+          </a:effectRef>
+          <a:fontRef idx="minor">
+            <a:schemeClr val="lt1"/>
+          </a:fontRef>
+        </p:style>
+        <p:txBody>
+          <a:bodyPr rtlCol="0" anchor="ctr"/>
+          <a:lstStyle/>
+          <a:p>
+            <a:pPr algn="ctr"/>
+          </a:p>
+        </p:txBody>
+      </p:sp>
+      <p:sp>
+        <p:nvSpPr>
+          <p:cNvPr id="5" name="TextBox 4"/>
           <p:cNvSpPr txBox="1"/>
           <p:nvPr/>
         </p:nvSpPr>
         <p:spPr>
           <a:xfrm>
-            <a:off x="786384" y="402336"/>
-            <a:ext cx="9326880" cy="640080"/>
+            <a:off x="804672" y="384048"/>
+            <a:ext cx="9144000" cy="603504"/>
           </a:xfrm>
           <a:prstGeom prst="rect">
             <a:avLst/>
@@ -5094,13 +6002,13 @@
           <a:p>
             <a:pPr algn="l">
               <a:lnSpc>
-                <a:spcPct val="112000"/>
+                <a:spcPct val="114000"/>
               </a:lnSpc>
             </a:pPr>
             <a:r>
-              <a:rPr sz="2300" b="1" i="0">
-                <a:solidFill>
-                  <a:srgbClr val="14213D"/>
+              <a:rPr sz="2200" b="1" i="0">
+                <a:solidFill>
+                  <a:srgbClr val="111927"/>
                 </a:solidFill>
                 <a:latin typeface="맑은 고딕"/>
                 <a:ea typeface="맑은 고딕"/>
@@ -5112,14 +6020,98 @@
       </p:sp>
       <p:sp>
         <p:nvSpPr>
-          <p:cNvPr id="4" name="TextBox 3"/>
+          <p:cNvPr id="6" name="Rectangle 5"/>
+          <p:cNvSpPr/>
+          <p:nvPr/>
+        </p:nvSpPr>
+        <p:spPr>
+          <a:xfrm>
+            <a:off x="566928" y="6547104"/>
+            <a:ext cx="182880" cy="25603"/>
+          </a:xfrm>
+          <a:prstGeom prst="rect">
+            <a:avLst/>
+          </a:prstGeom>
+          <a:solidFill>
+            <a:srgbClr val="4338CA"/>
+          </a:solidFill>
+          <a:ln>
+            <a:noFill/>
+          </a:ln>
+          <a:effectLst/>
+        </p:spPr>
+        <p:style>
+          <a:lnRef idx="1">
+            <a:schemeClr val="accent1"/>
+          </a:lnRef>
+          <a:fillRef idx="3">
+            <a:schemeClr val="accent1"/>
+          </a:fillRef>
+          <a:effectRef idx="2">
+            <a:schemeClr val="accent1"/>
+          </a:effectRef>
+          <a:fontRef idx="minor">
+            <a:schemeClr val="lt1"/>
+          </a:fontRef>
+        </p:style>
+        <p:txBody>
+          <a:bodyPr rtlCol="0" anchor="ctr"/>
+          <a:lstStyle/>
+          <a:p>
+            <a:pPr algn="ctr"/>
+          </a:p>
+        </p:txBody>
+      </p:sp>
+      <p:sp>
+        <p:nvSpPr>
+          <p:cNvPr id="7" name="TextBox 6"/>
           <p:cNvSpPr txBox="1"/>
           <p:nvPr/>
         </p:nvSpPr>
         <p:spPr>
           <a:xfrm>
-            <a:off x="548640" y="6510528"/>
-            <a:ext cx="11094415" cy="274320"/>
+            <a:off x="841248" y="6446520"/>
+            <a:ext cx="11057839" cy="274320"/>
+          </a:xfrm>
+          <a:prstGeom prst="rect">
+            <a:avLst/>
+          </a:prstGeom>
+          <a:noFill/>
+        </p:spPr>
+        <p:txBody>
+          <a:bodyPr wrap="square" anchor="ctr" lIns="0" rIns="0" tIns="0" bIns="0">
+            <a:spAutoFit/>
+          </a:bodyPr>
+          <a:lstStyle/>
+          <a:p>
+            <a:pPr algn="l">
+              <a:lnSpc>
+                <a:spcPct val="114000"/>
+              </a:lnSpc>
+            </a:pPr>
+            <a:r>
+              <a:rPr sz="900" b="0" i="0">
+                <a:solidFill>
+                  <a:srgbClr val="9AA4B2"/>
+                </a:solidFill>
+                <a:latin typeface="맑은 고딕"/>
+                <a:ea typeface="맑은 고딕"/>
+              </a:rPr>
+              <a:t>AI 시대 마케팅, 누가 살아남을까? — 6주 실무 스터디   |   4회차 · GEO 인용되는 브랜드</a:t>
+            </a:r>
+          </a:p>
+        </p:txBody>
+      </p:sp>
+      <p:sp>
+        <p:nvSpPr>
+          <p:cNvPr id="8" name="TextBox 7"/>
+          <p:cNvSpPr txBox="1"/>
+          <p:nvPr/>
+        </p:nvSpPr>
+        <p:spPr>
+          <a:xfrm>
+            <a:off x="713232" y="1225295"/>
+            <a:ext cx="10607040" cy="4709159"/>
           </a:xfrm>
           <a:prstGeom prst="rect">
             <a:avLst/>
@@ -5134,79 +6126,29 @@
           <a:p>
             <a:pPr algn="l">
               <a:lnSpc>
-                <a:spcPct val="112000"/>
-              </a:lnSpc>
-            </a:pPr>
-            <a:r>
-              <a:rPr sz="950" b="0" i="0">
-                <a:solidFill>
-                  <a:srgbClr val="94A3B8"/>
-                </a:solidFill>
-                <a:latin typeface="맑은 고딕"/>
-                <a:ea typeface="맑은 고딕"/>
-              </a:rPr>
-              <a:t>AI 시대 마케팅, 누가 살아남을까? — 6주 실무 스터디   |   4회차 · GEO 인용되는 브랜드</a:t>
-            </a:r>
-            <a:r>
-              <a:rPr sz="950" b="0" i="0">
-                <a:solidFill>
-                  <a:srgbClr val="94A3B8"/>
-                </a:solidFill>
-                <a:latin typeface="맑은 고딕"/>
-                <a:ea typeface="맑은 고딕"/>
-              </a:rPr>
-              <a:t/>
-            </a:r>
-          </a:p>
-        </p:txBody>
-      </p:sp>
-      <p:sp>
-        <p:nvSpPr>
-          <p:cNvPr id="5" name="TextBox 4"/>
-          <p:cNvSpPr txBox="1"/>
-          <p:nvPr/>
-        </p:nvSpPr>
-        <p:spPr>
-          <a:xfrm>
-            <a:off x="685800" y="1225295"/>
-            <a:ext cx="10698480" cy="4736592"/>
-          </a:xfrm>
-          <a:prstGeom prst="rect">
-            <a:avLst/>
-          </a:prstGeom>
-          <a:noFill/>
-        </p:spPr>
-        <p:txBody>
-          <a:bodyPr wrap="square" anchor="t" lIns="0" rIns="0" tIns="0" bIns="0">
-            <a:spAutoFit/>
-          </a:bodyPr>
-          <a:lstStyle/>
-          <a:p>
-            <a:pPr algn="l">
-              <a:lnSpc>
-                <a:spcPct val="118000"/>
+                <a:spcPct val="120000"/>
               </a:lnSpc>
               <a:spcBef>
-                <a:spcPts val="600"/>
+                <a:spcPts val="700"/>
               </a:spcBef>
               <a:spcAft>
                 <a:spcPts val="500"/>
               </a:spcAft>
             </a:pPr>
             <a:r>
-              <a:rPr sz="1150" b="0" i="0">
-                <a:solidFill>
-                  <a:srgbClr val="2563EB"/>
-                </a:solidFill>
-                <a:latin typeface="맑은 고딕"/>
-                <a:ea typeface="맑은 고딕"/>
-              </a:rPr>
-              <a:t>●  </a:t>
+              <a:rPr sz="950" b="0" i="0">
+                <a:solidFill>
+                  <a:srgbClr val="4338CA"/>
+                </a:solidFill>
+                <a:latin typeface="맑은 고딕"/>
+                <a:ea typeface="맑은 고딕"/>
+              </a:rPr>
+              <a:t>■  </a:t>
             </a:r>
             <a:r>
               <a:rPr sz="1550" b="1" i="0">
                 <a:solidFill>
-                  <a:srgbClr val="1F2937"/>
+                  <a:srgbClr val="111927"/>
                 </a:solidFill>
                 <a:latin typeface="맑은 고딕"/>
                 <a:ea typeface="맑은 고딕"/>
@@ -5217,29 +6159,29 @@
           <a:p>
             <a:pPr algn="l">
               <a:lnSpc>
-                <a:spcPct val="118000"/>
+                <a:spcPct val="120000"/>
               </a:lnSpc>
               <a:spcBef>
-                <a:spcPts val="600"/>
+                <a:spcPts val="700"/>
               </a:spcBef>
               <a:spcAft>
                 <a:spcPts val="500"/>
               </a:spcAft>
             </a:pPr>
             <a:r>
-              <a:rPr sz="1150" b="0" i="0">
-                <a:solidFill>
-                  <a:srgbClr val="2563EB"/>
-                </a:solidFill>
-                <a:latin typeface="맑은 고딕"/>
-                <a:ea typeface="맑은 고딕"/>
-              </a:rPr>
-              <a:t>●  </a:t>
+              <a:rPr sz="950" b="0" i="0">
+                <a:solidFill>
+                  <a:srgbClr val="4338CA"/>
+                </a:solidFill>
+                <a:latin typeface="맑은 고딕"/>
+                <a:ea typeface="맑은 고딕"/>
+              </a:rPr>
+              <a:t>■  </a:t>
             </a:r>
             <a:r>
               <a:rPr sz="1550" b="0" i="0">
                 <a:solidFill>
-                  <a:srgbClr val="1F2937"/>
+                  <a:srgbClr val="374151"/>
                 </a:solidFill>
                 <a:latin typeface="맑은 고딕"/>
                 <a:ea typeface="맑은 고딕"/>
@@ -5250,29 +6192,29 @@
           <a:p>
             <a:pPr algn="l">
               <a:lnSpc>
-                <a:spcPct val="118000"/>
+                <a:spcPct val="120000"/>
               </a:lnSpc>
               <a:spcBef>
-                <a:spcPts val="600"/>
+                <a:spcPts val="700"/>
               </a:spcBef>
               <a:spcAft>
                 <a:spcPts val="500"/>
               </a:spcAft>
             </a:pPr>
             <a:r>
-              <a:rPr sz="1150" b="0" i="0">
-                <a:solidFill>
-                  <a:srgbClr val="2563EB"/>
-                </a:solidFill>
-                <a:latin typeface="맑은 고딕"/>
-                <a:ea typeface="맑은 고딕"/>
-              </a:rPr>
-              <a:t>●  </a:t>
+              <a:rPr sz="950" b="0" i="0">
+                <a:solidFill>
+                  <a:srgbClr val="4338CA"/>
+                </a:solidFill>
+                <a:latin typeface="맑은 고딕"/>
+                <a:ea typeface="맑은 고딕"/>
+              </a:rPr>
+              <a:t>■  </a:t>
             </a:r>
             <a:r>
               <a:rPr sz="1550" b="0" i="0">
                 <a:solidFill>
-                  <a:srgbClr val="1F2937"/>
+                  <a:srgbClr val="374151"/>
                 </a:solidFill>
                 <a:latin typeface="맑은 고딕"/>
                 <a:ea typeface="맑은 고딕"/>
@@ -5283,24 +6225,24 @@
           <a:p>
             <a:pPr algn="l">
               <a:lnSpc>
-                <a:spcPct val="118000"/>
+                <a:spcPct val="120000"/>
               </a:lnSpc>
               <a:spcBef>
-                <a:spcPts val="600"/>
+                <a:spcPts val="700"/>
               </a:spcBef>
               <a:spcAft>
                 <a:spcPts val="500"/>
               </a:spcAft>
             </a:pPr>
             <a:r>
-              <a:rPr sz="1150" b="0" i="0">
-                <a:solidFill>
-                  <a:srgbClr val="2563EB"/>
-                </a:solidFill>
-                <a:latin typeface="맑은 고딕"/>
-                <a:ea typeface="맑은 고딕"/>
-              </a:rPr>
-              <a:t>●  </a:t>
+              <a:rPr sz="950" b="0" i="0">
+                <a:solidFill>
+                  <a:srgbClr val="4338CA"/>
+                </a:solidFill>
+                <a:latin typeface="맑은 고딕"/>
+                <a:ea typeface="맑은 고딕"/>
+              </a:rPr>
+              <a:t>■  </a:t>
             </a:r>
             <a:r>
               <a:rPr sz="1550" b="1" i="0">
@@ -5316,7 +6258,7 @@
           <a:p>
             <a:pPr algn="l">
               <a:lnSpc>
-                <a:spcPct val="115000"/>
+                <a:spcPct val="116000"/>
               </a:lnSpc>
               <a:spcBef>
                 <a:spcPts val="100"/>
@@ -5328,7 +6270,7 @@
             <a:r>
               <a:rPr sz="1250" b="0" i="0">
                 <a:solidFill>
-                  <a:srgbClr val="9CA3AF"/>
+                  <a:srgbClr val="9AA4B2"/>
                 </a:solidFill>
                 <a:latin typeface="맑은 고딕"/>
                 <a:ea typeface="맑은 고딕"/>
@@ -5338,7 +6280,7 @@
             <a:r>
               <a:rPr sz="1300" b="0" i="0">
                 <a:solidFill>
-                  <a:srgbClr val="4B5563"/>
+                  <a:srgbClr val="374151"/>
                 </a:solidFill>
                 <a:latin typeface="맑은 고딕"/>
                 <a:ea typeface="맑은 고딕"/>
@@ -5374,14 +6316,14 @@
         </p:nvSpPr>
         <p:spPr>
           <a:xfrm>
-            <a:off x="548640" y="475488"/>
-            <a:ext cx="91440" cy="475488"/>
+            <a:off x="0" y="0"/>
+            <a:ext cx="12191695" cy="6858000"/>
           </a:xfrm>
           <a:prstGeom prst="rect">
             <a:avLst/>
           </a:prstGeom>
           <a:solidFill>
-            <a:srgbClr val="2563EB"/>
+            <a:srgbClr val="F6F7F9"/>
           </a:solidFill>
           <a:ln>
             <a:noFill/>
@@ -5412,14 +6354,104 @@
       </p:sp>
       <p:sp>
         <p:nvSpPr>
-          <p:cNvPr id="3" name="TextBox 2"/>
+          <p:cNvPr id="3" name="Rectangle 2"/>
+          <p:cNvSpPr/>
+          <p:nvPr/>
+        </p:nvSpPr>
+        <p:spPr>
+          <a:xfrm>
+            <a:off x="0" y="0"/>
+            <a:ext cx="12191695" cy="128016"/>
+          </a:xfrm>
+          <a:prstGeom prst="rect">
+            <a:avLst/>
+          </a:prstGeom>
+          <a:solidFill>
+            <a:srgbClr val="4338CA"/>
+          </a:solidFill>
+          <a:ln>
+            <a:noFill/>
+          </a:ln>
+          <a:effectLst/>
+        </p:spPr>
+        <p:style>
+          <a:lnRef idx="1">
+            <a:schemeClr val="accent1"/>
+          </a:lnRef>
+          <a:fillRef idx="3">
+            <a:schemeClr val="accent1"/>
+          </a:fillRef>
+          <a:effectRef idx="2">
+            <a:schemeClr val="accent1"/>
+          </a:effectRef>
+          <a:fontRef idx="minor">
+            <a:schemeClr val="lt1"/>
+          </a:fontRef>
+        </p:style>
+        <p:txBody>
+          <a:bodyPr rtlCol="0" anchor="ctr"/>
+          <a:lstStyle/>
+          <a:p>
+            <a:pPr algn="ctr"/>
+          </a:p>
+        </p:txBody>
+      </p:sp>
+      <p:sp>
+        <p:nvSpPr>
+          <p:cNvPr id="4" name="Rounded Rectangle 3"/>
+          <p:cNvSpPr/>
+          <p:nvPr/>
+        </p:nvSpPr>
+        <p:spPr>
+          <a:xfrm>
+            <a:off x="566928" y="457200"/>
+            <a:ext cx="82296" cy="457200"/>
+          </a:xfrm>
+          <a:prstGeom prst="roundRect">
+            <a:avLst>
+              <a:gd name="adj" fmla="val 50000"/>
+            </a:avLst>
+          </a:prstGeom>
+          <a:solidFill>
+            <a:srgbClr val="4338CA"/>
+          </a:solidFill>
+          <a:ln>
+            <a:noFill/>
+          </a:ln>
+          <a:effectLst/>
+        </p:spPr>
+        <p:style>
+          <a:lnRef idx="1">
+            <a:schemeClr val="accent1"/>
+          </a:lnRef>
+          <a:fillRef idx="3">
+            <a:schemeClr val="accent1"/>
+          </a:fillRef>
+          <a:effectRef idx="2">
+            <a:schemeClr val="accent1"/>
+          </a:effectRef>
+          <a:fontRef idx="minor">
+            <a:schemeClr val="lt1"/>
+          </a:fontRef>
+        </p:style>
+        <p:txBody>
+          <a:bodyPr rtlCol="0" anchor="ctr"/>
+          <a:lstStyle/>
+          <a:p>
+            <a:pPr algn="ctr"/>
+          </a:p>
+        </p:txBody>
+      </p:sp>
+      <p:sp>
+        <p:nvSpPr>
+          <p:cNvPr id="5" name="TextBox 4"/>
           <p:cNvSpPr txBox="1"/>
           <p:nvPr/>
         </p:nvSpPr>
         <p:spPr>
           <a:xfrm>
-            <a:off x="786384" y="402336"/>
-            <a:ext cx="9326880" cy="640080"/>
+            <a:off x="804672" y="384048"/>
+            <a:ext cx="9144000" cy="603504"/>
           </a:xfrm>
           <a:prstGeom prst="rect">
             <a:avLst/>
@@ -5434,13 +6466,13 @@
           <a:p>
             <a:pPr algn="l">
               <a:lnSpc>
-                <a:spcPct val="112000"/>
+                <a:spcPct val="114000"/>
               </a:lnSpc>
             </a:pPr>
             <a:r>
-              <a:rPr sz="2300" b="1" i="0">
-                <a:solidFill>
-                  <a:srgbClr val="14213D"/>
+              <a:rPr sz="2200" b="1" i="0">
+                <a:solidFill>
+                  <a:srgbClr val="111927"/>
                 </a:solidFill>
                 <a:latin typeface="맑은 고딕"/>
                 <a:ea typeface="맑은 고딕"/>
@@ -5452,78 +6484,112 @@
       </p:sp>
       <p:sp>
         <p:nvSpPr>
-          <p:cNvPr id="4" name="TextBox 3"/>
-          <p:cNvSpPr txBox="1"/>
-          <p:nvPr/>
-        </p:nvSpPr>
-        <p:spPr>
-          <a:xfrm>
-            <a:off x="548640" y="6510528"/>
-            <a:ext cx="11094415" cy="274320"/>
+          <p:cNvPr id="6" name="Rectangle 5"/>
+          <p:cNvSpPr/>
+          <p:nvPr/>
+        </p:nvSpPr>
+        <p:spPr>
+          <a:xfrm>
+            <a:off x="566928" y="6547104"/>
+            <a:ext cx="182880" cy="25603"/>
           </a:xfrm>
           <a:prstGeom prst="rect">
             <a:avLst/>
           </a:prstGeom>
+          <a:solidFill>
+            <a:srgbClr val="4338CA"/>
+          </a:solidFill>
+          <a:ln>
+            <a:noFill/>
+          </a:ln>
+          <a:effectLst/>
+        </p:spPr>
+        <p:style>
+          <a:lnRef idx="1">
+            <a:schemeClr val="accent1"/>
+          </a:lnRef>
+          <a:fillRef idx="3">
+            <a:schemeClr val="accent1"/>
+          </a:fillRef>
+          <a:effectRef idx="2">
+            <a:schemeClr val="accent1"/>
+          </a:effectRef>
+          <a:fontRef idx="minor">
+            <a:schemeClr val="lt1"/>
+          </a:fontRef>
+        </p:style>
+        <p:txBody>
+          <a:bodyPr rtlCol="0" anchor="ctr"/>
+          <a:lstStyle/>
+          <a:p>
+            <a:pPr algn="ctr"/>
+          </a:p>
+        </p:txBody>
+      </p:sp>
+      <p:sp>
+        <p:nvSpPr>
+          <p:cNvPr id="7" name="TextBox 6"/>
+          <p:cNvSpPr txBox="1"/>
+          <p:nvPr/>
+        </p:nvSpPr>
+        <p:spPr>
+          <a:xfrm>
+            <a:off x="841248" y="6446520"/>
+            <a:ext cx="11057839" cy="274320"/>
+          </a:xfrm>
+          <a:prstGeom prst="rect">
+            <a:avLst/>
+          </a:prstGeom>
           <a:noFill/>
         </p:spPr>
         <p:txBody>
-          <a:bodyPr wrap="square" anchor="t" lIns="0" rIns="0" tIns="0" bIns="0">
+          <a:bodyPr wrap="square" anchor="ctr" lIns="0" rIns="0" tIns="0" bIns="0">
             <a:spAutoFit/>
           </a:bodyPr>
           <a:lstStyle/>
           <a:p>
             <a:pPr algn="l">
               <a:lnSpc>
-                <a:spcPct val="112000"/>
+                <a:spcPct val="114000"/>
               </a:lnSpc>
             </a:pPr>
             <a:r>
-              <a:rPr sz="950" b="0" i="0">
-                <a:solidFill>
-                  <a:srgbClr val="94A3B8"/>
+              <a:rPr sz="900" b="0" i="0">
+                <a:solidFill>
+                  <a:srgbClr val="9AA4B2"/>
                 </a:solidFill>
                 <a:latin typeface="맑은 고딕"/>
                 <a:ea typeface="맑은 고딕"/>
               </a:rPr>
               <a:t>AI 시대 마케팅, 누가 살아남을까? — 6주 실무 스터디   |   4회차 · GEO 인용되는 브랜드</a:t>
-            </a:r>
-            <a:r>
-              <a:rPr sz="950" b="0" i="0">
-                <a:solidFill>
-                  <a:srgbClr val="94A3B8"/>
-                </a:solidFill>
-                <a:latin typeface="맑은 고딕"/>
-                <a:ea typeface="맑은 고딕"/>
-              </a:rPr>
-              <a:t/>
             </a:r>
           </a:p>
         </p:txBody>
       </p:sp>
       <p:graphicFrame>
         <p:nvGraphicFramePr>
-          <p:cNvPr id="5" name="Table 4"/>
+          <p:cNvPr id="8" name="Table 7"/>
           <p:cNvGraphicFramePr>
             <a:graphicFrameLocks noGrp="1"/>
           </p:cNvGraphicFramePr>
           <p:nvPr/>
         </p:nvGraphicFramePr>
         <p:xfrm>
-          <a:off x="548640" y="1188720"/>
-          <a:ext cx="11094413" cy="2609088"/>
+          <a:off x="566928" y="1207007"/>
+          <a:ext cx="11057838" cy="2524760"/>
         </p:xfrm>
         <a:graphic>
           <a:graphicData uri="http://schemas.openxmlformats.org/drawingml/2006/table">
             <a:tbl>
-              <a:tblPr firstRow="1" bandRow="1">
+              <a:tblPr>
                 <a:tableStyleId>{5C22544A-7EE6-4342-B048-85BDC9FD1C3A}</a:tableStyleId>
               </a:tblPr>
               <a:tblGrid>
-                <a:gridCol w="1517184"/>
-                <a:gridCol w="7111804"/>
-                <a:gridCol w="2465425"/>
+                <a:gridCol w="1512183"/>
+                <a:gridCol w="7088358"/>
+                <a:gridCol w="2457297"/>
               </a:tblGrid>
-              <a:tr h="304800">
+              <a:tr h="330200">
                 <a:tc>
                   <a:txBody>
                     <a:bodyPr wrap="square"/>
@@ -5531,7 +6597,7 @@
                     <a:p>
                       <a:pPr algn="ctr">
                         <a:lnSpc>
-                          <a:spcPct val="108000"/>
+                          <a:spcPct val="110000"/>
                         </a:lnSpc>
                       </a:pPr>
                       <a:r>
@@ -5546,9 +6612,9 @@
                       </a:r>
                     </a:p>
                   </a:txBody>
-                  <a:tcPr anchor="ctr" marL="73152" marR="73152" marT="27432" marB="27432">
+                  <a:tcPr anchor="ctr" marL="100584" marR="91440" marT="41148" marB="41148">
                     <a:solidFill>
-                      <a:srgbClr val="14213D"/>
+                      <a:srgbClr val="4338CA"/>
                     </a:solidFill>
                   </a:tcPr>
                 </a:tc>
@@ -5559,7 +6625,7 @@
                     <a:p>
                       <a:pPr algn="ctr">
                         <a:lnSpc>
-                          <a:spcPct val="108000"/>
+                          <a:spcPct val="110000"/>
                         </a:lnSpc>
                       </a:pPr>
                       <a:r>
@@ -5574,9 +6640,9 @@
                       </a:r>
                     </a:p>
                   </a:txBody>
-                  <a:tcPr anchor="ctr" marL="73152" marR="73152" marT="27432" marB="27432">
+                  <a:tcPr anchor="ctr" marL="100584" marR="91440" marT="41148" marB="41148">
                     <a:solidFill>
-                      <a:srgbClr val="14213D"/>
+                      <a:srgbClr val="4338CA"/>
                     </a:solidFill>
                   </a:tcPr>
                 </a:tc>
@@ -5587,7 +6653,7 @@
                     <a:p>
                       <a:pPr algn="ctr">
                         <a:lnSpc>
-                          <a:spcPct val="108000"/>
+                          <a:spcPct val="110000"/>
                         </a:lnSpc>
                       </a:pPr>
                       <a:r>
@@ -5602,14 +6668,14 @@
                       </a:r>
                     </a:p>
                   </a:txBody>
-                  <a:tcPr anchor="ctr" marL="73152" marR="73152" marT="27432" marB="27432">
+                  <a:tcPr anchor="ctr" marL="100584" marR="91440" marT="41148" marB="41148">
                     <a:solidFill>
-                      <a:srgbClr val="14213D"/>
+                      <a:srgbClr val="4338CA"/>
                     </a:solidFill>
                   </a:tcPr>
                 </a:tc>
               </a:tr>
-              <a:tr h="384048">
+              <a:tr h="365760">
                 <a:tc>
                   <a:txBody>
                     <a:bodyPr wrap="square"/>
@@ -5617,13 +6683,13 @@
                     <a:p>
                       <a:pPr algn="l">
                         <a:lnSpc>
-                          <a:spcPct val="108000"/>
+                          <a:spcPct val="110000"/>
                         </a:lnSpc>
                       </a:pPr>
                       <a:r>
                         <a:rPr sz="1200" b="1" i="0">
                           <a:solidFill>
-                            <a:srgbClr val="14213D"/>
+                            <a:srgbClr val="111927"/>
                           </a:solidFill>
                           <a:latin typeface="맑은 고딕"/>
                           <a:ea typeface="맑은 고딕"/>
@@ -5632,7 +6698,7 @@
                       </a:r>
                     </a:p>
                   </a:txBody>
-                  <a:tcPr anchor="ctr" marL="73152" marR="73152" marT="27432" marB="27432">
+                  <a:tcPr anchor="ctr" marL="100584" marR="91440" marT="41148" marB="41148">
                     <a:solidFill>
                       <a:srgbClr val="FFFFFF"/>
                     </a:solidFill>
@@ -5645,7 +6711,7 @@
                     <a:p>
                       <a:pPr algn="l">
                         <a:lnSpc>
-                          <a:spcPct val="108000"/>
+                          <a:spcPct val="110000"/>
                         </a:lnSpc>
                       </a:pPr>
                       <a:r>
@@ -5660,7 +6726,7 @@
                       </a:r>
                     </a:p>
                   </a:txBody>
-                  <a:tcPr anchor="ctr" marL="73152" marR="73152" marT="27432" marB="27432">
+                  <a:tcPr anchor="ctr" marL="100584" marR="91440" marT="41148" marB="41148">
                     <a:solidFill>
                       <a:srgbClr val="FFFFFF"/>
                     </a:solidFill>
@@ -5673,7 +6739,7 @@
                     <a:p>
                       <a:pPr algn="l">
                         <a:lnSpc>
-                          <a:spcPct val="108000"/>
+                          <a:spcPct val="110000"/>
                         </a:lnSpc>
                       </a:pPr>
                       <a:r>
@@ -5688,14 +6754,14 @@
                       </a:r>
                     </a:p>
                   </a:txBody>
-                  <a:tcPr anchor="ctr" marL="73152" marR="73152" marT="27432" marB="27432">
+                  <a:tcPr anchor="ctr" marL="100584" marR="91440" marT="41148" marB="41148">
                     <a:solidFill>
                       <a:srgbClr val="FFFFFF"/>
                     </a:solidFill>
                   </a:tcPr>
                 </a:tc>
               </a:tr>
-              <a:tr h="384048">
+              <a:tr h="365760">
                 <a:tc>
                   <a:txBody>
                     <a:bodyPr wrap="square"/>
@@ -5703,13 +6769,13 @@
                     <a:p>
                       <a:pPr algn="l">
                         <a:lnSpc>
-                          <a:spcPct val="108000"/>
+                          <a:spcPct val="110000"/>
                         </a:lnSpc>
                       </a:pPr>
                       <a:r>
                         <a:rPr sz="1200" b="1" i="0">
                           <a:solidFill>
-                            <a:srgbClr val="14213D"/>
+                            <a:srgbClr val="111927"/>
                           </a:solidFill>
                           <a:latin typeface="맑은 고딕"/>
                           <a:ea typeface="맑은 고딕"/>
@@ -5718,9 +6784,9 @@
                       </a:r>
                     </a:p>
                   </a:txBody>
-                  <a:tcPr anchor="ctr" marL="73152" marR="73152" marT="27432" marB="27432">
+                  <a:tcPr anchor="ctr" marL="100584" marR="91440" marT="41148" marB="41148">
                     <a:solidFill>
-                      <a:srgbClr val="EEF2F7"/>
+                      <a:srgbClr val="EEF0FB"/>
                     </a:solidFill>
                   </a:tcPr>
                 </a:tc>
@@ -5731,7 +6797,7 @@
                     <a:p>
                       <a:pPr algn="l">
                         <a:lnSpc>
-                          <a:spcPct val="108000"/>
+                          <a:spcPct val="110000"/>
                         </a:lnSpc>
                       </a:pPr>
                       <a:r>
@@ -5746,9 +6812,9 @@
                       </a:r>
                     </a:p>
                   </a:txBody>
-                  <a:tcPr anchor="ctr" marL="73152" marR="73152" marT="27432" marB="27432">
+                  <a:tcPr anchor="ctr" marL="100584" marR="91440" marT="41148" marB="41148">
                     <a:solidFill>
-                      <a:srgbClr val="EEF2F7"/>
+                      <a:srgbClr val="EEF0FB"/>
                     </a:solidFill>
                   </a:tcPr>
                 </a:tc>
@@ -5759,7 +6825,7 @@
                     <a:p>
                       <a:pPr algn="l">
                         <a:lnSpc>
-                          <a:spcPct val="108000"/>
+                          <a:spcPct val="110000"/>
                         </a:lnSpc>
                       </a:pPr>
                       <a:r>
@@ -5774,14 +6840,14 @@
                       </a:r>
                     </a:p>
                   </a:txBody>
-                  <a:tcPr anchor="ctr" marL="73152" marR="73152" marT="27432" marB="27432">
+                  <a:tcPr anchor="ctr" marL="100584" marR="91440" marT="41148" marB="41148">
                     <a:solidFill>
-                      <a:srgbClr val="EEF2F7"/>
+                      <a:srgbClr val="EEF0FB"/>
                     </a:solidFill>
                   </a:tcPr>
                 </a:tc>
               </a:tr>
-              <a:tr h="384048">
+              <a:tr h="365760">
                 <a:tc>
                   <a:txBody>
                     <a:bodyPr wrap="square"/>
@@ -5789,13 +6855,13 @@
                     <a:p>
                       <a:pPr algn="l">
                         <a:lnSpc>
-                          <a:spcPct val="108000"/>
+                          <a:spcPct val="110000"/>
                         </a:lnSpc>
                       </a:pPr>
                       <a:r>
                         <a:rPr sz="1200" b="1" i="0">
                           <a:solidFill>
-                            <a:srgbClr val="14213D"/>
+                            <a:srgbClr val="111927"/>
                           </a:solidFill>
                           <a:latin typeface="맑은 고딕"/>
                           <a:ea typeface="맑은 고딕"/>
@@ -5804,7 +6870,7 @@
                       </a:r>
                     </a:p>
                   </a:txBody>
-                  <a:tcPr anchor="ctr" marL="73152" marR="73152" marT="27432" marB="27432">
+                  <a:tcPr anchor="ctr" marL="100584" marR="91440" marT="41148" marB="41148">
                     <a:solidFill>
                       <a:srgbClr val="FFFFFF"/>
                     </a:solidFill>
@@ -5817,7 +6883,7 @@
                     <a:p>
                       <a:pPr algn="l">
                         <a:lnSpc>
-                          <a:spcPct val="108000"/>
+                          <a:spcPct val="110000"/>
                         </a:lnSpc>
                       </a:pPr>
                       <a:r>
@@ -5832,7 +6898,7 @@
                       </a:r>
                     </a:p>
                   </a:txBody>
-                  <a:tcPr anchor="ctr" marL="73152" marR="73152" marT="27432" marB="27432">
+                  <a:tcPr anchor="ctr" marL="100584" marR="91440" marT="41148" marB="41148">
                     <a:solidFill>
                       <a:srgbClr val="FFFFFF"/>
                     </a:solidFill>
@@ -5845,7 +6911,7 @@
                     <a:p>
                       <a:pPr algn="l">
                         <a:lnSpc>
-                          <a:spcPct val="108000"/>
+                          <a:spcPct val="110000"/>
                         </a:lnSpc>
                       </a:pPr>
                       <a:r>
@@ -5860,14 +6926,14 @@
                       </a:r>
                     </a:p>
                   </a:txBody>
-                  <a:tcPr anchor="ctr" marL="73152" marR="73152" marT="27432" marB="27432">
+                  <a:tcPr anchor="ctr" marL="100584" marR="91440" marT="41148" marB="41148">
                     <a:solidFill>
                       <a:srgbClr val="FFFFFF"/>
                     </a:solidFill>
                   </a:tcPr>
                 </a:tc>
               </a:tr>
-              <a:tr h="384048">
+              <a:tr h="365760">
                 <a:tc>
                   <a:txBody>
                     <a:bodyPr wrap="square"/>
@@ -5875,13 +6941,13 @@
                     <a:p>
                       <a:pPr algn="l">
                         <a:lnSpc>
-                          <a:spcPct val="108000"/>
+                          <a:spcPct val="110000"/>
                         </a:lnSpc>
                       </a:pPr>
                       <a:r>
                         <a:rPr sz="1200" b="1" i="0">
                           <a:solidFill>
-                            <a:srgbClr val="14213D"/>
+                            <a:srgbClr val="111927"/>
                           </a:solidFill>
                           <a:latin typeface="맑은 고딕"/>
                           <a:ea typeface="맑은 고딕"/>
@@ -5890,9 +6956,9 @@
                       </a:r>
                     </a:p>
                   </a:txBody>
-                  <a:tcPr anchor="ctr" marL="73152" marR="73152" marT="27432" marB="27432">
+                  <a:tcPr anchor="ctr" marL="100584" marR="91440" marT="41148" marB="41148">
                     <a:solidFill>
-                      <a:srgbClr val="EEF2F7"/>
+                      <a:srgbClr val="EEF0FB"/>
                     </a:solidFill>
                   </a:tcPr>
                 </a:tc>
@@ -5903,7 +6969,7 @@
                     <a:p>
                       <a:pPr algn="l">
                         <a:lnSpc>
-                          <a:spcPct val="108000"/>
+                          <a:spcPct val="110000"/>
                         </a:lnSpc>
                       </a:pPr>
                       <a:r>
@@ -5918,9 +6984,9 @@
                       </a:r>
                     </a:p>
                   </a:txBody>
-                  <a:tcPr anchor="ctr" marL="73152" marR="73152" marT="27432" marB="27432">
+                  <a:tcPr anchor="ctr" marL="100584" marR="91440" marT="41148" marB="41148">
                     <a:solidFill>
-                      <a:srgbClr val="EEF2F7"/>
+                      <a:srgbClr val="EEF0FB"/>
                     </a:solidFill>
                   </a:tcPr>
                 </a:tc>
@@ -5931,7 +6997,7 @@
                     <a:p>
                       <a:pPr algn="l">
                         <a:lnSpc>
-                          <a:spcPct val="108000"/>
+                          <a:spcPct val="110000"/>
                         </a:lnSpc>
                       </a:pPr>
                       <a:r>
@@ -5946,14 +7012,14 @@
                       </a:r>
                     </a:p>
                   </a:txBody>
-                  <a:tcPr anchor="ctr" marL="73152" marR="73152" marT="27432" marB="27432">
+                  <a:tcPr anchor="ctr" marL="100584" marR="91440" marT="41148" marB="41148">
                     <a:solidFill>
-                      <a:srgbClr val="EEF2F7"/>
+                      <a:srgbClr val="EEF0FB"/>
                     </a:solidFill>
                   </a:tcPr>
                 </a:tc>
               </a:tr>
-              <a:tr h="384048">
+              <a:tr h="365760">
                 <a:tc>
                   <a:txBody>
                     <a:bodyPr wrap="square"/>
@@ -5961,13 +7027,13 @@
                     <a:p>
                       <a:pPr algn="l">
                         <a:lnSpc>
-                          <a:spcPct val="108000"/>
+                          <a:spcPct val="110000"/>
                         </a:lnSpc>
                       </a:pPr>
                       <a:r>
                         <a:rPr sz="1200" b="1" i="0">
                           <a:solidFill>
-                            <a:srgbClr val="14213D"/>
+                            <a:srgbClr val="111927"/>
                           </a:solidFill>
                           <a:latin typeface="맑은 고딕"/>
                           <a:ea typeface="맑은 고딕"/>
@@ -5976,7 +7042,7 @@
                       </a:r>
                     </a:p>
                   </a:txBody>
-                  <a:tcPr anchor="ctr" marL="73152" marR="73152" marT="27432" marB="27432">
+                  <a:tcPr anchor="ctr" marL="100584" marR="91440" marT="41148" marB="41148">
                     <a:solidFill>
                       <a:srgbClr val="FFFFFF"/>
                     </a:solidFill>
@@ -5989,7 +7055,7 @@
                     <a:p>
                       <a:pPr algn="l">
                         <a:lnSpc>
-                          <a:spcPct val="108000"/>
+                          <a:spcPct val="110000"/>
                         </a:lnSpc>
                       </a:pPr>
                       <a:r>
@@ -6004,7 +7070,7 @@
                       </a:r>
                     </a:p>
                   </a:txBody>
-                  <a:tcPr anchor="ctr" marL="73152" marR="73152" marT="27432" marB="27432">
+                  <a:tcPr anchor="ctr" marL="100584" marR="91440" marT="41148" marB="41148">
                     <a:solidFill>
                       <a:srgbClr val="FFFFFF"/>
                     </a:solidFill>
@@ -6017,7 +7083,7 @@
                     <a:p>
                       <a:pPr algn="l">
                         <a:lnSpc>
-                          <a:spcPct val="108000"/>
+                          <a:spcPct val="110000"/>
                         </a:lnSpc>
                       </a:pPr>
                       <a:r>
@@ -6032,14 +7098,14 @@
                       </a:r>
                     </a:p>
                   </a:txBody>
-                  <a:tcPr anchor="ctr" marL="73152" marR="73152" marT="27432" marB="27432">
+                  <a:tcPr anchor="ctr" marL="100584" marR="91440" marT="41148" marB="41148">
                     <a:solidFill>
                       <a:srgbClr val="FFFFFF"/>
                     </a:solidFill>
                   </a:tcPr>
                 </a:tc>
               </a:tr>
-              <a:tr h="384048">
+              <a:tr h="365760">
                 <a:tc>
                   <a:txBody>
                     <a:bodyPr wrap="square"/>
@@ -6047,13 +7113,13 @@
                     <a:p>
                       <a:pPr algn="l">
                         <a:lnSpc>
-                          <a:spcPct val="108000"/>
+                          <a:spcPct val="110000"/>
                         </a:lnSpc>
                       </a:pPr>
                       <a:r>
                         <a:rPr sz="1200" b="1" i="0">
                           <a:solidFill>
-                            <a:srgbClr val="14213D"/>
+                            <a:srgbClr val="111927"/>
                           </a:solidFill>
                           <a:latin typeface="맑은 고딕"/>
                           <a:ea typeface="맑은 고딕"/>
@@ -6062,9 +7128,9 @@
                       </a:r>
                     </a:p>
                   </a:txBody>
-                  <a:tcPr anchor="ctr" marL="73152" marR="73152" marT="27432" marB="27432">
+                  <a:tcPr anchor="ctr" marL="100584" marR="91440" marT="41148" marB="41148">
                     <a:solidFill>
-                      <a:srgbClr val="EEF2F7"/>
+                      <a:srgbClr val="EEF0FB"/>
                     </a:solidFill>
                   </a:tcPr>
                 </a:tc>
@@ -6075,7 +7141,7 @@
                     <a:p>
                       <a:pPr algn="l">
                         <a:lnSpc>
-                          <a:spcPct val="108000"/>
+                          <a:spcPct val="110000"/>
                         </a:lnSpc>
                       </a:pPr>
                       <a:r>
@@ -6090,9 +7156,9 @@
                       </a:r>
                     </a:p>
                   </a:txBody>
-                  <a:tcPr anchor="ctr" marL="73152" marR="73152" marT="27432" marB="27432">
+                  <a:tcPr anchor="ctr" marL="100584" marR="91440" marT="41148" marB="41148">
                     <a:solidFill>
-                      <a:srgbClr val="EEF2F7"/>
+                      <a:srgbClr val="EEF0FB"/>
                     </a:solidFill>
                   </a:tcPr>
                 </a:tc>
@@ -6103,7 +7169,7 @@
                     <a:p>
                       <a:pPr algn="l">
                         <a:lnSpc>
-                          <a:spcPct val="108000"/>
+                          <a:spcPct val="110000"/>
                         </a:lnSpc>
                       </a:pPr>
                       <a:r>
@@ -6118,9 +7184,9 @@
                       </a:r>
                     </a:p>
                   </a:txBody>
-                  <a:tcPr anchor="ctr" marL="73152" marR="73152" marT="27432" marB="27432">
+                  <a:tcPr anchor="ctr" marL="100584" marR="91440" marT="41148" marB="41148">
                     <a:solidFill>
-                      <a:srgbClr val="EEF2F7"/>
+                      <a:srgbClr val="EEF0FB"/>
                     </a:solidFill>
                   </a:tcPr>
                 </a:tc>
@@ -6162,7 +7228,7 @@
             <a:avLst/>
           </a:prstGeom>
           <a:solidFill>
-            <a:srgbClr val="14213D"/>
+            <a:srgbClr val="161E3A"/>
           </a:solidFill>
           <a:ln>
             <a:noFill/>
@@ -6199,14 +7265,14 @@
         </p:nvSpPr>
         <p:spPr>
           <a:xfrm>
-            <a:off x="0" y="6729984"/>
-            <a:ext cx="12191695" cy="128016"/>
+            <a:off x="0" y="6711696"/>
+            <a:ext cx="12191695" cy="146304"/>
           </a:xfrm>
           <a:prstGeom prst="rect">
             <a:avLst/>
           </a:prstGeom>
           <a:solidFill>
-            <a:srgbClr val="F59E0B"/>
+            <a:srgbClr val="4338CA"/>
           </a:solidFill>
           <a:ln>
             <a:noFill/>
@@ -6237,13 +7303,243 @@
       </p:sp>
       <p:sp>
         <p:nvSpPr>
-          <p:cNvPr id="4" name="TextBox 3"/>
+          <p:cNvPr id="4" name="Rounded Rectangle 3"/>
+          <p:cNvSpPr/>
+          <p:nvPr/>
+        </p:nvSpPr>
+        <p:spPr>
+          <a:xfrm>
+            <a:off x="5742432" y="1883664"/>
+            <a:ext cx="47548" cy="128016"/>
+          </a:xfrm>
+          <a:prstGeom prst="roundRect">
+            <a:avLst>
+              <a:gd name="adj" fmla="val 40000"/>
+            </a:avLst>
+          </a:prstGeom>
+          <a:solidFill>
+            <a:srgbClr val="A5B4FC"/>
+          </a:solidFill>
+          <a:ln>
+            <a:noFill/>
+          </a:ln>
+          <a:effectLst/>
+        </p:spPr>
+        <p:style>
+          <a:lnRef idx="1">
+            <a:schemeClr val="accent1"/>
+          </a:lnRef>
+          <a:fillRef idx="3">
+            <a:schemeClr val="accent1"/>
+          </a:fillRef>
+          <a:effectRef idx="2">
+            <a:schemeClr val="accent1"/>
+          </a:effectRef>
+          <a:fontRef idx="minor">
+            <a:schemeClr val="lt1"/>
+          </a:fontRef>
+        </p:style>
+        <p:txBody>
+          <a:bodyPr rtlCol="0" anchor="ctr"/>
+          <a:lstStyle/>
+          <a:p>
+            <a:pPr algn="ctr"/>
+          </a:p>
+        </p:txBody>
+      </p:sp>
+      <p:sp>
+        <p:nvSpPr>
+          <p:cNvPr id="5" name="Rounded Rectangle 4"/>
+          <p:cNvSpPr/>
+          <p:nvPr/>
+        </p:nvSpPr>
+        <p:spPr>
+          <a:xfrm>
+            <a:off x="5828384" y="1792224"/>
+            <a:ext cx="47548" cy="219456"/>
+          </a:xfrm>
+          <a:prstGeom prst="roundRect">
+            <a:avLst>
+              <a:gd name="adj" fmla="val 40000"/>
+            </a:avLst>
+          </a:prstGeom>
+          <a:solidFill>
+            <a:srgbClr val="A5B4FC"/>
+          </a:solidFill>
+          <a:ln>
+            <a:noFill/>
+          </a:ln>
+          <a:effectLst/>
+        </p:spPr>
+        <p:style>
+          <a:lnRef idx="1">
+            <a:schemeClr val="accent1"/>
+          </a:lnRef>
+          <a:fillRef idx="3">
+            <a:schemeClr val="accent1"/>
+          </a:fillRef>
+          <a:effectRef idx="2">
+            <a:schemeClr val="accent1"/>
+          </a:effectRef>
+          <a:fontRef idx="minor">
+            <a:schemeClr val="lt1"/>
+          </a:fontRef>
+        </p:style>
+        <p:txBody>
+          <a:bodyPr rtlCol="0" anchor="ctr"/>
+          <a:lstStyle/>
+          <a:p>
+            <a:pPr algn="ctr"/>
+          </a:p>
+        </p:txBody>
+      </p:sp>
+      <p:sp>
+        <p:nvSpPr>
+          <p:cNvPr id="6" name="Rounded Rectangle 5"/>
+          <p:cNvSpPr/>
+          <p:nvPr/>
+        </p:nvSpPr>
+        <p:spPr>
+          <a:xfrm>
+            <a:off x="5914336" y="1847088"/>
+            <a:ext cx="47548" cy="164592"/>
+          </a:xfrm>
+          <a:prstGeom prst="roundRect">
+            <a:avLst>
+              <a:gd name="adj" fmla="val 40000"/>
+            </a:avLst>
+          </a:prstGeom>
+          <a:solidFill>
+            <a:srgbClr val="A5B4FC"/>
+          </a:solidFill>
+          <a:ln>
+            <a:noFill/>
+          </a:ln>
+          <a:effectLst/>
+        </p:spPr>
+        <p:style>
+          <a:lnRef idx="1">
+            <a:schemeClr val="accent1"/>
+          </a:lnRef>
+          <a:fillRef idx="3">
+            <a:schemeClr val="accent1"/>
+          </a:fillRef>
+          <a:effectRef idx="2">
+            <a:schemeClr val="accent1"/>
+          </a:effectRef>
+          <a:fontRef idx="minor">
+            <a:schemeClr val="lt1"/>
+          </a:fontRef>
+        </p:style>
+        <p:txBody>
+          <a:bodyPr rtlCol="0" anchor="ctr"/>
+          <a:lstStyle/>
+          <a:p>
+            <a:pPr algn="ctr"/>
+          </a:p>
+        </p:txBody>
+      </p:sp>
+      <p:sp>
+        <p:nvSpPr>
+          <p:cNvPr id="7" name="Rounded Rectangle 6"/>
+          <p:cNvSpPr/>
+          <p:nvPr/>
+        </p:nvSpPr>
+        <p:spPr>
+          <a:xfrm>
+            <a:off x="6000288" y="1755648"/>
+            <a:ext cx="47548" cy="256032"/>
+          </a:xfrm>
+          <a:prstGeom prst="roundRect">
+            <a:avLst>
+              <a:gd name="adj" fmla="val 40000"/>
+            </a:avLst>
+          </a:prstGeom>
+          <a:solidFill>
+            <a:srgbClr val="A5B4FC"/>
+          </a:solidFill>
+          <a:ln>
+            <a:noFill/>
+          </a:ln>
+          <a:effectLst/>
+        </p:spPr>
+        <p:style>
+          <a:lnRef idx="1">
+            <a:schemeClr val="accent1"/>
+          </a:lnRef>
+          <a:fillRef idx="3">
+            <a:schemeClr val="accent1"/>
+          </a:fillRef>
+          <a:effectRef idx="2">
+            <a:schemeClr val="accent1"/>
+          </a:effectRef>
+          <a:fontRef idx="minor">
+            <a:schemeClr val="lt1"/>
+          </a:fontRef>
+        </p:style>
+        <p:txBody>
+          <a:bodyPr rtlCol="0" anchor="ctr"/>
+          <a:lstStyle/>
+          <a:p>
+            <a:pPr algn="ctr"/>
+          </a:p>
+        </p:txBody>
+      </p:sp>
+      <p:sp>
+        <p:nvSpPr>
+          <p:cNvPr id="8" name="Rounded Rectangle 7"/>
+          <p:cNvSpPr/>
+          <p:nvPr/>
+        </p:nvSpPr>
+        <p:spPr>
+          <a:xfrm>
+            <a:off x="6086240" y="1865376"/>
+            <a:ext cx="47548" cy="146304"/>
+          </a:xfrm>
+          <a:prstGeom prst="roundRect">
+            <a:avLst>
+              <a:gd name="adj" fmla="val 40000"/>
+            </a:avLst>
+          </a:prstGeom>
+          <a:solidFill>
+            <a:srgbClr val="A5B4FC"/>
+          </a:solidFill>
+          <a:ln>
+            <a:noFill/>
+          </a:ln>
+          <a:effectLst/>
+        </p:spPr>
+        <p:style>
+          <a:lnRef idx="1">
+            <a:schemeClr val="accent1"/>
+          </a:lnRef>
+          <a:fillRef idx="3">
+            <a:schemeClr val="accent1"/>
+          </a:fillRef>
+          <a:effectRef idx="2">
+            <a:schemeClr val="accent1"/>
+          </a:effectRef>
+          <a:fontRef idx="minor">
+            <a:schemeClr val="lt1"/>
+          </a:fontRef>
+        </p:style>
+        <p:txBody>
+          <a:bodyPr rtlCol="0" anchor="ctr"/>
+          <a:lstStyle/>
+          <a:p>
+            <a:pPr algn="ctr"/>
+          </a:p>
+        </p:txBody>
+      </p:sp>
+      <p:sp>
+        <p:nvSpPr>
+          <p:cNvPr id="9" name="TextBox 8"/>
           <p:cNvSpPr txBox="1"/>
           <p:nvPr/>
         </p:nvSpPr>
         <p:spPr>
           <a:xfrm>
-            <a:off x="1097280" y="1965960"/>
+            <a:off x="1097280" y="2139696"/>
             <a:ext cx="9966960" cy="457200"/>
           </a:xfrm>
           <a:prstGeom prst="rect">
@@ -6259,13 +7555,13 @@
           <a:p>
             <a:pPr algn="ctr">
               <a:lnSpc>
-                <a:spcPct val="112000"/>
+                <a:spcPct val="114000"/>
               </a:lnSpc>
             </a:pPr>
             <a:r>
-              <a:rPr sz="1500" b="1" i="0">
-                <a:solidFill>
-                  <a:srgbClr val="FBBF24"/>
+              <a:rPr sz="1450" b="1" i="0" spc="60">
+                <a:solidFill>
+                  <a:srgbClr val="A5B4FC"/>
                 </a:solidFill>
                 <a:latin typeface="맑은 고딕"/>
                 <a:ea typeface="맑은 고딕"/>
@@ -6277,13 +7573,13 @@
       </p:sp>
       <p:sp>
         <p:nvSpPr>
-          <p:cNvPr id="5" name="TextBox 4"/>
+          <p:cNvPr id="10" name="TextBox 9"/>
           <p:cNvSpPr txBox="1"/>
           <p:nvPr/>
         </p:nvSpPr>
         <p:spPr>
           <a:xfrm>
-            <a:off x="914400" y="2514600"/>
+            <a:off x="914400" y="2670048"/>
             <a:ext cx="10332720" cy="2011680"/>
           </a:xfrm>
           <a:prstGeom prst="rect">
@@ -6299,7 +7595,7 @@
           <a:p>
             <a:pPr algn="ctr">
               <a:lnSpc>
-                <a:spcPct val="122000"/>
+                <a:spcPct val="124000"/>
               </a:lnSpc>
             </a:pPr>
             <a:r>
@@ -6318,14 +7614,14 @@
       </p:sp>
       <p:sp>
         <p:nvSpPr>
-          <p:cNvPr id="6" name="TextBox 5"/>
+          <p:cNvPr id="11" name="TextBox 10"/>
           <p:cNvSpPr txBox="1"/>
           <p:nvPr/>
         </p:nvSpPr>
         <p:spPr>
           <a:xfrm>
-            <a:off x="1463040" y="4617720"/>
-            <a:ext cx="9235440" cy="1280160"/>
+            <a:off x="1554480" y="4736592"/>
+            <a:ext cx="9052560" cy="1280160"/>
           </a:xfrm>
           <a:prstGeom prst="rect">
             <a:avLst/>
@@ -6340,13 +7636,13 @@
           <a:p>
             <a:pPr algn="ctr">
               <a:lnSpc>
-                <a:spcPct val="130000"/>
+                <a:spcPct val="136000"/>
               </a:lnSpc>
             </a:pPr>
             <a:r>
               <a:rPr sz="1500" b="0" i="0">
                 <a:solidFill>
-                  <a:srgbClr val="CBD5E1"/>
+                  <a:srgbClr val="CBD2E0"/>
                 </a:solidFill>
                 <a:latin typeface="맑은 고딕"/>
                 <a:ea typeface="맑은 고딕"/>
@@ -6383,14 +7679,14 @@
         </p:nvSpPr>
         <p:spPr>
           <a:xfrm>
-            <a:off x="548640" y="475488"/>
-            <a:ext cx="91440" cy="475488"/>
+            <a:off x="0" y="0"/>
+            <a:ext cx="12191695" cy="6858000"/>
           </a:xfrm>
           <a:prstGeom prst="rect">
             <a:avLst/>
           </a:prstGeom>
           <a:solidFill>
-            <a:srgbClr val="2563EB"/>
+            <a:srgbClr val="F6F7F9"/>
           </a:solidFill>
           <a:ln>
             <a:noFill/>
@@ -6421,14 +7717,104 @@
       </p:sp>
       <p:sp>
         <p:nvSpPr>
-          <p:cNvPr id="3" name="TextBox 2"/>
+          <p:cNvPr id="3" name="Rectangle 2"/>
+          <p:cNvSpPr/>
+          <p:nvPr/>
+        </p:nvSpPr>
+        <p:spPr>
+          <a:xfrm>
+            <a:off x="0" y="0"/>
+            <a:ext cx="12191695" cy="128016"/>
+          </a:xfrm>
+          <a:prstGeom prst="rect">
+            <a:avLst/>
+          </a:prstGeom>
+          <a:solidFill>
+            <a:srgbClr val="4338CA"/>
+          </a:solidFill>
+          <a:ln>
+            <a:noFill/>
+          </a:ln>
+          <a:effectLst/>
+        </p:spPr>
+        <p:style>
+          <a:lnRef idx="1">
+            <a:schemeClr val="accent1"/>
+          </a:lnRef>
+          <a:fillRef idx="3">
+            <a:schemeClr val="accent1"/>
+          </a:fillRef>
+          <a:effectRef idx="2">
+            <a:schemeClr val="accent1"/>
+          </a:effectRef>
+          <a:fontRef idx="minor">
+            <a:schemeClr val="lt1"/>
+          </a:fontRef>
+        </p:style>
+        <p:txBody>
+          <a:bodyPr rtlCol="0" anchor="ctr"/>
+          <a:lstStyle/>
+          <a:p>
+            <a:pPr algn="ctr"/>
+          </a:p>
+        </p:txBody>
+      </p:sp>
+      <p:sp>
+        <p:nvSpPr>
+          <p:cNvPr id="4" name="Rounded Rectangle 3"/>
+          <p:cNvSpPr/>
+          <p:nvPr/>
+        </p:nvSpPr>
+        <p:spPr>
+          <a:xfrm>
+            <a:off x="566928" y="457200"/>
+            <a:ext cx="82296" cy="457200"/>
+          </a:xfrm>
+          <a:prstGeom prst="roundRect">
+            <a:avLst>
+              <a:gd name="adj" fmla="val 50000"/>
+            </a:avLst>
+          </a:prstGeom>
+          <a:solidFill>
+            <a:srgbClr val="4338CA"/>
+          </a:solidFill>
+          <a:ln>
+            <a:noFill/>
+          </a:ln>
+          <a:effectLst/>
+        </p:spPr>
+        <p:style>
+          <a:lnRef idx="1">
+            <a:schemeClr val="accent1"/>
+          </a:lnRef>
+          <a:fillRef idx="3">
+            <a:schemeClr val="accent1"/>
+          </a:fillRef>
+          <a:effectRef idx="2">
+            <a:schemeClr val="accent1"/>
+          </a:effectRef>
+          <a:fontRef idx="minor">
+            <a:schemeClr val="lt1"/>
+          </a:fontRef>
+        </p:style>
+        <p:txBody>
+          <a:bodyPr rtlCol="0" anchor="ctr"/>
+          <a:lstStyle/>
+          <a:p>
+            <a:pPr algn="ctr"/>
+          </a:p>
+        </p:txBody>
+      </p:sp>
+      <p:sp>
+        <p:nvSpPr>
+          <p:cNvPr id="5" name="TextBox 4"/>
           <p:cNvSpPr txBox="1"/>
           <p:nvPr/>
         </p:nvSpPr>
         <p:spPr>
           <a:xfrm>
-            <a:off x="786384" y="402336"/>
-            <a:ext cx="9326880" cy="640080"/>
+            <a:off x="804672" y="384048"/>
+            <a:ext cx="9144000" cy="603504"/>
           </a:xfrm>
           <a:prstGeom prst="rect">
             <a:avLst/>
@@ -6443,13 +7829,13 @@
           <a:p>
             <a:pPr algn="l">
               <a:lnSpc>
-                <a:spcPct val="112000"/>
+                <a:spcPct val="114000"/>
               </a:lnSpc>
             </a:pPr>
             <a:r>
-              <a:rPr sz="2300" b="1" i="0">
-                <a:solidFill>
-                  <a:srgbClr val="14213D"/>
+              <a:rPr sz="2200" b="1" i="0">
+                <a:solidFill>
+                  <a:srgbClr val="111927"/>
                 </a:solidFill>
                 <a:latin typeface="맑은 고딕"/>
                 <a:ea typeface="맑은 고딕"/>
@@ -6461,14 +7847,98 @@
       </p:sp>
       <p:sp>
         <p:nvSpPr>
-          <p:cNvPr id="4" name="TextBox 3"/>
+          <p:cNvPr id="6" name="Rectangle 5"/>
+          <p:cNvSpPr/>
+          <p:nvPr/>
+        </p:nvSpPr>
+        <p:spPr>
+          <a:xfrm>
+            <a:off x="566928" y="6547104"/>
+            <a:ext cx="182880" cy="25603"/>
+          </a:xfrm>
+          <a:prstGeom prst="rect">
+            <a:avLst/>
+          </a:prstGeom>
+          <a:solidFill>
+            <a:srgbClr val="4338CA"/>
+          </a:solidFill>
+          <a:ln>
+            <a:noFill/>
+          </a:ln>
+          <a:effectLst/>
+        </p:spPr>
+        <p:style>
+          <a:lnRef idx="1">
+            <a:schemeClr val="accent1"/>
+          </a:lnRef>
+          <a:fillRef idx="3">
+            <a:schemeClr val="accent1"/>
+          </a:fillRef>
+          <a:effectRef idx="2">
+            <a:schemeClr val="accent1"/>
+          </a:effectRef>
+          <a:fontRef idx="minor">
+            <a:schemeClr val="lt1"/>
+          </a:fontRef>
+        </p:style>
+        <p:txBody>
+          <a:bodyPr rtlCol="0" anchor="ctr"/>
+          <a:lstStyle/>
+          <a:p>
+            <a:pPr algn="ctr"/>
+          </a:p>
+        </p:txBody>
+      </p:sp>
+      <p:sp>
+        <p:nvSpPr>
+          <p:cNvPr id="7" name="TextBox 6"/>
           <p:cNvSpPr txBox="1"/>
           <p:nvPr/>
         </p:nvSpPr>
         <p:spPr>
           <a:xfrm>
-            <a:off x="548640" y="6510528"/>
-            <a:ext cx="11094415" cy="274320"/>
+            <a:off x="841248" y="6446520"/>
+            <a:ext cx="11057839" cy="274320"/>
+          </a:xfrm>
+          <a:prstGeom prst="rect">
+            <a:avLst/>
+          </a:prstGeom>
+          <a:noFill/>
+        </p:spPr>
+        <p:txBody>
+          <a:bodyPr wrap="square" anchor="ctr" lIns="0" rIns="0" tIns="0" bIns="0">
+            <a:spAutoFit/>
+          </a:bodyPr>
+          <a:lstStyle/>
+          <a:p>
+            <a:pPr algn="l">
+              <a:lnSpc>
+                <a:spcPct val="114000"/>
+              </a:lnSpc>
+            </a:pPr>
+            <a:r>
+              <a:rPr sz="900" b="0" i="0">
+                <a:solidFill>
+                  <a:srgbClr val="9AA4B2"/>
+                </a:solidFill>
+                <a:latin typeface="맑은 고딕"/>
+                <a:ea typeface="맑은 고딕"/>
+              </a:rPr>
+              <a:t>AI 시대 마케팅, 누가 살아남을까? — 6주 실무 스터디   |   4회차 · GEO 인용되는 브랜드</a:t>
+            </a:r>
+          </a:p>
+        </p:txBody>
+      </p:sp>
+      <p:sp>
+        <p:nvSpPr>
+          <p:cNvPr id="8" name="TextBox 7"/>
+          <p:cNvSpPr txBox="1"/>
+          <p:nvPr/>
+        </p:nvSpPr>
+        <p:spPr>
+          <a:xfrm>
+            <a:off x="713232" y="1225295"/>
+            <a:ext cx="10607040" cy="4709159"/>
           </a:xfrm>
           <a:prstGeom prst="rect">
             <a:avLst/>
@@ -6483,79 +7953,29 @@
           <a:p>
             <a:pPr algn="l">
               <a:lnSpc>
-                <a:spcPct val="112000"/>
-              </a:lnSpc>
-            </a:pPr>
-            <a:r>
-              <a:rPr sz="950" b="0" i="0">
-                <a:solidFill>
-                  <a:srgbClr val="94A3B8"/>
-                </a:solidFill>
-                <a:latin typeface="맑은 고딕"/>
-                <a:ea typeface="맑은 고딕"/>
-              </a:rPr>
-              <a:t>AI 시대 마케팅, 누가 살아남을까? — 6주 실무 스터디   |   4회차 · GEO 인용되는 브랜드</a:t>
-            </a:r>
-            <a:r>
-              <a:rPr sz="950" b="0" i="0">
-                <a:solidFill>
-                  <a:srgbClr val="94A3B8"/>
-                </a:solidFill>
-                <a:latin typeface="맑은 고딕"/>
-                <a:ea typeface="맑은 고딕"/>
-              </a:rPr>
-              <a:t/>
-            </a:r>
-          </a:p>
-        </p:txBody>
-      </p:sp>
-      <p:sp>
-        <p:nvSpPr>
-          <p:cNvPr id="5" name="TextBox 4"/>
-          <p:cNvSpPr txBox="1"/>
-          <p:nvPr/>
-        </p:nvSpPr>
-        <p:spPr>
-          <a:xfrm>
-            <a:off x="685800" y="1225295"/>
-            <a:ext cx="10698480" cy="4736592"/>
-          </a:xfrm>
-          <a:prstGeom prst="rect">
-            <a:avLst/>
-          </a:prstGeom>
-          <a:noFill/>
-        </p:spPr>
-        <p:txBody>
-          <a:bodyPr wrap="square" anchor="t" lIns="0" rIns="0" tIns="0" bIns="0">
-            <a:spAutoFit/>
-          </a:bodyPr>
-          <a:lstStyle/>
-          <a:p>
-            <a:pPr algn="l">
-              <a:lnSpc>
-                <a:spcPct val="118000"/>
+                <a:spcPct val="120000"/>
               </a:lnSpc>
               <a:spcBef>
-                <a:spcPts val="600"/>
+                <a:spcPts val="700"/>
               </a:spcBef>
               <a:spcAft>
                 <a:spcPts val="500"/>
               </a:spcAft>
             </a:pPr>
             <a:r>
-              <a:rPr sz="1150" b="0" i="0">
-                <a:solidFill>
-                  <a:srgbClr val="2563EB"/>
-                </a:solidFill>
-                <a:latin typeface="맑은 고딕"/>
-                <a:ea typeface="맑은 고딕"/>
-              </a:rPr>
-              <a:t>●  </a:t>
+              <a:rPr sz="950" b="0" i="0">
+                <a:solidFill>
+                  <a:srgbClr val="4338CA"/>
+                </a:solidFill>
+                <a:latin typeface="맑은 고딕"/>
+                <a:ea typeface="맑은 고딕"/>
+              </a:rPr>
+              <a:t>■  </a:t>
             </a:r>
             <a:r>
               <a:rPr sz="1550" b="1" i="0">
                 <a:solidFill>
-                  <a:srgbClr val="1F2937"/>
+                  <a:srgbClr val="111927"/>
                 </a:solidFill>
                 <a:latin typeface="맑은 고딕"/>
                 <a:ea typeface="맑은 고딕"/>
@@ -6566,29 +7986,29 @@
           <a:p>
             <a:pPr algn="l">
               <a:lnSpc>
-                <a:spcPct val="118000"/>
+                <a:spcPct val="120000"/>
               </a:lnSpc>
               <a:spcBef>
-                <a:spcPts val="600"/>
+                <a:spcPts val="700"/>
               </a:spcBef>
               <a:spcAft>
                 <a:spcPts val="500"/>
               </a:spcAft>
             </a:pPr>
             <a:r>
-              <a:rPr sz="1150" b="0" i="0">
-                <a:solidFill>
-                  <a:srgbClr val="2563EB"/>
-                </a:solidFill>
-                <a:latin typeface="맑은 고딕"/>
-                <a:ea typeface="맑은 고딕"/>
-              </a:rPr>
-              <a:t>●  </a:t>
+              <a:rPr sz="950" b="0" i="0">
+                <a:solidFill>
+                  <a:srgbClr val="4338CA"/>
+                </a:solidFill>
+                <a:latin typeface="맑은 고딕"/>
+                <a:ea typeface="맑은 고딕"/>
+              </a:rPr>
+              <a:t>■  </a:t>
             </a:r>
             <a:r>
               <a:rPr sz="1550" b="1" i="0">
                 <a:solidFill>
-                  <a:srgbClr val="1F2937"/>
+                  <a:srgbClr val="111927"/>
                 </a:solidFill>
                 <a:latin typeface="맑은 고딕"/>
                 <a:ea typeface="맑은 고딕"/>
@@ -6599,7 +8019,7 @@
           <a:p>
             <a:pPr algn="l">
               <a:lnSpc>
-                <a:spcPct val="115000"/>
+                <a:spcPct val="116000"/>
               </a:lnSpc>
               <a:spcBef>
                 <a:spcPts val="100"/>
@@ -6611,7 +8031,7 @@
             <a:r>
               <a:rPr sz="1250" b="0" i="0">
                 <a:solidFill>
-                  <a:srgbClr val="9CA3AF"/>
+                  <a:srgbClr val="9AA4B2"/>
                 </a:solidFill>
                 <a:latin typeface="맑은 고딕"/>
                 <a:ea typeface="맑은 고딕"/>
@@ -6621,7 +8041,7 @@
             <a:r>
               <a:rPr sz="1300" b="0" i="0">
                 <a:solidFill>
-                  <a:srgbClr val="4B5563"/>
+                  <a:srgbClr val="374151"/>
                 </a:solidFill>
                 <a:latin typeface="맑은 고딕"/>
                 <a:ea typeface="맑은 고딕"/>
@@ -6632,29 +8052,29 @@
           <a:p>
             <a:pPr algn="l">
               <a:lnSpc>
-                <a:spcPct val="118000"/>
+                <a:spcPct val="120000"/>
               </a:lnSpc>
               <a:spcBef>
-                <a:spcPts val="600"/>
+                <a:spcPts val="700"/>
               </a:spcBef>
               <a:spcAft>
                 <a:spcPts val="500"/>
               </a:spcAft>
             </a:pPr>
             <a:r>
-              <a:rPr sz="1150" b="0" i="0">
-                <a:solidFill>
-                  <a:srgbClr val="2563EB"/>
-                </a:solidFill>
-                <a:latin typeface="맑은 고딕"/>
-                <a:ea typeface="맑은 고딕"/>
-              </a:rPr>
-              <a:t>●  </a:t>
+              <a:rPr sz="950" b="0" i="0">
+                <a:solidFill>
+                  <a:srgbClr val="4338CA"/>
+                </a:solidFill>
+                <a:latin typeface="맑은 고딕"/>
+                <a:ea typeface="맑은 고딕"/>
+              </a:rPr>
+              <a:t>■  </a:t>
             </a:r>
             <a:r>
               <a:rPr sz="1550" b="1" i="0">
                 <a:solidFill>
-                  <a:srgbClr val="1F2937"/>
+                  <a:srgbClr val="111927"/>
                 </a:solidFill>
                 <a:latin typeface="맑은 고딕"/>
                 <a:ea typeface="맑은 고딕"/>
@@ -6665,29 +8085,29 @@
           <a:p>
             <a:pPr algn="l">
               <a:lnSpc>
-                <a:spcPct val="118000"/>
+                <a:spcPct val="120000"/>
               </a:lnSpc>
               <a:spcBef>
-                <a:spcPts val="600"/>
+                <a:spcPts val="700"/>
               </a:spcBef>
               <a:spcAft>
                 <a:spcPts val="500"/>
               </a:spcAft>
             </a:pPr>
             <a:r>
-              <a:rPr sz="1150" b="0" i="0">
-                <a:solidFill>
-                  <a:srgbClr val="2563EB"/>
-                </a:solidFill>
-                <a:latin typeface="맑은 고딕"/>
-                <a:ea typeface="맑은 고딕"/>
-              </a:rPr>
-              <a:t>●  </a:t>
+              <a:rPr sz="950" b="0" i="0">
+                <a:solidFill>
+                  <a:srgbClr val="4338CA"/>
+                </a:solidFill>
+                <a:latin typeface="맑은 고딕"/>
+                <a:ea typeface="맑은 고딕"/>
+              </a:rPr>
+              <a:t>■  </a:t>
             </a:r>
             <a:r>
               <a:rPr sz="1550" b="1" i="0">
                 <a:solidFill>
-                  <a:srgbClr val="1F2937"/>
+                  <a:srgbClr val="111927"/>
                 </a:solidFill>
                 <a:latin typeface="맑은 고딕"/>
                 <a:ea typeface="맑은 고딕"/>
@@ -6698,7 +8118,7 @@
           <a:p>
             <a:pPr algn="l">
               <a:lnSpc>
-                <a:spcPct val="115000"/>
+                <a:spcPct val="116000"/>
               </a:lnSpc>
               <a:spcBef>
                 <a:spcPts val="100"/>
@@ -6710,7 +8130,7 @@
             <a:r>
               <a:rPr sz="1250" b="0" i="0">
                 <a:solidFill>
-                  <a:srgbClr val="9CA3AF"/>
+                  <a:srgbClr val="9AA4B2"/>
                 </a:solidFill>
                 <a:latin typeface="맑은 고딕"/>
                 <a:ea typeface="맑은 고딕"/>
@@ -6720,7 +8140,7 @@
             <a:r>
               <a:rPr sz="1300" b="0" i="0">
                 <a:solidFill>
-                  <a:srgbClr val="4B5563"/>
+                  <a:srgbClr val="374151"/>
                 </a:solidFill>
                 <a:latin typeface="맑은 고딕"/>
                 <a:ea typeface="맑은 고딕"/>
@@ -6731,29 +8151,29 @@
           <a:p>
             <a:pPr algn="l">
               <a:lnSpc>
-                <a:spcPct val="118000"/>
+                <a:spcPct val="120000"/>
               </a:lnSpc>
               <a:spcBef>
-                <a:spcPts val="600"/>
+                <a:spcPts val="700"/>
               </a:spcBef>
               <a:spcAft>
                 <a:spcPts val="500"/>
               </a:spcAft>
             </a:pPr>
             <a:r>
-              <a:rPr sz="1150" b="0" i="0">
-                <a:solidFill>
-                  <a:srgbClr val="2563EB"/>
-                </a:solidFill>
-                <a:latin typeface="맑은 고딕"/>
-                <a:ea typeface="맑은 고딕"/>
-              </a:rPr>
-              <a:t>●  </a:t>
+              <a:rPr sz="950" b="0" i="0">
+                <a:solidFill>
+                  <a:srgbClr val="4338CA"/>
+                </a:solidFill>
+                <a:latin typeface="맑은 고딕"/>
+                <a:ea typeface="맑은 고딕"/>
+              </a:rPr>
+              <a:t>■  </a:t>
             </a:r>
             <a:r>
               <a:rPr sz="1550" b="1" i="0">
                 <a:solidFill>
-                  <a:srgbClr val="1F2937"/>
+                  <a:srgbClr val="111927"/>
                 </a:solidFill>
                 <a:latin typeface="맑은 고딕"/>
                 <a:ea typeface="맑은 고딕"/>
@@ -6764,24 +8184,24 @@
           <a:p>
             <a:pPr algn="l">
               <a:lnSpc>
-                <a:spcPct val="118000"/>
+                <a:spcPct val="120000"/>
               </a:lnSpc>
               <a:spcBef>
-                <a:spcPts val="600"/>
+                <a:spcPts val="700"/>
               </a:spcBef>
               <a:spcAft>
                 <a:spcPts val="500"/>
               </a:spcAft>
             </a:pPr>
             <a:r>
-              <a:rPr sz="1150" b="0" i="0">
-                <a:solidFill>
-                  <a:srgbClr val="2563EB"/>
-                </a:solidFill>
-                <a:latin typeface="맑은 고딕"/>
-                <a:ea typeface="맑은 고딕"/>
-              </a:rPr>
-              <a:t>●  </a:t>
+              <a:rPr sz="950" b="0" i="0">
+                <a:solidFill>
+                  <a:srgbClr val="4338CA"/>
+                </a:solidFill>
+                <a:latin typeface="맑은 고딕"/>
+                <a:ea typeface="맑은 고딕"/>
+              </a:rPr>
+              <a:t>■  </a:t>
             </a:r>
             <a:r>
               <a:rPr sz="1550" b="1" i="0">
@@ -6822,14 +8242,14 @@
         </p:nvSpPr>
         <p:spPr>
           <a:xfrm>
-            <a:off x="548640" y="475488"/>
-            <a:ext cx="91440" cy="475488"/>
+            <a:off x="0" y="0"/>
+            <a:ext cx="12191695" cy="6858000"/>
           </a:xfrm>
           <a:prstGeom prst="rect">
             <a:avLst/>
           </a:prstGeom>
           <a:solidFill>
-            <a:srgbClr val="2563EB"/>
+            <a:srgbClr val="F6F7F9"/>
           </a:solidFill>
           <a:ln>
             <a:noFill/>
@@ -6860,14 +8280,104 @@
       </p:sp>
       <p:sp>
         <p:nvSpPr>
-          <p:cNvPr id="3" name="TextBox 2"/>
+          <p:cNvPr id="3" name="Rectangle 2"/>
+          <p:cNvSpPr/>
+          <p:nvPr/>
+        </p:nvSpPr>
+        <p:spPr>
+          <a:xfrm>
+            <a:off x="0" y="0"/>
+            <a:ext cx="12191695" cy="128016"/>
+          </a:xfrm>
+          <a:prstGeom prst="rect">
+            <a:avLst/>
+          </a:prstGeom>
+          <a:solidFill>
+            <a:srgbClr val="4338CA"/>
+          </a:solidFill>
+          <a:ln>
+            <a:noFill/>
+          </a:ln>
+          <a:effectLst/>
+        </p:spPr>
+        <p:style>
+          <a:lnRef idx="1">
+            <a:schemeClr val="accent1"/>
+          </a:lnRef>
+          <a:fillRef idx="3">
+            <a:schemeClr val="accent1"/>
+          </a:fillRef>
+          <a:effectRef idx="2">
+            <a:schemeClr val="accent1"/>
+          </a:effectRef>
+          <a:fontRef idx="minor">
+            <a:schemeClr val="lt1"/>
+          </a:fontRef>
+        </p:style>
+        <p:txBody>
+          <a:bodyPr rtlCol="0" anchor="ctr"/>
+          <a:lstStyle/>
+          <a:p>
+            <a:pPr algn="ctr"/>
+          </a:p>
+        </p:txBody>
+      </p:sp>
+      <p:sp>
+        <p:nvSpPr>
+          <p:cNvPr id="4" name="Rounded Rectangle 3"/>
+          <p:cNvSpPr/>
+          <p:nvPr/>
+        </p:nvSpPr>
+        <p:spPr>
+          <a:xfrm>
+            <a:off x="566928" y="457200"/>
+            <a:ext cx="82296" cy="457200"/>
+          </a:xfrm>
+          <a:prstGeom prst="roundRect">
+            <a:avLst>
+              <a:gd name="adj" fmla="val 50000"/>
+            </a:avLst>
+          </a:prstGeom>
+          <a:solidFill>
+            <a:srgbClr val="4338CA"/>
+          </a:solidFill>
+          <a:ln>
+            <a:noFill/>
+          </a:ln>
+          <a:effectLst/>
+        </p:spPr>
+        <p:style>
+          <a:lnRef idx="1">
+            <a:schemeClr val="accent1"/>
+          </a:lnRef>
+          <a:fillRef idx="3">
+            <a:schemeClr val="accent1"/>
+          </a:fillRef>
+          <a:effectRef idx="2">
+            <a:schemeClr val="accent1"/>
+          </a:effectRef>
+          <a:fontRef idx="minor">
+            <a:schemeClr val="lt1"/>
+          </a:fontRef>
+        </p:style>
+        <p:txBody>
+          <a:bodyPr rtlCol="0" anchor="ctr"/>
+          <a:lstStyle/>
+          <a:p>
+            <a:pPr algn="ctr"/>
+          </a:p>
+        </p:txBody>
+      </p:sp>
+      <p:sp>
+        <p:nvSpPr>
+          <p:cNvPr id="5" name="TextBox 4"/>
           <p:cNvSpPr txBox="1"/>
           <p:nvPr/>
         </p:nvSpPr>
         <p:spPr>
           <a:xfrm>
-            <a:off x="786384" y="402336"/>
-            <a:ext cx="9326880" cy="640080"/>
+            <a:off x="804672" y="384048"/>
+            <a:ext cx="9144000" cy="603504"/>
           </a:xfrm>
           <a:prstGeom prst="rect">
             <a:avLst/>
@@ -6882,13 +8392,13 @@
           <a:p>
             <a:pPr algn="l">
               <a:lnSpc>
-                <a:spcPct val="112000"/>
+                <a:spcPct val="114000"/>
               </a:lnSpc>
             </a:pPr>
             <a:r>
-              <a:rPr sz="2300" b="1" i="0">
-                <a:solidFill>
-                  <a:srgbClr val="14213D"/>
+              <a:rPr sz="2200" b="1" i="0">
+                <a:solidFill>
+                  <a:srgbClr val="111927"/>
                 </a:solidFill>
                 <a:latin typeface="맑은 고딕"/>
                 <a:ea typeface="맑은 고딕"/>
@@ -6900,78 +8410,112 @@
       </p:sp>
       <p:sp>
         <p:nvSpPr>
-          <p:cNvPr id="4" name="TextBox 3"/>
-          <p:cNvSpPr txBox="1"/>
-          <p:nvPr/>
-        </p:nvSpPr>
-        <p:spPr>
-          <a:xfrm>
-            <a:off x="548640" y="6510528"/>
-            <a:ext cx="11094415" cy="274320"/>
+          <p:cNvPr id="6" name="Rectangle 5"/>
+          <p:cNvSpPr/>
+          <p:nvPr/>
+        </p:nvSpPr>
+        <p:spPr>
+          <a:xfrm>
+            <a:off x="566928" y="6547104"/>
+            <a:ext cx="182880" cy="25603"/>
           </a:xfrm>
           <a:prstGeom prst="rect">
             <a:avLst/>
           </a:prstGeom>
+          <a:solidFill>
+            <a:srgbClr val="4338CA"/>
+          </a:solidFill>
+          <a:ln>
+            <a:noFill/>
+          </a:ln>
+          <a:effectLst/>
+        </p:spPr>
+        <p:style>
+          <a:lnRef idx="1">
+            <a:schemeClr val="accent1"/>
+          </a:lnRef>
+          <a:fillRef idx="3">
+            <a:schemeClr val="accent1"/>
+          </a:fillRef>
+          <a:effectRef idx="2">
+            <a:schemeClr val="accent1"/>
+          </a:effectRef>
+          <a:fontRef idx="minor">
+            <a:schemeClr val="lt1"/>
+          </a:fontRef>
+        </p:style>
+        <p:txBody>
+          <a:bodyPr rtlCol="0" anchor="ctr"/>
+          <a:lstStyle/>
+          <a:p>
+            <a:pPr algn="ctr"/>
+          </a:p>
+        </p:txBody>
+      </p:sp>
+      <p:sp>
+        <p:nvSpPr>
+          <p:cNvPr id="7" name="TextBox 6"/>
+          <p:cNvSpPr txBox="1"/>
+          <p:nvPr/>
+        </p:nvSpPr>
+        <p:spPr>
+          <a:xfrm>
+            <a:off x="841248" y="6446520"/>
+            <a:ext cx="11057839" cy="274320"/>
+          </a:xfrm>
+          <a:prstGeom prst="rect">
+            <a:avLst/>
+          </a:prstGeom>
           <a:noFill/>
         </p:spPr>
         <p:txBody>
-          <a:bodyPr wrap="square" anchor="t" lIns="0" rIns="0" tIns="0" bIns="0">
+          <a:bodyPr wrap="square" anchor="ctr" lIns="0" rIns="0" tIns="0" bIns="0">
             <a:spAutoFit/>
           </a:bodyPr>
           <a:lstStyle/>
           <a:p>
             <a:pPr algn="l">
               <a:lnSpc>
-                <a:spcPct val="112000"/>
+                <a:spcPct val="114000"/>
               </a:lnSpc>
             </a:pPr>
             <a:r>
-              <a:rPr sz="950" b="0" i="0">
-                <a:solidFill>
-                  <a:srgbClr val="94A3B8"/>
+              <a:rPr sz="900" b="0" i="0">
+                <a:solidFill>
+                  <a:srgbClr val="9AA4B2"/>
                 </a:solidFill>
                 <a:latin typeface="맑은 고딕"/>
                 <a:ea typeface="맑은 고딕"/>
               </a:rPr>
               <a:t>AI 시대 마케팅, 누가 살아남을까? — 6주 실무 스터디   |   4회차 · GEO 인용되는 브랜드</a:t>
-            </a:r>
-            <a:r>
-              <a:rPr sz="950" b="0" i="0">
-                <a:solidFill>
-                  <a:srgbClr val="94A3B8"/>
-                </a:solidFill>
-                <a:latin typeface="맑은 고딕"/>
-                <a:ea typeface="맑은 고딕"/>
-              </a:rPr>
-              <a:t/>
             </a:r>
           </a:p>
         </p:txBody>
       </p:sp>
       <p:graphicFrame>
         <p:nvGraphicFramePr>
-          <p:cNvPr id="5" name="Table 4"/>
+          <p:cNvPr id="8" name="Table 7"/>
           <p:cNvGraphicFramePr>
             <a:graphicFrameLocks noGrp="1"/>
           </p:cNvGraphicFramePr>
           <p:nvPr/>
         </p:nvGraphicFramePr>
         <p:xfrm>
-          <a:off x="548640" y="1188720"/>
-          <a:ext cx="11094414" cy="2993136"/>
+          <a:off x="566928" y="1207007"/>
+          <a:ext cx="11057838" cy="2890520"/>
         </p:xfrm>
         <a:graphic>
           <a:graphicData uri="http://schemas.openxmlformats.org/drawingml/2006/table">
             <a:tbl>
-              <a:tblPr firstRow="1" bandRow="1">
+              <a:tblPr>
                 <a:tableStyleId>{5C22544A-7EE6-4342-B048-85BDC9FD1C3A}</a:tableStyleId>
               </a:tblPr>
               <a:tblGrid>
-                <a:gridCol w="1283651"/>
-                <a:gridCol w="5134605"/>
-                <a:gridCol w="4676158"/>
+                <a:gridCol w="1279419"/>
+                <a:gridCol w="5117677"/>
+                <a:gridCol w="4660742"/>
               </a:tblGrid>
-              <a:tr h="304800">
+              <a:tr h="330200">
                 <a:tc>
                   <a:txBody>
                     <a:bodyPr wrap="square"/>
@@ -6979,7 +8523,7 @@
                     <a:p>
                       <a:pPr algn="ctr">
                         <a:lnSpc>
-                          <a:spcPct val="108000"/>
+                          <a:spcPct val="110000"/>
                         </a:lnSpc>
                       </a:pPr>
                       <a:r>
@@ -6994,9 +8538,9 @@
                       </a:r>
                     </a:p>
                   </a:txBody>
-                  <a:tcPr anchor="ctr" marL="73152" marR="73152" marT="27432" marB="27432">
+                  <a:tcPr anchor="ctr" marL="100584" marR="91440" marT="41148" marB="41148">
                     <a:solidFill>
-                      <a:srgbClr val="14213D"/>
+                      <a:srgbClr val="4338CA"/>
                     </a:solidFill>
                   </a:tcPr>
                 </a:tc>
@@ -7007,7 +8551,7 @@
                     <a:p>
                       <a:pPr algn="ctr">
                         <a:lnSpc>
-                          <a:spcPct val="108000"/>
+                          <a:spcPct val="110000"/>
                         </a:lnSpc>
                       </a:pPr>
                       <a:r>
@@ -7022,9 +8566,9 @@
                       </a:r>
                     </a:p>
                   </a:txBody>
-                  <a:tcPr anchor="ctr" marL="73152" marR="73152" marT="27432" marB="27432">
+                  <a:tcPr anchor="ctr" marL="100584" marR="91440" marT="41148" marB="41148">
                     <a:solidFill>
-                      <a:srgbClr val="14213D"/>
+                      <a:srgbClr val="4338CA"/>
                     </a:solidFill>
                   </a:tcPr>
                 </a:tc>
@@ -7035,7 +8579,7 @@
                     <a:p>
                       <a:pPr algn="ctr">
                         <a:lnSpc>
-                          <a:spcPct val="108000"/>
+                          <a:spcPct val="110000"/>
                         </a:lnSpc>
                       </a:pPr>
                       <a:r>
@@ -7050,14 +8594,14 @@
                       </a:r>
                     </a:p>
                   </a:txBody>
-                  <a:tcPr anchor="ctr" marL="73152" marR="73152" marT="27432" marB="27432">
+                  <a:tcPr anchor="ctr" marL="100584" marR="91440" marT="41148" marB="41148">
                     <a:solidFill>
-                      <a:srgbClr val="14213D"/>
+                      <a:srgbClr val="4338CA"/>
                     </a:solidFill>
                   </a:tcPr>
                 </a:tc>
               </a:tr>
-              <a:tr h="384048">
+              <a:tr h="365760">
                 <a:tc>
                   <a:txBody>
                     <a:bodyPr wrap="square"/>
@@ -7065,13 +8609,13 @@
                     <a:p>
                       <a:pPr algn="l">
                         <a:lnSpc>
-                          <a:spcPct val="108000"/>
+                          <a:spcPct val="110000"/>
                         </a:lnSpc>
                       </a:pPr>
                       <a:r>
                         <a:rPr sz="1150" b="1" i="0">
                           <a:solidFill>
-                            <a:srgbClr val="14213D"/>
+                            <a:srgbClr val="111927"/>
                           </a:solidFill>
                           <a:latin typeface="맑은 고딕"/>
                           <a:ea typeface="맑은 고딕"/>
@@ -7080,7 +8624,7 @@
                       </a:r>
                     </a:p>
                   </a:txBody>
-                  <a:tcPr anchor="ctr" marL="73152" marR="73152" marT="27432" marB="27432">
+                  <a:tcPr anchor="ctr" marL="100584" marR="91440" marT="41148" marB="41148">
                     <a:solidFill>
                       <a:srgbClr val="FFFFFF"/>
                     </a:solidFill>
@@ -7093,7 +8637,7 @@
                     <a:p>
                       <a:pPr algn="l">
                         <a:lnSpc>
-                          <a:spcPct val="108000"/>
+                          <a:spcPct val="110000"/>
                         </a:lnSpc>
                       </a:pPr>
                       <a:r>
@@ -7108,7 +8652,7 @@
                       </a:r>
                     </a:p>
                   </a:txBody>
-                  <a:tcPr anchor="ctr" marL="73152" marR="73152" marT="27432" marB="27432">
+                  <a:tcPr anchor="ctr" marL="100584" marR="91440" marT="41148" marB="41148">
                     <a:solidFill>
                       <a:srgbClr val="FFFFFF"/>
                     </a:solidFill>
@@ -7121,7 +8665,7 @@
                     <a:p>
                       <a:pPr algn="l">
                         <a:lnSpc>
-                          <a:spcPct val="108000"/>
+                          <a:spcPct val="110000"/>
                         </a:lnSpc>
                       </a:pPr>
                       <a:r>
@@ -7136,14 +8680,14 @@
                       </a:r>
                     </a:p>
                   </a:txBody>
-                  <a:tcPr anchor="ctr" marL="73152" marR="73152" marT="27432" marB="27432">
+                  <a:tcPr anchor="ctr" marL="100584" marR="91440" marT="41148" marB="41148">
                     <a:solidFill>
                       <a:srgbClr val="FFFFFF"/>
                     </a:solidFill>
                   </a:tcPr>
                 </a:tc>
               </a:tr>
-              <a:tr h="384048">
+              <a:tr h="365760">
                 <a:tc>
                   <a:txBody>
                     <a:bodyPr wrap="square"/>
@@ -7151,13 +8695,13 @@
                     <a:p>
                       <a:pPr algn="l">
                         <a:lnSpc>
-                          <a:spcPct val="108000"/>
+                          <a:spcPct val="110000"/>
                         </a:lnSpc>
                       </a:pPr>
                       <a:r>
                         <a:rPr sz="1150" b="1" i="0">
                           <a:solidFill>
-                            <a:srgbClr val="14213D"/>
+                            <a:srgbClr val="111927"/>
                           </a:solidFill>
                           <a:latin typeface="맑은 고딕"/>
                           <a:ea typeface="맑은 고딕"/>
@@ -7166,9 +8710,9 @@
                       </a:r>
                     </a:p>
                   </a:txBody>
-                  <a:tcPr anchor="ctr" marL="73152" marR="73152" marT="27432" marB="27432">
+                  <a:tcPr anchor="ctr" marL="100584" marR="91440" marT="41148" marB="41148">
                     <a:solidFill>
-                      <a:srgbClr val="EEF2F7"/>
+                      <a:srgbClr val="EEF0FB"/>
                     </a:solidFill>
                   </a:tcPr>
                 </a:tc>
@@ -7179,7 +8723,7 @@
                     <a:p>
                       <a:pPr algn="l">
                         <a:lnSpc>
-                          <a:spcPct val="108000"/>
+                          <a:spcPct val="110000"/>
                         </a:lnSpc>
                       </a:pPr>
                       <a:r>
@@ -7194,9 +8738,9 @@
                       </a:r>
                     </a:p>
                   </a:txBody>
-                  <a:tcPr anchor="ctr" marL="73152" marR="73152" marT="27432" marB="27432">
+                  <a:tcPr anchor="ctr" marL="100584" marR="91440" marT="41148" marB="41148">
                     <a:solidFill>
-                      <a:srgbClr val="EEF2F7"/>
+                      <a:srgbClr val="EEF0FB"/>
                     </a:solidFill>
                   </a:tcPr>
                 </a:tc>
@@ -7207,7 +8751,7 @@
                     <a:p>
                       <a:pPr algn="l">
                         <a:lnSpc>
-                          <a:spcPct val="108000"/>
+                          <a:spcPct val="110000"/>
                         </a:lnSpc>
                       </a:pPr>
                       <a:r>
@@ -7222,14 +8766,14 @@
                       </a:r>
                     </a:p>
                   </a:txBody>
-                  <a:tcPr anchor="ctr" marL="73152" marR="73152" marT="27432" marB="27432">
+                  <a:tcPr anchor="ctr" marL="100584" marR="91440" marT="41148" marB="41148">
                     <a:solidFill>
-                      <a:srgbClr val="EEF2F7"/>
+                      <a:srgbClr val="EEF0FB"/>
                     </a:solidFill>
                   </a:tcPr>
                 </a:tc>
               </a:tr>
-              <a:tr h="384048">
+              <a:tr h="365760">
                 <a:tc>
                   <a:txBody>
                     <a:bodyPr wrap="square"/>
@@ -7237,13 +8781,13 @@
                     <a:p>
                       <a:pPr algn="l">
                         <a:lnSpc>
-                          <a:spcPct val="108000"/>
+                          <a:spcPct val="110000"/>
                         </a:lnSpc>
                       </a:pPr>
                       <a:r>
                         <a:rPr sz="1150" b="1" i="0">
                           <a:solidFill>
-                            <a:srgbClr val="14213D"/>
+                            <a:srgbClr val="111927"/>
                           </a:solidFill>
                           <a:latin typeface="맑은 고딕"/>
                           <a:ea typeface="맑은 고딕"/>
@@ -7252,7 +8796,7 @@
                       </a:r>
                     </a:p>
                   </a:txBody>
-                  <a:tcPr anchor="ctr" marL="73152" marR="73152" marT="27432" marB="27432">
+                  <a:tcPr anchor="ctr" marL="100584" marR="91440" marT="41148" marB="41148">
                     <a:solidFill>
                       <a:srgbClr val="FFFFFF"/>
                     </a:solidFill>
@@ -7265,7 +8809,7 @@
                     <a:p>
                       <a:pPr algn="l">
                         <a:lnSpc>
-                          <a:spcPct val="108000"/>
+                          <a:spcPct val="110000"/>
                         </a:lnSpc>
                       </a:pPr>
                       <a:r>
@@ -7280,7 +8824,7 @@
                       </a:r>
                     </a:p>
                   </a:txBody>
-                  <a:tcPr anchor="ctr" marL="73152" marR="73152" marT="27432" marB="27432">
+                  <a:tcPr anchor="ctr" marL="100584" marR="91440" marT="41148" marB="41148">
                     <a:solidFill>
                       <a:srgbClr val="FFFFFF"/>
                     </a:solidFill>
@@ -7293,7 +8837,7 @@
                     <a:p>
                       <a:pPr algn="l">
                         <a:lnSpc>
-                          <a:spcPct val="108000"/>
+                          <a:spcPct val="110000"/>
                         </a:lnSpc>
                       </a:pPr>
                       <a:r>
@@ -7308,14 +8852,14 @@
                       </a:r>
                     </a:p>
                   </a:txBody>
-                  <a:tcPr anchor="ctr" marL="73152" marR="73152" marT="27432" marB="27432">
+                  <a:tcPr anchor="ctr" marL="100584" marR="91440" marT="41148" marB="41148">
                     <a:solidFill>
                       <a:srgbClr val="FFFFFF"/>
                     </a:solidFill>
                   </a:tcPr>
                 </a:tc>
               </a:tr>
-              <a:tr h="384048">
+              <a:tr h="365760">
                 <a:tc>
                   <a:txBody>
                     <a:bodyPr wrap="square"/>
@@ -7323,13 +8867,13 @@
                     <a:p>
                       <a:pPr algn="l">
                         <a:lnSpc>
-                          <a:spcPct val="108000"/>
+                          <a:spcPct val="110000"/>
                         </a:lnSpc>
                       </a:pPr>
                       <a:r>
                         <a:rPr sz="1150" b="1" i="0">
                           <a:solidFill>
-                            <a:srgbClr val="14213D"/>
+                            <a:srgbClr val="111927"/>
                           </a:solidFill>
                           <a:latin typeface="맑은 고딕"/>
                           <a:ea typeface="맑은 고딕"/>
@@ -7338,9 +8882,9 @@
                       </a:r>
                     </a:p>
                   </a:txBody>
-                  <a:tcPr anchor="ctr" marL="73152" marR="73152" marT="27432" marB="27432">
+                  <a:tcPr anchor="ctr" marL="100584" marR="91440" marT="41148" marB="41148">
                     <a:solidFill>
-                      <a:srgbClr val="EEF2F7"/>
+                      <a:srgbClr val="EEF0FB"/>
                     </a:solidFill>
                   </a:tcPr>
                 </a:tc>
@@ -7351,7 +8895,7 @@
                     <a:p>
                       <a:pPr algn="l">
                         <a:lnSpc>
-                          <a:spcPct val="108000"/>
+                          <a:spcPct val="110000"/>
                         </a:lnSpc>
                       </a:pPr>
                       <a:r>
@@ -7366,9 +8910,9 @@
                       </a:r>
                     </a:p>
                   </a:txBody>
-                  <a:tcPr anchor="ctr" marL="73152" marR="73152" marT="27432" marB="27432">
+                  <a:tcPr anchor="ctr" marL="100584" marR="91440" marT="41148" marB="41148">
                     <a:solidFill>
-                      <a:srgbClr val="EEF2F7"/>
+                      <a:srgbClr val="EEF0FB"/>
                     </a:solidFill>
                   </a:tcPr>
                 </a:tc>
@@ -7379,7 +8923,7 @@
                     <a:p>
                       <a:pPr algn="l">
                         <a:lnSpc>
-                          <a:spcPct val="108000"/>
+                          <a:spcPct val="110000"/>
                         </a:lnSpc>
                       </a:pPr>
                       <a:r>
@@ -7394,14 +8938,14 @@
                       </a:r>
                     </a:p>
                   </a:txBody>
-                  <a:tcPr anchor="ctr" marL="73152" marR="73152" marT="27432" marB="27432">
+                  <a:tcPr anchor="ctr" marL="100584" marR="91440" marT="41148" marB="41148">
                     <a:solidFill>
-                      <a:srgbClr val="EEF2F7"/>
+                      <a:srgbClr val="EEF0FB"/>
                     </a:solidFill>
                   </a:tcPr>
                 </a:tc>
               </a:tr>
-              <a:tr h="384048">
+              <a:tr h="365760">
                 <a:tc>
                   <a:txBody>
                     <a:bodyPr wrap="square"/>
@@ -7409,13 +8953,13 @@
                     <a:p>
                       <a:pPr algn="l">
                         <a:lnSpc>
-                          <a:spcPct val="108000"/>
+                          <a:spcPct val="110000"/>
                         </a:lnSpc>
                       </a:pPr>
                       <a:r>
                         <a:rPr sz="1150" b="1" i="0">
                           <a:solidFill>
-                            <a:srgbClr val="14213D"/>
+                            <a:srgbClr val="111927"/>
                           </a:solidFill>
                           <a:latin typeface="맑은 고딕"/>
                           <a:ea typeface="맑은 고딕"/>
@@ -7424,7 +8968,7 @@
                       </a:r>
                     </a:p>
                   </a:txBody>
-                  <a:tcPr anchor="ctr" marL="73152" marR="73152" marT="27432" marB="27432">
+                  <a:tcPr anchor="ctr" marL="100584" marR="91440" marT="41148" marB="41148">
                     <a:solidFill>
                       <a:srgbClr val="FFFFFF"/>
                     </a:solidFill>
@@ -7437,7 +8981,7 @@
                     <a:p>
                       <a:pPr algn="l">
                         <a:lnSpc>
-                          <a:spcPct val="108000"/>
+                          <a:spcPct val="110000"/>
                         </a:lnSpc>
                       </a:pPr>
                       <a:r>
@@ -7452,7 +8996,7 @@
                       </a:r>
                     </a:p>
                   </a:txBody>
-                  <a:tcPr anchor="ctr" marL="73152" marR="73152" marT="27432" marB="27432">
+                  <a:tcPr anchor="ctr" marL="100584" marR="91440" marT="41148" marB="41148">
                     <a:solidFill>
                       <a:srgbClr val="FFFFFF"/>
                     </a:solidFill>
@@ -7465,7 +9009,7 @@
                     <a:p>
                       <a:pPr algn="l">
                         <a:lnSpc>
-                          <a:spcPct val="108000"/>
+                          <a:spcPct val="110000"/>
                         </a:lnSpc>
                       </a:pPr>
                       <a:r>
@@ -7480,14 +9024,14 @@
                       </a:r>
                     </a:p>
                   </a:txBody>
-                  <a:tcPr anchor="ctr" marL="73152" marR="73152" marT="27432" marB="27432">
+                  <a:tcPr anchor="ctr" marL="100584" marR="91440" marT="41148" marB="41148">
                     <a:solidFill>
                       <a:srgbClr val="FFFFFF"/>
                     </a:solidFill>
                   </a:tcPr>
                 </a:tc>
               </a:tr>
-              <a:tr h="384048">
+              <a:tr h="365760">
                 <a:tc>
                   <a:txBody>
                     <a:bodyPr wrap="square"/>
@@ -7495,13 +9039,13 @@
                     <a:p>
                       <a:pPr algn="l">
                         <a:lnSpc>
-                          <a:spcPct val="108000"/>
+                          <a:spcPct val="110000"/>
                         </a:lnSpc>
                       </a:pPr>
                       <a:r>
                         <a:rPr sz="1150" b="1" i="0">
                           <a:solidFill>
-                            <a:srgbClr val="14213D"/>
+                            <a:srgbClr val="111927"/>
                           </a:solidFill>
                           <a:latin typeface="맑은 고딕"/>
                           <a:ea typeface="맑은 고딕"/>
@@ -7510,9 +9054,9 @@
                       </a:r>
                     </a:p>
                   </a:txBody>
-                  <a:tcPr anchor="ctr" marL="73152" marR="73152" marT="27432" marB="27432">
+                  <a:tcPr anchor="ctr" marL="100584" marR="91440" marT="41148" marB="41148">
                     <a:solidFill>
-                      <a:srgbClr val="EEF2F7"/>
+                      <a:srgbClr val="EEF0FB"/>
                     </a:solidFill>
                   </a:tcPr>
                 </a:tc>
@@ -7523,7 +9067,7 @@
                     <a:p>
                       <a:pPr algn="l">
                         <a:lnSpc>
-                          <a:spcPct val="108000"/>
+                          <a:spcPct val="110000"/>
                         </a:lnSpc>
                       </a:pPr>
                       <a:r>
@@ -7538,9 +9082,9 @@
                       </a:r>
                     </a:p>
                   </a:txBody>
-                  <a:tcPr anchor="ctr" marL="73152" marR="73152" marT="27432" marB="27432">
+                  <a:tcPr anchor="ctr" marL="100584" marR="91440" marT="41148" marB="41148">
                     <a:solidFill>
-                      <a:srgbClr val="EEF2F7"/>
+                      <a:srgbClr val="EEF0FB"/>
                     </a:solidFill>
                   </a:tcPr>
                 </a:tc>
@@ -7551,7 +9095,7 @@
                     <a:p>
                       <a:pPr algn="l">
                         <a:lnSpc>
-                          <a:spcPct val="108000"/>
+                          <a:spcPct val="110000"/>
                         </a:lnSpc>
                       </a:pPr>
                       <a:r>
@@ -7566,14 +9110,14 @@
                       </a:r>
                     </a:p>
                   </a:txBody>
-                  <a:tcPr anchor="ctr" marL="73152" marR="73152" marT="27432" marB="27432">
+                  <a:tcPr anchor="ctr" marL="100584" marR="91440" marT="41148" marB="41148">
                     <a:solidFill>
-                      <a:srgbClr val="EEF2F7"/>
+                      <a:srgbClr val="EEF0FB"/>
                     </a:solidFill>
                   </a:tcPr>
                 </a:tc>
               </a:tr>
-              <a:tr h="384048">
+              <a:tr h="365760">
                 <a:tc>
                   <a:txBody>
                     <a:bodyPr wrap="square"/>
@@ -7581,13 +9125,13 @@
                     <a:p>
                       <a:pPr algn="l">
                         <a:lnSpc>
-                          <a:spcPct val="108000"/>
+                          <a:spcPct val="110000"/>
                         </a:lnSpc>
                       </a:pPr>
                       <a:r>
                         <a:rPr sz="1150" b="1" i="0">
                           <a:solidFill>
-                            <a:srgbClr val="14213D"/>
+                            <a:srgbClr val="111927"/>
                           </a:solidFill>
                           <a:latin typeface="맑은 고딕"/>
                           <a:ea typeface="맑은 고딕"/>
@@ -7596,7 +9140,7 @@
                       </a:r>
                     </a:p>
                   </a:txBody>
-                  <a:tcPr anchor="ctr" marL="73152" marR="73152" marT="27432" marB="27432">
+                  <a:tcPr anchor="ctr" marL="100584" marR="91440" marT="41148" marB="41148">
                     <a:solidFill>
                       <a:srgbClr val="FFFFFF"/>
                     </a:solidFill>
@@ -7609,7 +9153,7 @@
                     <a:p>
                       <a:pPr algn="l">
                         <a:lnSpc>
-                          <a:spcPct val="108000"/>
+                          <a:spcPct val="110000"/>
                         </a:lnSpc>
                       </a:pPr>
                       <a:r>
@@ -7624,7 +9168,7 @@
                       </a:r>
                     </a:p>
                   </a:txBody>
-                  <a:tcPr anchor="ctr" marL="73152" marR="73152" marT="27432" marB="27432">
+                  <a:tcPr anchor="ctr" marL="100584" marR="91440" marT="41148" marB="41148">
                     <a:solidFill>
                       <a:srgbClr val="FFFFFF"/>
                     </a:solidFill>
@@ -7637,7 +9181,7 @@
                     <a:p>
                       <a:pPr algn="l">
                         <a:lnSpc>
-                          <a:spcPct val="108000"/>
+                          <a:spcPct val="110000"/>
                         </a:lnSpc>
                       </a:pPr>
                       <a:r>
@@ -7652,7 +9196,7 @@
                       </a:r>
                     </a:p>
                   </a:txBody>
-                  <a:tcPr anchor="ctr" marL="73152" marR="73152" marT="27432" marB="27432">
+                  <a:tcPr anchor="ctr" marL="100584" marR="91440" marT="41148" marB="41148">
                     <a:solidFill>
                       <a:srgbClr val="FFFFFF"/>
                     </a:solidFill>
@@ -7689,14 +9233,14 @@
         </p:nvSpPr>
         <p:spPr>
           <a:xfrm>
-            <a:off x="548640" y="475488"/>
-            <a:ext cx="91440" cy="475488"/>
+            <a:off x="0" y="0"/>
+            <a:ext cx="12191695" cy="6858000"/>
           </a:xfrm>
           <a:prstGeom prst="rect">
             <a:avLst/>
           </a:prstGeom>
           <a:solidFill>
-            <a:srgbClr val="2563EB"/>
+            <a:srgbClr val="F6F7F9"/>
           </a:solidFill>
           <a:ln>
             <a:noFill/>
@@ -7727,152 +9271,20 @@
       </p:sp>
       <p:sp>
         <p:nvSpPr>
-          <p:cNvPr id="3" name="TextBox 2"/>
-          <p:cNvSpPr txBox="1"/>
-          <p:nvPr/>
-        </p:nvSpPr>
-        <p:spPr>
-          <a:xfrm>
-            <a:off x="786384" y="402336"/>
-            <a:ext cx="9326880" cy="640080"/>
+          <p:cNvPr id="3" name="Rectangle 2"/>
+          <p:cNvSpPr/>
+          <p:nvPr/>
+        </p:nvSpPr>
+        <p:spPr>
+          <a:xfrm>
+            <a:off x="0" y="0"/>
+            <a:ext cx="12191695" cy="128016"/>
           </a:xfrm>
           <a:prstGeom prst="rect">
             <a:avLst/>
           </a:prstGeom>
-          <a:noFill/>
-        </p:spPr>
-        <p:txBody>
-          <a:bodyPr wrap="square" anchor="t" lIns="0" rIns="0" tIns="0" bIns="0">
-            <a:spAutoFit/>
-          </a:bodyPr>
-          <a:lstStyle/>
-          <a:p>
-            <a:pPr algn="l">
-              <a:lnSpc>
-                <a:spcPct val="112000"/>
-              </a:lnSpc>
-            </a:pPr>
-            <a:r>
-              <a:rPr sz="2300" b="1" i="0">
-                <a:solidFill>
-                  <a:srgbClr val="14213D"/>
-                </a:solidFill>
-                <a:latin typeface="맑은 고딕"/>
-                <a:ea typeface="맑은 고딕"/>
-              </a:rPr>
-              <a:t>오늘의 툴 다루기 ① — GEO 진단 프롬프트</a:t>
-            </a:r>
-          </a:p>
-        </p:txBody>
-      </p:sp>
-      <p:sp>
-        <p:nvSpPr>
-          <p:cNvPr id="4" name="TextBox 3"/>
-          <p:cNvSpPr txBox="1"/>
-          <p:nvPr/>
-        </p:nvSpPr>
-        <p:spPr>
-          <a:xfrm>
-            <a:off x="786384" y="1005840"/>
-            <a:ext cx="10241280" cy="365760"/>
-          </a:xfrm>
-          <a:prstGeom prst="rect">
-            <a:avLst/>
-          </a:prstGeom>
-          <a:noFill/>
-        </p:spPr>
-        <p:txBody>
-          <a:bodyPr wrap="square" anchor="t" lIns="0" rIns="0" tIns="0" bIns="0">
-            <a:spAutoFit/>
-          </a:bodyPr>
-          <a:lstStyle/>
-          <a:p>
-            <a:pPr algn="l">
-              <a:lnSpc>
-                <a:spcPct val="112000"/>
-              </a:lnSpc>
-            </a:pPr>
-            <a:r>
-              <a:rPr sz="1250" b="0" i="0">
-                <a:solidFill>
-                  <a:srgbClr val="6B7280"/>
-                </a:solidFill>
-                <a:latin typeface="맑은 고딕"/>
-                <a:ea typeface="맑은 고딕"/>
-              </a:rPr>
-              <a:t>ChatGPT · Claude · Gemini 어디서든 동일하게 작동합니다. 콘텐츠를 붙여넣고 실행하세요.</a:t>
-            </a:r>
-          </a:p>
-        </p:txBody>
-      </p:sp>
-      <p:sp>
-        <p:nvSpPr>
-          <p:cNvPr id="5" name="TextBox 4"/>
-          <p:cNvSpPr txBox="1"/>
-          <p:nvPr/>
-        </p:nvSpPr>
-        <p:spPr>
-          <a:xfrm>
-            <a:off x="548640" y="6510528"/>
-            <a:ext cx="11094415" cy="274320"/>
-          </a:xfrm>
-          <a:prstGeom prst="rect">
-            <a:avLst/>
-          </a:prstGeom>
-          <a:noFill/>
-        </p:spPr>
-        <p:txBody>
-          <a:bodyPr wrap="square" anchor="t" lIns="0" rIns="0" tIns="0" bIns="0">
-            <a:spAutoFit/>
-          </a:bodyPr>
-          <a:lstStyle/>
-          <a:p>
-            <a:pPr algn="l">
-              <a:lnSpc>
-                <a:spcPct val="112000"/>
-              </a:lnSpc>
-            </a:pPr>
-            <a:r>
-              <a:rPr sz="950" b="0" i="0">
-                <a:solidFill>
-                  <a:srgbClr val="94A3B8"/>
-                </a:solidFill>
-                <a:latin typeface="맑은 고딕"/>
-                <a:ea typeface="맑은 고딕"/>
-              </a:rPr>
-              <a:t>AI 시대 마케팅, 누가 살아남을까? — 6주 실무 스터디   |   4회차 · GEO 인용되는 브랜드</a:t>
-            </a:r>
-            <a:r>
-              <a:rPr sz="950" b="0" i="0">
-                <a:solidFill>
-                  <a:srgbClr val="94A3B8"/>
-                </a:solidFill>
-                <a:latin typeface="맑은 고딕"/>
-                <a:ea typeface="맑은 고딕"/>
-              </a:rPr>
-              <a:t/>
-            </a:r>
-          </a:p>
-        </p:txBody>
-      </p:sp>
-      <p:sp>
-        <p:nvSpPr>
-          <p:cNvPr id="6" name="Rounded Rectangle 5"/>
-          <p:cNvSpPr/>
-          <p:nvPr/>
-        </p:nvSpPr>
-        <p:spPr>
-          <a:xfrm>
-            <a:off x="548640" y="1499616"/>
-            <a:ext cx="11094415" cy="4443984"/>
-          </a:xfrm>
-          <a:prstGeom prst="roundRect">
-            <a:avLst>
-              <a:gd name="adj" fmla="val 3000"/>
-            </a:avLst>
-          </a:prstGeom>
           <a:solidFill>
-            <a:srgbClr val="0F172A"/>
+            <a:srgbClr val="4338CA"/>
           </a:solidFill>
           <a:ln>
             <a:noFill/>
@@ -7903,365 +9315,22 @@
       </p:sp>
       <p:sp>
         <p:nvSpPr>
-          <p:cNvPr id="7" name="TextBox 6"/>
-          <p:cNvSpPr txBox="1"/>
-          <p:nvPr/>
-        </p:nvSpPr>
-        <p:spPr>
-          <a:xfrm>
-            <a:off x="822960" y="1700784"/>
-            <a:ext cx="10545775" cy="4041648"/>
-          </a:xfrm>
-          <a:prstGeom prst="rect">
-            <a:avLst/>
-          </a:prstGeom>
-          <a:noFill/>
-        </p:spPr>
-        <p:txBody>
-          <a:bodyPr wrap="square" anchor="t" lIns="0" rIns="0" tIns="0" bIns="0">
-            <a:spAutoFit/>
-          </a:bodyPr>
-          <a:lstStyle/>
-          <a:p>
-            <a:pPr algn="l">
-              <a:lnSpc>
-                <a:spcPct val="112000"/>
-              </a:lnSpc>
-              <a:spcAft>
-                <a:spcPts val="150"/>
-              </a:spcAft>
-            </a:pPr>
-            <a:r>
-              <a:rPr sz="1150" b="0" i="0">
-                <a:solidFill>
-                  <a:srgbClr val="E2E8F0"/>
-                </a:solidFill>
-                <a:latin typeface="Consolas"/>
-                <a:ea typeface="맑은 고딕"/>
-              </a:rPr>
-              <a:t>너는 AI 검색 최적화 컨설턴트다.</a:t>
-            </a:r>
-          </a:p>
-          <a:p>
-            <a:pPr algn="l">
-              <a:lnSpc>
-                <a:spcPct val="112000"/>
-              </a:lnSpc>
-              <a:spcAft>
-                <a:spcPts val="150"/>
-              </a:spcAft>
-            </a:pPr>
-            <a:r>
-              <a:rPr sz="1150" b="0" i="0">
-                <a:solidFill>
-                  <a:srgbClr val="E2E8F0"/>
-                </a:solidFill>
-                <a:latin typeface="Consolas"/>
-                <a:ea typeface="맑은 고딕"/>
-              </a:rPr>
-              <a:t>아래 콘텐츠를 ChatGPT Search, Perplexity, Google AI Overviews에</a:t>
-            </a:r>
-          </a:p>
-          <a:p>
-            <a:pPr algn="l">
-              <a:lnSpc>
-                <a:spcPct val="112000"/>
-              </a:lnSpc>
-              <a:spcAft>
-                <a:spcPts val="150"/>
-              </a:spcAft>
-            </a:pPr>
-            <a:r>
-              <a:rPr sz="1150" b="0" i="0">
-                <a:solidFill>
-                  <a:srgbClr val="E2E8F0"/>
-                </a:solidFill>
-                <a:latin typeface="Consolas"/>
-                <a:ea typeface="맑은 고딕"/>
-              </a:rPr>
-              <a:t>인용될 가능성이 높도록 진단해줘.</a:t>
-            </a:r>
-          </a:p>
-          <a:p>
-            <a:pPr algn="l">
-              <a:lnSpc>
-                <a:spcPct val="112000"/>
-              </a:lnSpc>
-              <a:spcAft>
-                <a:spcPts val="150"/>
-              </a:spcAft>
-            </a:pPr>
-            <a:r>
-              <a:rPr sz="1150" b="0" i="0">
-                <a:solidFill>
-                  <a:srgbClr val="E2E8F0"/>
-                </a:solidFill>
-                <a:latin typeface="Consolas"/>
-                <a:ea typeface="맑은 고딕"/>
-              </a:rPr>
-              <a:t> </a:t>
-            </a:r>
-          </a:p>
-          <a:p>
-            <a:pPr algn="l">
-              <a:lnSpc>
-                <a:spcPct val="112000"/>
-              </a:lnSpc>
-              <a:spcAft>
-                <a:spcPts val="150"/>
-              </a:spcAft>
-            </a:pPr>
-            <a:r>
-              <a:rPr sz="1150" b="0" i="0">
-                <a:solidFill>
-                  <a:srgbClr val="E2E8F0"/>
-                </a:solidFill>
-                <a:latin typeface="Consolas"/>
-                <a:ea typeface="맑은 고딕"/>
-              </a:rPr>
-              <a:t>기준은</a:t>
-            </a:r>
-          </a:p>
-          <a:p>
-            <a:pPr algn="l">
-              <a:lnSpc>
-                <a:spcPct val="112000"/>
-              </a:lnSpc>
-              <a:spcAft>
-                <a:spcPts val="150"/>
-              </a:spcAft>
-            </a:pPr>
-            <a:r>
-              <a:rPr sz="1150" b="0" i="0">
-                <a:solidFill>
-                  <a:srgbClr val="E2E8F0"/>
-                </a:solidFill>
-                <a:latin typeface="Consolas"/>
-                <a:ea typeface="맑은 고딕"/>
-              </a:rPr>
-              <a:t>1) 명확한 답변성</a:t>
-            </a:r>
-          </a:p>
-          <a:p>
-            <a:pPr algn="l">
-              <a:lnSpc>
-                <a:spcPct val="112000"/>
-              </a:lnSpc>
-              <a:spcAft>
-                <a:spcPts val="150"/>
-              </a:spcAft>
-            </a:pPr>
-            <a:r>
-              <a:rPr sz="1150" b="0" i="0">
-                <a:solidFill>
-                  <a:srgbClr val="E2E8F0"/>
-                </a:solidFill>
-                <a:latin typeface="Consolas"/>
-                <a:ea typeface="맑은 고딕"/>
-              </a:rPr>
-              <a:t>2) 출처/근거성</a:t>
-            </a:r>
-          </a:p>
-          <a:p>
-            <a:pPr algn="l">
-              <a:lnSpc>
-                <a:spcPct val="112000"/>
-              </a:lnSpc>
-              <a:spcAft>
-                <a:spcPts val="150"/>
-              </a:spcAft>
-            </a:pPr>
-            <a:r>
-              <a:rPr sz="1150" b="0" i="0">
-                <a:solidFill>
-                  <a:srgbClr val="E2E8F0"/>
-                </a:solidFill>
-                <a:latin typeface="Consolas"/>
-                <a:ea typeface="맑은 고딕"/>
-              </a:rPr>
-              <a:t>3) 구조화</a:t>
-            </a:r>
-          </a:p>
-          <a:p>
-            <a:pPr algn="l">
-              <a:lnSpc>
-                <a:spcPct val="112000"/>
-              </a:lnSpc>
-              <a:spcAft>
-                <a:spcPts val="150"/>
-              </a:spcAft>
-            </a:pPr>
-            <a:r>
-              <a:rPr sz="1150" b="0" i="0">
-                <a:solidFill>
-                  <a:srgbClr val="E2E8F0"/>
-                </a:solidFill>
-                <a:latin typeface="Consolas"/>
-                <a:ea typeface="맑은 고딕"/>
-              </a:rPr>
-              <a:t>4) 독창적 경험</a:t>
-            </a:r>
-          </a:p>
-          <a:p>
-            <a:pPr algn="l">
-              <a:lnSpc>
-                <a:spcPct val="112000"/>
-              </a:lnSpc>
-              <a:spcAft>
-                <a:spcPts val="150"/>
-              </a:spcAft>
-            </a:pPr>
-            <a:r>
-              <a:rPr sz="1150" b="0" i="0">
-                <a:solidFill>
-                  <a:srgbClr val="E2E8F0"/>
-                </a:solidFill>
-                <a:latin typeface="Consolas"/>
-                <a:ea typeface="맑은 고딕"/>
-              </a:rPr>
-              <a:t>5) 비교 가능성</a:t>
-            </a:r>
-          </a:p>
-          <a:p>
-            <a:pPr algn="l">
-              <a:lnSpc>
-                <a:spcPct val="112000"/>
-              </a:lnSpc>
-              <a:spcAft>
-                <a:spcPts val="150"/>
-              </a:spcAft>
-            </a:pPr>
-            <a:r>
-              <a:rPr sz="1150" b="0" i="0">
-                <a:solidFill>
-                  <a:srgbClr val="E2E8F0"/>
-                </a:solidFill>
-                <a:latin typeface="Consolas"/>
-                <a:ea typeface="맑은 고딕"/>
-              </a:rPr>
-              <a:t>6) 최신성이다.</a:t>
-            </a:r>
-          </a:p>
-          <a:p>
-            <a:pPr algn="l">
-              <a:lnSpc>
-                <a:spcPct val="112000"/>
-              </a:lnSpc>
-              <a:spcAft>
-                <a:spcPts val="150"/>
-              </a:spcAft>
-            </a:pPr>
-            <a:r>
-              <a:rPr sz="1150" b="0" i="0">
-                <a:solidFill>
-                  <a:srgbClr val="E2E8F0"/>
-                </a:solidFill>
-                <a:latin typeface="Consolas"/>
-                <a:ea typeface="맑은 고딕"/>
-              </a:rPr>
-              <a:t> </a:t>
-            </a:r>
-          </a:p>
-          <a:p>
-            <a:pPr algn="l">
-              <a:lnSpc>
-                <a:spcPct val="112000"/>
-              </a:lnSpc>
-              <a:spcAft>
-                <a:spcPts val="150"/>
-              </a:spcAft>
-            </a:pPr>
-            <a:r>
-              <a:rPr sz="1150" b="0" i="0">
-                <a:solidFill>
-                  <a:srgbClr val="E2E8F0"/>
-                </a:solidFill>
-                <a:latin typeface="Consolas"/>
-                <a:ea typeface="맑은 고딕"/>
-              </a:rPr>
-              <a:t>각 항목을 5점 만점으로 평가하고,</a:t>
-            </a:r>
-          </a:p>
-          <a:p>
-            <a:pPr algn="l">
-              <a:lnSpc>
-                <a:spcPct val="112000"/>
-              </a:lnSpc>
-              <a:spcAft>
-                <a:spcPts val="150"/>
-              </a:spcAft>
-            </a:pPr>
-            <a:r>
-              <a:rPr sz="1150" b="0" i="0">
-                <a:solidFill>
-                  <a:srgbClr val="E2E8F0"/>
-                </a:solidFill>
-                <a:latin typeface="Consolas"/>
-                <a:ea typeface="맑은 고딕"/>
-              </a:rPr>
-              <a:t>고칠 문장과 추가해야 할 섹션을 제안해줘.</a:t>
-            </a:r>
-          </a:p>
-          <a:p>
-            <a:pPr algn="l">
-              <a:lnSpc>
-                <a:spcPct val="112000"/>
-              </a:lnSpc>
-              <a:spcAft>
-                <a:spcPts val="150"/>
-              </a:spcAft>
-            </a:pPr>
-            <a:r>
-              <a:rPr sz="1150" b="0" i="0">
-                <a:solidFill>
-                  <a:srgbClr val="E2E8F0"/>
-                </a:solidFill>
-                <a:latin typeface="Consolas"/>
-                <a:ea typeface="맑은 고딕"/>
-              </a:rPr>
-              <a:t> </a:t>
-            </a:r>
-          </a:p>
-          <a:p>
-            <a:pPr algn="l">
-              <a:lnSpc>
-                <a:spcPct val="112000"/>
-              </a:lnSpc>
-              <a:spcAft>
-                <a:spcPts val="150"/>
-              </a:spcAft>
-            </a:pPr>
-            <a:r>
-              <a:rPr sz="1150" b="0" i="0">
-                <a:solidFill>
-                  <a:srgbClr val="E2E8F0"/>
-                </a:solidFill>
-                <a:latin typeface="Consolas"/>
-                <a:ea typeface="맑은 고딕"/>
-              </a:rPr>
-              <a:t>[콘텐츠 붙여넣기]</a:t>
-            </a:r>
-          </a:p>
-        </p:txBody>
-      </p:sp>
-      <p:sp>
-        <p:nvSpPr>
-          <p:cNvPr id="8" name="Rounded Rectangle 7"/>
+          <p:cNvPr id="4" name="Rounded Rectangle 3"/>
           <p:cNvSpPr/>
           <p:nvPr/>
         </p:nvSpPr>
         <p:spPr>
           <a:xfrm>
-            <a:off x="548640" y="6053328"/>
-            <a:ext cx="11094415" cy="402336"/>
+            <a:off x="566928" y="457200"/>
+            <a:ext cx="82296" cy="457200"/>
           </a:xfrm>
           <a:prstGeom prst="roundRect">
             <a:avLst>
-              <a:gd name="adj" fmla="val 25000"/>
+              <a:gd name="adj" fmla="val 50000"/>
             </a:avLst>
           </a:prstGeom>
           <a:solidFill>
-            <a:srgbClr val="EEF2F7"/>
+            <a:srgbClr val="4338CA"/>
           </a:solidFill>
           <a:ln>
             <a:noFill/>
@@ -8292,14 +9361,138 @@
       </p:sp>
       <p:sp>
         <p:nvSpPr>
-          <p:cNvPr id="9" name="TextBox 8"/>
+          <p:cNvPr id="5" name="TextBox 4"/>
           <p:cNvSpPr txBox="1"/>
           <p:nvPr/>
         </p:nvSpPr>
         <p:spPr>
           <a:xfrm>
-            <a:off x="713232" y="6053328"/>
-            <a:ext cx="10765231" cy="402336"/>
+            <a:off x="804672" y="384048"/>
+            <a:ext cx="9144000" cy="603504"/>
+          </a:xfrm>
+          <a:prstGeom prst="rect">
+            <a:avLst/>
+          </a:prstGeom>
+          <a:noFill/>
+        </p:spPr>
+        <p:txBody>
+          <a:bodyPr wrap="square" anchor="t" lIns="0" rIns="0" tIns="0" bIns="0">
+            <a:spAutoFit/>
+          </a:bodyPr>
+          <a:lstStyle/>
+          <a:p>
+            <a:pPr algn="l">
+              <a:lnSpc>
+                <a:spcPct val="114000"/>
+              </a:lnSpc>
+            </a:pPr>
+            <a:r>
+              <a:rPr sz="2200" b="1" i="0">
+                <a:solidFill>
+                  <a:srgbClr val="111927"/>
+                </a:solidFill>
+                <a:latin typeface="맑은 고딕"/>
+                <a:ea typeface="맑은 고딕"/>
+              </a:rPr>
+              <a:t>오늘의 툴 다루기 ① — GEO 진단 프롬프트</a:t>
+            </a:r>
+          </a:p>
+        </p:txBody>
+      </p:sp>
+      <p:sp>
+        <p:nvSpPr>
+          <p:cNvPr id="6" name="TextBox 5"/>
+          <p:cNvSpPr txBox="1"/>
+          <p:nvPr/>
+        </p:nvSpPr>
+        <p:spPr>
+          <a:xfrm>
+            <a:off x="813816" y="932688"/>
+            <a:ext cx="10424160" cy="365760"/>
+          </a:xfrm>
+          <a:prstGeom prst="rect">
+            <a:avLst/>
+          </a:prstGeom>
+          <a:noFill/>
+        </p:spPr>
+        <p:txBody>
+          <a:bodyPr wrap="square" anchor="t" lIns="0" rIns="0" tIns="0" bIns="0">
+            <a:spAutoFit/>
+          </a:bodyPr>
+          <a:lstStyle/>
+          <a:p>
+            <a:pPr algn="l">
+              <a:lnSpc>
+                <a:spcPct val="115000"/>
+              </a:lnSpc>
+            </a:pPr>
+            <a:r>
+              <a:rPr sz="1250" b="0" i="0">
+                <a:solidFill>
+                  <a:srgbClr val="6B7280"/>
+                </a:solidFill>
+                <a:latin typeface="맑은 고딕"/>
+                <a:ea typeface="맑은 고딕"/>
+              </a:rPr>
+              <a:t>ChatGPT · Claude · Gemini 어디서든 동일하게 작동합니다. 콘텐츠를 붙여넣고 실행하세요.</a:t>
+            </a:r>
+          </a:p>
+        </p:txBody>
+      </p:sp>
+      <p:sp>
+        <p:nvSpPr>
+          <p:cNvPr id="7" name="Rectangle 6"/>
+          <p:cNvSpPr/>
+          <p:nvPr/>
+        </p:nvSpPr>
+        <p:spPr>
+          <a:xfrm>
+            <a:off x="566928" y="6547104"/>
+            <a:ext cx="182880" cy="25603"/>
+          </a:xfrm>
+          <a:prstGeom prst="rect">
+            <a:avLst/>
+          </a:prstGeom>
+          <a:solidFill>
+            <a:srgbClr val="4338CA"/>
+          </a:solidFill>
+          <a:ln>
+            <a:noFill/>
+          </a:ln>
+          <a:effectLst/>
+        </p:spPr>
+        <p:style>
+          <a:lnRef idx="1">
+            <a:schemeClr val="accent1"/>
+          </a:lnRef>
+          <a:fillRef idx="3">
+            <a:schemeClr val="accent1"/>
+          </a:fillRef>
+          <a:effectRef idx="2">
+            <a:schemeClr val="accent1"/>
+          </a:effectRef>
+          <a:fontRef idx="minor">
+            <a:schemeClr val="lt1"/>
+          </a:fontRef>
+        </p:style>
+        <p:txBody>
+          <a:bodyPr rtlCol="0" anchor="ctr"/>
+          <a:lstStyle/>
+          <a:p>
+            <a:pPr algn="ctr"/>
+          </a:p>
+        </p:txBody>
+      </p:sp>
+      <p:sp>
+        <p:nvSpPr>
+          <p:cNvPr id="8" name="TextBox 7"/>
+          <p:cNvSpPr txBox="1"/>
+          <p:nvPr/>
+        </p:nvSpPr>
+        <p:spPr>
+          <a:xfrm>
+            <a:off x="841248" y="6446520"/>
+            <a:ext cx="11057839" cy="274320"/>
           </a:xfrm>
           <a:prstGeom prst="rect">
             <a:avLst/>
@@ -8314,18 +9507,805 @@
           <a:p>
             <a:pPr algn="l">
               <a:lnSpc>
-                <a:spcPct val="112000"/>
+                <a:spcPct val="114000"/>
               </a:lnSpc>
             </a:pPr>
             <a:r>
-              <a:rPr sz="1050" b="1" i="0">
-                <a:solidFill>
-                  <a:srgbClr val="2563EB"/>
-                </a:solidFill>
-                <a:latin typeface="맑은 고딕"/>
-                <a:ea typeface="맑은 고딕"/>
-              </a:rPr>
-              <a:t>TIP  </a:t>
+              <a:rPr sz="900" b="0" i="0">
+                <a:solidFill>
+                  <a:srgbClr val="9AA4B2"/>
+                </a:solidFill>
+                <a:latin typeface="맑은 고딕"/>
+                <a:ea typeface="맑은 고딕"/>
+              </a:rPr>
+              <a:t>AI 시대 마케팅, 누가 살아남을까? — 6주 실무 스터디   |   4회차 · GEO 인용되는 브랜드</a:t>
+            </a:r>
+          </a:p>
+        </p:txBody>
+      </p:sp>
+      <p:sp>
+        <p:nvSpPr>
+          <p:cNvPr id="9" name="Rounded Rectangle 8"/>
+          <p:cNvSpPr/>
+          <p:nvPr/>
+        </p:nvSpPr>
+        <p:spPr>
+          <a:xfrm>
+            <a:off x="566928" y="1499616"/>
+            <a:ext cx="11057839" cy="4407408"/>
+          </a:xfrm>
+          <a:prstGeom prst="roundRect">
+            <a:avLst>
+              <a:gd name="adj" fmla="val 2500"/>
+            </a:avLst>
+          </a:prstGeom>
+          <a:solidFill>
+            <a:srgbClr val="0E1526"/>
+          </a:solidFill>
+          <a:ln>
+            <a:noFill/>
+          </a:ln>
+          <a:effectLst/>
+        </p:spPr>
+        <p:style>
+          <a:lnRef idx="1">
+            <a:schemeClr val="accent1"/>
+          </a:lnRef>
+          <a:fillRef idx="3">
+            <a:schemeClr val="accent1"/>
+          </a:fillRef>
+          <a:effectRef idx="2">
+            <a:schemeClr val="accent1"/>
+          </a:effectRef>
+          <a:fontRef idx="minor">
+            <a:schemeClr val="lt1"/>
+          </a:fontRef>
+        </p:style>
+        <p:txBody>
+          <a:bodyPr rtlCol="0" anchor="ctr"/>
+          <a:lstStyle/>
+          <a:p>
+            <a:pPr algn="ctr"/>
+          </a:p>
+        </p:txBody>
+      </p:sp>
+      <p:sp>
+        <p:nvSpPr>
+          <p:cNvPr id="10" name="Rounded Rectangle 9"/>
+          <p:cNvSpPr/>
+          <p:nvPr/>
+        </p:nvSpPr>
+        <p:spPr>
+          <a:xfrm>
+            <a:off x="566928" y="1499616"/>
+            <a:ext cx="11057839" cy="329184"/>
+          </a:xfrm>
+          <a:prstGeom prst="roundRect">
+            <a:avLst>
+              <a:gd name="adj" fmla="val 2500"/>
+            </a:avLst>
+          </a:prstGeom>
+          <a:solidFill>
+            <a:srgbClr val="1B2440"/>
+          </a:solidFill>
+          <a:ln>
+            <a:noFill/>
+          </a:ln>
+          <a:effectLst/>
+        </p:spPr>
+        <p:style>
+          <a:lnRef idx="1">
+            <a:schemeClr val="accent1"/>
+          </a:lnRef>
+          <a:fillRef idx="3">
+            <a:schemeClr val="accent1"/>
+          </a:fillRef>
+          <a:effectRef idx="2">
+            <a:schemeClr val="accent1"/>
+          </a:effectRef>
+          <a:fontRef idx="minor">
+            <a:schemeClr val="lt1"/>
+          </a:fontRef>
+        </p:style>
+        <p:txBody>
+          <a:bodyPr rtlCol="0" anchor="ctr"/>
+          <a:lstStyle/>
+          <a:p>
+            <a:pPr algn="ctr"/>
+          </a:p>
+        </p:txBody>
+      </p:sp>
+      <p:sp>
+        <p:nvSpPr>
+          <p:cNvPr id="11" name="Rectangle 10"/>
+          <p:cNvSpPr/>
+          <p:nvPr/>
+        </p:nvSpPr>
+        <p:spPr>
+          <a:xfrm>
+            <a:off x="566928" y="1664208"/>
+            <a:ext cx="11057839" cy="164592"/>
+          </a:xfrm>
+          <a:prstGeom prst="rect">
+            <a:avLst/>
+          </a:prstGeom>
+          <a:solidFill>
+            <a:srgbClr val="1B2440"/>
+          </a:solidFill>
+          <a:ln>
+            <a:noFill/>
+          </a:ln>
+          <a:effectLst/>
+        </p:spPr>
+        <p:style>
+          <a:lnRef idx="1">
+            <a:schemeClr val="accent1"/>
+          </a:lnRef>
+          <a:fillRef idx="3">
+            <a:schemeClr val="accent1"/>
+          </a:fillRef>
+          <a:effectRef idx="2">
+            <a:schemeClr val="accent1"/>
+          </a:effectRef>
+          <a:fontRef idx="minor">
+            <a:schemeClr val="lt1"/>
+          </a:fontRef>
+        </p:style>
+        <p:txBody>
+          <a:bodyPr rtlCol="0" anchor="ctr"/>
+          <a:lstStyle/>
+          <a:p>
+            <a:pPr algn="ctr"/>
+          </a:p>
+        </p:txBody>
+      </p:sp>
+      <p:sp>
+        <p:nvSpPr>
+          <p:cNvPr id="12" name="Rounded Rectangle 11"/>
+          <p:cNvSpPr/>
+          <p:nvPr/>
+        </p:nvSpPr>
+        <p:spPr>
+          <a:xfrm>
+            <a:off x="786384" y="1618488"/>
+            <a:ext cx="91440" cy="91440"/>
+          </a:xfrm>
+          <a:prstGeom prst="roundRect">
+            <a:avLst>
+              <a:gd name="adj" fmla="val 50000"/>
+            </a:avLst>
+          </a:prstGeom>
+          <a:solidFill>
+            <a:srgbClr val="FF5F56"/>
+          </a:solidFill>
+          <a:ln>
+            <a:noFill/>
+          </a:ln>
+          <a:effectLst/>
+        </p:spPr>
+        <p:style>
+          <a:lnRef idx="1">
+            <a:schemeClr val="accent1"/>
+          </a:lnRef>
+          <a:fillRef idx="3">
+            <a:schemeClr val="accent1"/>
+          </a:fillRef>
+          <a:effectRef idx="2">
+            <a:schemeClr val="accent1"/>
+          </a:effectRef>
+          <a:fontRef idx="minor">
+            <a:schemeClr val="lt1"/>
+          </a:fontRef>
+        </p:style>
+        <p:txBody>
+          <a:bodyPr rtlCol="0" anchor="ctr"/>
+          <a:lstStyle/>
+          <a:p>
+            <a:pPr algn="ctr"/>
+          </a:p>
+        </p:txBody>
+      </p:sp>
+      <p:sp>
+        <p:nvSpPr>
+          <p:cNvPr id="13" name="Rounded Rectangle 12"/>
+          <p:cNvSpPr/>
+          <p:nvPr/>
+        </p:nvSpPr>
+        <p:spPr>
+          <a:xfrm>
+            <a:off x="987551" y="1618488"/>
+            <a:ext cx="91440" cy="91440"/>
+          </a:xfrm>
+          <a:prstGeom prst="roundRect">
+            <a:avLst>
+              <a:gd name="adj" fmla="val 50000"/>
+            </a:avLst>
+          </a:prstGeom>
+          <a:solidFill>
+            <a:srgbClr val="FFBD2E"/>
+          </a:solidFill>
+          <a:ln>
+            <a:noFill/>
+          </a:ln>
+          <a:effectLst/>
+        </p:spPr>
+        <p:style>
+          <a:lnRef idx="1">
+            <a:schemeClr val="accent1"/>
+          </a:lnRef>
+          <a:fillRef idx="3">
+            <a:schemeClr val="accent1"/>
+          </a:fillRef>
+          <a:effectRef idx="2">
+            <a:schemeClr val="accent1"/>
+          </a:effectRef>
+          <a:fontRef idx="minor">
+            <a:schemeClr val="lt1"/>
+          </a:fontRef>
+        </p:style>
+        <p:txBody>
+          <a:bodyPr rtlCol="0" anchor="ctr"/>
+          <a:lstStyle/>
+          <a:p>
+            <a:pPr algn="ctr"/>
+          </a:p>
+        </p:txBody>
+      </p:sp>
+      <p:sp>
+        <p:nvSpPr>
+          <p:cNvPr id="14" name="Rounded Rectangle 13"/>
+          <p:cNvSpPr/>
+          <p:nvPr/>
+        </p:nvSpPr>
+        <p:spPr>
+          <a:xfrm>
+            <a:off x="1188720" y="1618488"/>
+            <a:ext cx="91440" cy="91440"/>
+          </a:xfrm>
+          <a:prstGeom prst="roundRect">
+            <a:avLst>
+              <a:gd name="adj" fmla="val 50000"/>
+            </a:avLst>
+          </a:prstGeom>
+          <a:solidFill>
+            <a:srgbClr val="27C93F"/>
+          </a:solidFill>
+          <a:ln>
+            <a:noFill/>
+          </a:ln>
+          <a:effectLst/>
+        </p:spPr>
+        <p:style>
+          <a:lnRef idx="1">
+            <a:schemeClr val="accent1"/>
+          </a:lnRef>
+          <a:fillRef idx="3">
+            <a:schemeClr val="accent1"/>
+          </a:fillRef>
+          <a:effectRef idx="2">
+            <a:schemeClr val="accent1"/>
+          </a:effectRef>
+          <a:fontRef idx="minor">
+            <a:schemeClr val="lt1"/>
+          </a:fontRef>
+        </p:style>
+        <p:txBody>
+          <a:bodyPr rtlCol="0" anchor="ctr"/>
+          <a:lstStyle/>
+          <a:p>
+            <a:pPr algn="ctr"/>
+          </a:p>
+        </p:txBody>
+      </p:sp>
+      <p:sp>
+        <p:nvSpPr>
+          <p:cNvPr id="15" name="TextBox 14"/>
+          <p:cNvSpPr txBox="1"/>
+          <p:nvPr/>
+        </p:nvSpPr>
+        <p:spPr>
+          <a:xfrm>
+            <a:off x="1481328" y="1499616"/>
+            <a:ext cx="9960559" cy="329184"/>
+          </a:xfrm>
+          <a:prstGeom prst="rect">
+            <a:avLst/>
+          </a:prstGeom>
+          <a:noFill/>
+        </p:spPr>
+        <p:txBody>
+          <a:bodyPr wrap="square" anchor="ctr" lIns="0" rIns="0" tIns="0" bIns="0">
+            <a:spAutoFit/>
+          </a:bodyPr>
+          <a:lstStyle/>
+          <a:p>
+            <a:pPr algn="l">
+              <a:lnSpc>
+                <a:spcPct val="114000"/>
+              </a:lnSpc>
+            </a:pPr>
+            <a:r>
+              <a:rPr sz="950" b="1" i="0" spc="120">
+                <a:solidFill>
+                  <a:srgbClr val="7C8AA5"/>
+                </a:solidFill>
+                <a:latin typeface="맑은 고딕"/>
+                <a:ea typeface="맑은 고딕"/>
+              </a:rPr>
+              <a:t>PROMPT</a:t>
+            </a:r>
+          </a:p>
+        </p:txBody>
+      </p:sp>
+      <p:sp>
+        <p:nvSpPr>
+          <p:cNvPr id="16" name="TextBox 15"/>
+          <p:cNvSpPr txBox="1"/>
+          <p:nvPr/>
+        </p:nvSpPr>
+        <p:spPr>
+          <a:xfrm>
+            <a:off x="877824" y="1975104"/>
+            <a:ext cx="10436047" cy="3803904"/>
+          </a:xfrm>
+          <a:prstGeom prst="rect">
+            <a:avLst/>
+          </a:prstGeom>
+          <a:noFill/>
+        </p:spPr>
+        <p:txBody>
+          <a:bodyPr wrap="square" anchor="t" lIns="0" rIns="0" tIns="0" bIns="0">
+            <a:spAutoFit/>
+          </a:bodyPr>
+          <a:lstStyle/>
+          <a:p>
+            <a:pPr algn="l">
+              <a:lnSpc>
+                <a:spcPct val="116000"/>
+              </a:lnSpc>
+              <a:spcAft>
+                <a:spcPts val="200"/>
+              </a:spcAft>
+            </a:pPr>
+            <a:r>
+              <a:rPr sz="1150" b="0" i="0">
+                <a:solidFill>
+                  <a:srgbClr val="E5E9F0"/>
+                </a:solidFill>
+                <a:latin typeface="Consolas"/>
+                <a:ea typeface="맑은 고딕"/>
+              </a:rPr>
+              <a:t>너는 AI 검색 최적화 컨설턴트다.</a:t>
+            </a:r>
+          </a:p>
+          <a:p>
+            <a:pPr algn="l">
+              <a:lnSpc>
+                <a:spcPct val="116000"/>
+              </a:lnSpc>
+              <a:spcAft>
+                <a:spcPts val="200"/>
+              </a:spcAft>
+            </a:pPr>
+            <a:r>
+              <a:rPr sz="1150" b="0" i="0">
+                <a:solidFill>
+                  <a:srgbClr val="E5E9F0"/>
+                </a:solidFill>
+                <a:latin typeface="Consolas"/>
+                <a:ea typeface="맑은 고딕"/>
+              </a:rPr>
+              <a:t>아래 콘텐츠를 ChatGPT Search, Perplexity, Google AI Overviews에</a:t>
+            </a:r>
+          </a:p>
+          <a:p>
+            <a:pPr algn="l">
+              <a:lnSpc>
+                <a:spcPct val="116000"/>
+              </a:lnSpc>
+              <a:spcAft>
+                <a:spcPts val="200"/>
+              </a:spcAft>
+            </a:pPr>
+            <a:r>
+              <a:rPr sz="1150" b="0" i="0">
+                <a:solidFill>
+                  <a:srgbClr val="E5E9F0"/>
+                </a:solidFill>
+                <a:latin typeface="Consolas"/>
+                <a:ea typeface="맑은 고딕"/>
+              </a:rPr>
+              <a:t>인용될 가능성이 높도록 진단해줘.</a:t>
+            </a:r>
+          </a:p>
+          <a:p>
+            <a:pPr algn="l">
+              <a:lnSpc>
+                <a:spcPct val="116000"/>
+              </a:lnSpc>
+              <a:spcAft>
+                <a:spcPts val="200"/>
+              </a:spcAft>
+            </a:pPr>
+            <a:r>
+              <a:rPr sz="1150" b="0" i="0">
+                <a:solidFill>
+                  <a:srgbClr val="E5E9F0"/>
+                </a:solidFill>
+                <a:latin typeface="Consolas"/>
+                <a:ea typeface="맑은 고딕"/>
+              </a:rPr>
+              <a:t> </a:t>
+            </a:r>
+          </a:p>
+          <a:p>
+            <a:pPr algn="l">
+              <a:lnSpc>
+                <a:spcPct val="116000"/>
+              </a:lnSpc>
+              <a:spcAft>
+                <a:spcPts val="200"/>
+              </a:spcAft>
+            </a:pPr>
+            <a:r>
+              <a:rPr sz="1150" b="0" i="0">
+                <a:solidFill>
+                  <a:srgbClr val="E5E9F0"/>
+                </a:solidFill>
+                <a:latin typeface="Consolas"/>
+                <a:ea typeface="맑은 고딕"/>
+              </a:rPr>
+              <a:t>기준은</a:t>
+            </a:r>
+          </a:p>
+          <a:p>
+            <a:pPr algn="l">
+              <a:lnSpc>
+                <a:spcPct val="116000"/>
+              </a:lnSpc>
+              <a:spcAft>
+                <a:spcPts val="200"/>
+              </a:spcAft>
+            </a:pPr>
+            <a:r>
+              <a:rPr sz="1150" b="0" i="0">
+                <a:solidFill>
+                  <a:srgbClr val="E5E9F0"/>
+                </a:solidFill>
+                <a:latin typeface="Consolas"/>
+                <a:ea typeface="맑은 고딕"/>
+              </a:rPr>
+              <a:t>1) 명확한 답변성</a:t>
+            </a:r>
+          </a:p>
+          <a:p>
+            <a:pPr algn="l">
+              <a:lnSpc>
+                <a:spcPct val="116000"/>
+              </a:lnSpc>
+              <a:spcAft>
+                <a:spcPts val="200"/>
+              </a:spcAft>
+            </a:pPr>
+            <a:r>
+              <a:rPr sz="1150" b="0" i="0">
+                <a:solidFill>
+                  <a:srgbClr val="E5E9F0"/>
+                </a:solidFill>
+                <a:latin typeface="Consolas"/>
+                <a:ea typeface="맑은 고딕"/>
+              </a:rPr>
+              <a:t>2) 출처/근거성</a:t>
+            </a:r>
+          </a:p>
+          <a:p>
+            <a:pPr algn="l">
+              <a:lnSpc>
+                <a:spcPct val="116000"/>
+              </a:lnSpc>
+              <a:spcAft>
+                <a:spcPts val="200"/>
+              </a:spcAft>
+            </a:pPr>
+            <a:r>
+              <a:rPr sz="1150" b="0" i="0">
+                <a:solidFill>
+                  <a:srgbClr val="E5E9F0"/>
+                </a:solidFill>
+                <a:latin typeface="Consolas"/>
+                <a:ea typeface="맑은 고딕"/>
+              </a:rPr>
+              <a:t>3) 구조화</a:t>
+            </a:r>
+          </a:p>
+          <a:p>
+            <a:pPr algn="l">
+              <a:lnSpc>
+                <a:spcPct val="116000"/>
+              </a:lnSpc>
+              <a:spcAft>
+                <a:spcPts val="200"/>
+              </a:spcAft>
+            </a:pPr>
+            <a:r>
+              <a:rPr sz="1150" b="0" i="0">
+                <a:solidFill>
+                  <a:srgbClr val="E5E9F0"/>
+                </a:solidFill>
+                <a:latin typeface="Consolas"/>
+                <a:ea typeface="맑은 고딕"/>
+              </a:rPr>
+              <a:t>4) 독창적 경험</a:t>
+            </a:r>
+          </a:p>
+          <a:p>
+            <a:pPr algn="l">
+              <a:lnSpc>
+                <a:spcPct val="116000"/>
+              </a:lnSpc>
+              <a:spcAft>
+                <a:spcPts val="200"/>
+              </a:spcAft>
+            </a:pPr>
+            <a:r>
+              <a:rPr sz="1150" b="0" i="0">
+                <a:solidFill>
+                  <a:srgbClr val="E5E9F0"/>
+                </a:solidFill>
+                <a:latin typeface="Consolas"/>
+                <a:ea typeface="맑은 고딕"/>
+              </a:rPr>
+              <a:t>5) 비교 가능성</a:t>
+            </a:r>
+          </a:p>
+          <a:p>
+            <a:pPr algn="l">
+              <a:lnSpc>
+                <a:spcPct val="116000"/>
+              </a:lnSpc>
+              <a:spcAft>
+                <a:spcPts val="200"/>
+              </a:spcAft>
+            </a:pPr>
+            <a:r>
+              <a:rPr sz="1150" b="0" i="0">
+                <a:solidFill>
+                  <a:srgbClr val="E5E9F0"/>
+                </a:solidFill>
+                <a:latin typeface="Consolas"/>
+                <a:ea typeface="맑은 고딕"/>
+              </a:rPr>
+              <a:t>6) 최신성이다.</a:t>
+            </a:r>
+          </a:p>
+          <a:p>
+            <a:pPr algn="l">
+              <a:lnSpc>
+                <a:spcPct val="116000"/>
+              </a:lnSpc>
+              <a:spcAft>
+                <a:spcPts val="200"/>
+              </a:spcAft>
+            </a:pPr>
+            <a:r>
+              <a:rPr sz="1150" b="0" i="0">
+                <a:solidFill>
+                  <a:srgbClr val="E5E9F0"/>
+                </a:solidFill>
+                <a:latin typeface="Consolas"/>
+                <a:ea typeface="맑은 고딕"/>
+              </a:rPr>
+              <a:t> </a:t>
+            </a:r>
+          </a:p>
+          <a:p>
+            <a:pPr algn="l">
+              <a:lnSpc>
+                <a:spcPct val="116000"/>
+              </a:lnSpc>
+              <a:spcAft>
+                <a:spcPts val="200"/>
+              </a:spcAft>
+            </a:pPr>
+            <a:r>
+              <a:rPr sz="1150" b="0" i="0">
+                <a:solidFill>
+                  <a:srgbClr val="E5E9F0"/>
+                </a:solidFill>
+                <a:latin typeface="Consolas"/>
+                <a:ea typeface="맑은 고딕"/>
+              </a:rPr>
+              <a:t>각 항목을 5점 만점으로 평가하고,</a:t>
+            </a:r>
+          </a:p>
+          <a:p>
+            <a:pPr algn="l">
+              <a:lnSpc>
+                <a:spcPct val="116000"/>
+              </a:lnSpc>
+              <a:spcAft>
+                <a:spcPts val="200"/>
+              </a:spcAft>
+            </a:pPr>
+            <a:r>
+              <a:rPr sz="1150" b="0" i="0">
+                <a:solidFill>
+                  <a:srgbClr val="E5E9F0"/>
+                </a:solidFill>
+                <a:latin typeface="Consolas"/>
+                <a:ea typeface="맑은 고딕"/>
+              </a:rPr>
+              <a:t>고칠 문장과 추가해야 할 섹션을 제안해줘.</a:t>
+            </a:r>
+          </a:p>
+          <a:p>
+            <a:pPr algn="l">
+              <a:lnSpc>
+                <a:spcPct val="116000"/>
+              </a:lnSpc>
+              <a:spcAft>
+                <a:spcPts val="200"/>
+              </a:spcAft>
+            </a:pPr>
+            <a:r>
+              <a:rPr sz="1150" b="0" i="0">
+                <a:solidFill>
+                  <a:srgbClr val="E5E9F0"/>
+                </a:solidFill>
+                <a:latin typeface="Consolas"/>
+                <a:ea typeface="맑은 고딕"/>
+              </a:rPr>
+              <a:t> </a:t>
+            </a:r>
+          </a:p>
+          <a:p>
+            <a:pPr algn="l">
+              <a:lnSpc>
+                <a:spcPct val="116000"/>
+              </a:lnSpc>
+              <a:spcAft>
+                <a:spcPts val="200"/>
+              </a:spcAft>
+            </a:pPr>
+            <a:r>
+              <a:rPr sz="1150" b="0" i="0">
+                <a:solidFill>
+                  <a:srgbClr val="E5E9F0"/>
+                </a:solidFill>
+                <a:latin typeface="Consolas"/>
+                <a:ea typeface="맑은 고딕"/>
+              </a:rPr>
+              <a:t>[콘텐츠 붙여넣기]</a:t>
+            </a:r>
+          </a:p>
+        </p:txBody>
+      </p:sp>
+      <p:sp>
+        <p:nvSpPr>
+          <p:cNvPr id="17" name="Rounded Rectangle 16"/>
+          <p:cNvSpPr/>
+          <p:nvPr/>
+        </p:nvSpPr>
+        <p:spPr>
+          <a:xfrm>
+            <a:off x="566928" y="6035040"/>
+            <a:ext cx="11057839" cy="420624"/>
+          </a:xfrm>
+          <a:prstGeom prst="roundRect">
+            <a:avLst>
+              <a:gd name="adj" fmla="val 22000"/>
+            </a:avLst>
+          </a:prstGeom>
+          <a:solidFill>
+            <a:srgbClr val="EEF0FB"/>
+          </a:solidFill>
+          <a:ln>
+            <a:noFill/>
+          </a:ln>
+          <a:effectLst/>
+        </p:spPr>
+        <p:style>
+          <a:lnRef idx="1">
+            <a:schemeClr val="accent1"/>
+          </a:lnRef>
+          <a:fillRef idx="3">
+            <a:schemeClr val="accent1"/>
+          </a:fillRef>
+          <a:effectRef idx="2">
+            <a:schemeClr val="accent1"/>
+          </a:effectRef>
+          <a:fontRef idx="minor">
+            <a:schemeClr val="lt1"/>
+          </a:fontRef>
+        </p:style>
+        <p:txBody>
+          <a:bodyPr rtlCol="0" anchor="ctr"/>
+          <a:lstStyle/>
+          <a:p>
+            <a:pPr algn="ctr"/>
+          </a:p>
+        </p:txBody>
+      </p:sp>
+      <p:sp>
+        <p:nvSpPr>
+          <p:cNvPr id="18" name="Rectangle 17"/>
+          <p:cNvSpPr/>
+          <p:nvPr/>
+        </p:nvSpPr>
+        <p:spPr>
+          <a:xfrm>
+            <a:off x="566928" y="6035040"/>
+            <a:ext cx="68580" cy="420624"/>
+          </a:xfrm>
+          <a:prstGeom prst="rect">
+            <a:avLst/>
+          </a:prstGeom>
+          <a:solidFill>
+            <a:srgbClr val="4338CA"/>
+          </a:solidFill>
+          <a:ln>
+            <a:noFill/>
+          </a:ln>
+          <a:effectLst/>
+        </p:spPr>
+        <p:style>
+          <a:lnRef idx="1">
+            <a:schemeClr val="accent1"/>
+          </a:lnRef>
+          <a:fillRef idx="3">
+            <a:schemeClr val="accent1"/>
+          </a:fillRef>
+          <a:effectRef idx="2">
+            <a:schemeClr val="accent1"/>
+          </a:effectRef>
+          <a:fontRef idx="minor">
+            <a:schemeClr val="lt1"/>
+          </a:fontRef>
+        </p:style>
+        <p:txBody>
+          <a:bodyPr rtlCol="0" anchor="ctr"/>
+          <a:lstStyle/>
+          <a:p>
+            <a:pPr algn="ctr"/>
+          </a:p>
+        </p:txBody>
+      </p:sp>
+      <p:sp>
+        <p:nvSpPr>
+          <p:cNvPr id="19" name="TextBox 18"/>
+          <p:cNvSpPr txBox="1"/>
+          <p:nvPr/>
+        </p:nvSpPr>
+        <p:spPr>
+          <a:xfrm>
+            <a:off x="786384" y="6035040"/>
+            <a:ext cx="10673791" cy="420624"/>
+          </a:xfrm>
+          <a:prstGeom prst="rect">
+            <a:avLst/>
+          </a:prstGeom>
+          <a:noFill/>
+        </p:spPr>
+        <p:txBody>
+          <a:bodyPr wrap="square" anchor="ctr" lIns="0" rIns="0" tIns="0" bIns="0">
+            <a:spAutoFit/>
+          </a:bodyPr>
+          <a:lstStyle/>
+          <a:p>
+            <a:pPr algn="l">
+              <a:lnSpc>
+                <a:spcPct val="114000"/>
+              </a:lnSpc>
+            </a:pPr>
+            <a:r>
+              <a:rPr sz="1050" b="1" i="0" spc="50">
+                <a:solidFill>
+                  <a:srgbClr val="4338CA"/>
+                </a:solidFill>
+                <a:latin typeface="맑은 고딕"/>
+                <a:ea typeface="맑은 고딕"/>
+              </a:rPr>
+              <a:t>TIP   </a:t>
             </a:r>
             <a:r>
               <a:rPr sz="1100" b="0" i="0">
@@ -8366,14 +10346,14 @@
         </p:nvSpPr>
         <p:spPr>
           <a:xfrm>
-            <a:off x="548640" y="475488"/>
-            <a:ext cx="91440" cy="475488"/>
+            <a:off x="0" y="0"/>
+            <a:ext cx="12191695" cy="6858000"/>
           </a:xfrm>
           <a:prstGeom prst="rect">
             <a:avLst/>
           </a:prstGeom>
           <a:solidFill>
-            <a:srgbClr val="2563EB"/>
+            <a:srgbClr val="F6F7F9"/>
           </a:solidFill>
           <a:ln>
             <a:noFill/>
@@ -8404,157 +10384,23 @@
       </p:sp>
       <p:sp>
         <p:nvSpPr>
-          <p:cNvPr id="3" name="TextBox 2"/>
-          <p:cNvSpPr txBox="1"/>
-          <p:nvPr/>
-        </p:nvSpPr>
-        <p:spPr>
-          <a:xfrm>
-            <a:off x="786384" y="402336"/>
-            <a:ext cx="9326880" cy="640080"/>
+          <p:cNvPr id="3" name="Rectangle 2"/>
+          <p:cNvSpPr/>
+          <p:nvPr/>
+        </p:nvSpPr>
+        <p:spPr>
+          <a:xfrm>
+            <a:off x="0" y="0"/>
+            <a:ext cx="12191695" cy="128016"/>
           </a:xfrm>
           <a:prstGeom prst="rect">
             <a:avLst/>
           </a:prstGeom>
-          <a:noFill/>
-        </p:spPr>
-        <p:txBody>
-          <a:bodyPr wrap="square" anchor="t" lIns="0" rIns="0" tIns="0" bIns="0">
-            <a:spAutoFit/>
-          </a:bodyPr>
-          <a:lstStyle/>
-          <a:p>
-            <a:pPr algn="l">
-              <a:lnSpc>
-                <a:spcPct val="112000"/>
-              </a:lnSpc>
-            </a:pPr>
-            <a:r>
-              <a:rPr sz="2300" b="1" i="0">
-                <a:solidFill>
-                  <a:srgbClr val="14213D"/>
-                </a:solidFill>
-                <a:latin typeface="맑은 고딕"/>
-                <a:ea typeface="맑은 고딕"/>
-              </a:rPr>
-              <a:t>오늘의 툴 다루기 ② — 측정 도구로서의 AI, 반복 측정의 원칙</a:t>
-            </a:r>
-          </a:p>
-        </p:txBody>
-      </p:sp>
-      <p:sp>
-        <p:nvSpPr>
-          <p:cNvPr id="4" name="TextBox 3"/>
-          <p:cNvSpPr txBox="1"/>
-          <p:nvPr/>
-        </p:nvSpPr>
-        <p:spPr>
-          <a:xfrm>
-            <a:off x="786384" y="1005840"/>
-            <a:ext cx="10241280" cy="365760"/>
-          </a:xfrm>
-          <a:prstGeom prst="rect">
-            <a:avLst/>
-          </a:prstGeom>
-          <a:noFill/>
-        </p:spPr>
-        <p:txBody>
-          <a:bodyPr wrap="square" anchor="t" lIns="0" rIns="0" tIns="0" bIns="0">
-            <a:spAutoFit/>
-          </a:bodyPr>
-          <a:lstStyle/>
-          <a:p>
-            <a:pPr algn="l">
-              <a:lnSpc>
-                <a:spcPct val="112000"/>
-              </a:lnSpc>
-            </a:pPr>
-            <a:r>
-              <a:rPr sz="1250" b="0" i="0">
-                <a:solidFill>
-                  <a:srgbClr val="6B7280"/>
-                </a:solidFill>
-                <a:latin typeface="맑은 고딕"/>
-                <a:ea typeface="맑은 고딕"/>
-              </a:rPr>
-              <a:t>LLM 답변은 같은 질문도 시점·표현·도구·모델에 따라 달라집니다. 1회 측정은 측정이 아닙니다.</a:t>
-            </a:r>
-          </a:p>
-        </p:txBody>
-      </p:sp>
-      <p:sp>
-        <p:nvSpPr>
-          <p:cNvPr id="5" name="TextBox 4"/>
-          <p:cNvSpPr txBox="1"/>
-          <p:nvPr/>
-        </p:nvSpPr>
-        <p:spPr>
-          <a:xfrm>
-            <a:off x="548640" y="6510528"/>
-            <a:ext cx="11094415" cy="274320"/>
-          </a:xfrm>
-          <a:prstGeom prst="rect">
-            <a:avLst/>
-          </a:prstGeom>
-          <a:noFill/>
-        </p:spPr>
-        <p:txBody>
-          <a:bodyPr wrap="square" anchor="t" lIns="0" rIns="0" tIns="0" bIns="0">
-            <a:spAutoFit/>
-          </a:bodyPr>
-          <a:lstStyle/>
-          <a:p>
-            <a:pPr algn="l">
-              <a:lnSpc>
-                <a:spcPct val="112000"/>
-              </a:lnSpc>
-            </a:pPr>
-            <a:r>
-              <a:rPr sz="950" b="0" i="0">
-                <a:solidFill>
-                  <a:srgbClr val="94A3B8"/>
-                </a:solidFill>
-                <a:latin typeface="맑은 고딕"/>
-                <a:ea typeface="맑은 고딕"/>
-              </a:rPr>
-              <a:t>AI 시대 마케팅, 누가 살아남을까? — 6주 실무 스터디   |   4회차 · GEO 인용되는 브랜드</a:t>
-            </a:r>
-            <a:r>
-              <a:rPr sz="950" b="0" i="0">
-                <a:solidFill>
-                  <a:srgbClr val="94A3B8"/>
-                </a:solidFill>
-                <a:latin typeface="맑은 고딕"/>
-                <a:ea typeface="맑은 고딕"/>
-              </a:rPr>
-              <a:t/>
-            </a:r>
-          </a:p>
-        </p:txBody>
-      </p:sp>
-      <p:sp>
-        <p:nvSpPr>
-          <p:cNvPr id="6" name="Rounded Rectangle 5"/>
-          <p:cNvSpPr/>
-          <p:nvPr/>
-        </p:nvSpPr>
-        <p:spPr>
-          <a:xfrm>
-            <a:off x="548640" y="1517904"/>
-            <a:ext cx="5446623" cy="2340864"/>
-          </a:xfrm>
-          <a:prstGeom prst="roundRect">
-            <a:avLst>
-              <a:gd name="adj" fmla="val 5500"/>
-            </a:avLst>
-          </a:prstGeom>
           <a:solidFill>
-            <a:srgbClr val="F8FAFC"/>
+            <a:srgbClr val="4338CA"/>
           </a:solidFill>
-          <a:ln w="9525">
-            <a:solidFill>
-              <a:srgbClr val="D8E0EA"/>
-            </a:solidFill>
+          <a:ln>
+            <a:noFill/>
           </a:ln>
           <a:effectLst/>
         </p:spPr>
@@ -8582,14 +10428,14 @@
       </p:sp>
       <p:sp>
         <p:nvSpPr>
-          <p:cNvPr id="7" name="Rounded Rectangle 6"/>
+          <p:cNvPr id="4" name="Rounded Rectangle 3"/>
           <p:cNvSpPr/>
           <p:nvPr/>
         </p:nvSpPr>
         <p:spPr>
           <a:xfrm>
-            <a:off x="713232" y="1645920"/>
-            <a:ext cx="571500" cy="274320"/>
+            <a:off x="566928" y="457200"/>
+            <a:ext cx="82296" cy="457200"/>
           </a:xfrm>
           <a:prstGeom prst="roundRect">
             <a:avLst>
@@ -8597,7 +10443,7 @@
             </a:avLst>
           </a:prstGeom>
           <a:solidFill>
-            <a:srgbClr val="4F46E5"/>
+            <a:srgbClr val="4338CA"/>
           </a:solidFill>
           <a:ln>
             <a:noFill/>
@@ -8628,94 +10474,14 @@
       </p:sp>
       <p:sp>
         <p:nvSpPr>
-          <p:cNvPr id="8" name="TextBox 7"/>
+          <p:cNvPr id="5" name="TextBox 4"/>
           <p:cNvSpPr txBox="1"/>
           <p:nvPr/>
         </p:nvSpPr>
         <p:spPr>
           <a:xfrm>
-            <a:off x="713232" y="1659636"/>
-            <a:ext cx="571500" cy="274320"/>
-          </a:xfrm>
-          <a:prstGeom prst="rect">
-            <a:avLst/>
-          </a:prstGeom>
-          <a:noFill/>
-        </p:spPr>
-        <p:txBody>
-          <a:bodyPr wrap="square" anchor="ctr" lIns="0" rIns="0" tIns="0" bIns="0">
-            <a:spAutoFit/>
-          </a:bodyPr>
-          <a:lstStyle/>
-          <a:p>
-            <a:pPr algn="ctr">
-              <a:lnSpc>
-                <a:spcPct val="112000"/>
-              </a:lnSpc>
-            </a:pPr>
-            <a:r>
-              <a:rPr sz="1050" b="1" i="0">
-                <a:solidFill>
-                  <a:srgbClr val="FFFFFF"/>
-                </a:solidFill>
-                <a:latin typeface="맑은 고딕"/>
-                <a:ea typeface="맑은 고딕"/>
-              </a:rPr>
-              <a:t>툴</a:t>
-            </a:r>
-          </a:p>
-        </p:txBody>
-      </p:sp>
-      <p:sp>
-        <p:nvSpPr>
-          <p:cNvPr id="9" name="TextBox 8"/>
-          <p:cNvSpPr txBox="1"/>
-          <p:nvPr/>
-        </p:nvSpPr>
-        <p:spPr>
-          <a:xfrm>
-            <a:off x="1412748" y="1632204"/>
-            <a:ext cx="4417923" cy="365760"/>
-          </a:xfrm>
-          <a:prstGeom prst="rect">
-            <a:avLst/>
-          </a:prstGeom>
-          <a:noFill/>
-        </p:spPr>
-        <p:txBody>
-          <a:bodyPr wrap="square" anchor="t" lIns="0" rIns="0" tIns="0" bIns="0">
-            <a:spAutoFit/>
-          </a:bodyPr>
-          <a:lstStyle/>
-          <a:p>
-            <a:pPr algn="l">
-              <a:lnSpc>
-                <a:spcPct val="112000"/>
-              </a:lnSpc>
-            </a:pPr>
-            <a:r>
-              <a:rPr sz="1450" b="1" i="0">
-                <a:solidFill>
-                  <a:srgbClr val="14213D"/>
-                </a:solidFill>
-                <a:latin typeface="맑은 고딕"/>
-                <a:ea typeface="맑은 고딕"/>
-              </a:rPr>
-              <a:t>측정 설계 — 고정할 것과 기록할 것</a:t>
-            </a:r>
-          </a:p>
-        </p:txBody>
-      </p:sp>
-      <p:sp>
-        <p:nvSpPr>
-          <p:cNvPr id="10" name="TextBox 9"/>
-          <p:cNvSpPr txBox="1"/>
-          <p:nvPr/>
-        </p:nvSpPr>
-        <p:spPr>
-          <a:xfrm>
-            <a:off x="713232" y="2029968"/>
-            <a:ext cx="5117439" cy="1755648"/>
+            <a:off x="804672" y="384048"/>
+            <a:ext cx="9144000" cy="603504"/>
           </a:xfrm>
           <a:prstGeom prst="rect">
             <a:avLst/>
@@ -8732,116 +10498,79 @@
               <a:lnSpc>
                 <a:spcPct val="114000"/>
               </a:lnSpc>
-              <a:spcAft>
-                <a:spcPts val="300"/>
-              </a:spcAft>
             </a:pPr>
             <a:r>
-              <a:rPr sz="1150" b="1" i="0">
-                <a:solidFill>
-                  <a:srgbClr val="2563EB"/>
-                </a:solidFill>
-                <a:latin typeface="맑은 고딕"/>
-                <a:ea typeface="맑은 고딕"/>
-              </a:rPr>
-              <a:t>고정  </a:t>
-            </a:r>
-            <a:r>
-              <a:rPr sz="1150" b="0" i="0">
-                <a:solidFill>
-                  <a:srgbClr val="374151"/>
-                </a:solidFill>
-                <a:latin typeface="맑은 고딕"/>
-                <a:ea typeface="맑은 고딕"/>
-              </a:rPr>
-              <a:t>질문 문장(토씨까지 동일), 도구 목록, 측정 요일</a:t>
-            </a:r>
-          </a:p>
+              <a:rPr sz="2200" b="1" i="0">
+                <a:solidFill>
+                  <a:srgbClr val="111927"/>
+                </a:solidFill>
+                <a:latin typeface="맑은 고딕"/>
+                <a:ea typeface="맑은 고딕"/>
+              </a:rPr>
+              <a:t>오늘의 툴 다루기 ② — 측정 도구로서의 AI, 반복 측정의 원칙</a:t>
+            </a:r>
+          </a:p>
+        </p:txBody>
+      </p:sp>
+      <p:sp>
+        <p:nvSpPr>
+          <p:cNvPr id="6" name="TextBox 5"/>
+          <p:cNvSpPr txBox="1"/>
+          <p:nvPr/>
+        </p:nvSpPr>
+        <p:spPr>
+          <a:xfrm>
+            <a:off x="813816" y="932688"/>
+            <a:ext cx="10424160" cy="365760"/>
+          </a:xfrm>
+          <a:prstGeom prst="rect">
+            <a:avLst/>
+          </a:prstGeom>
+          <a:noFill/>
+        </p:spPr>
+        <p:txBody>
+          <a:bodyPr wrap="square" anchor="t" lIns="0" rIns="0" tIns="0" bIns="0">
+            <a:spAutoFit/>
+          </a:bodyPr>
+          <a:lstStyle/>
           <a:p>
             <a:pPr algn="l">
               <a:lnSpc>
-                <a:spcPct val="114000"/>
+                <a:spcPct val="115000"/>
               </a:lnSpc>
-              <a:spcAft>
-                <a:spcPts val="300"/>
-              </a:spcAft>
             </a:pPr>
             <a:r>
-              <a:rPr sz="1150" b="1" i="0">
-                <a:solidFill>
-                  <a:srgbClr val="2563EB"/>
-                </a:solidFill>
-                <a:latin typeface="맑은 고딕"/>
-                <a:ea typeface="맑은 고딕"/>
-              </a:rPr>
-              <a:t>기록  </a:t>
-            </a:r>
-            <a:r>
-              <a:rPr sz="1150" b="0" i="0">
-                <a:solidFill>
-                  <a:srgbClr val="374151"/>
-                </a:solidFill>
-                <a:latin typeface="맑은 고딕"/>
-                <a:ea typeface="맑은 고딕"/>
-              </a:rPr>
-              <a:t>날짜, 도구, 로그인 계정 여부, 답변 전문, 인용 URL</a:t>
-            </a:r>
-          </a:p>
-          <a:p>
-            <a:pPr algn="l">
-              <a:lnSpc>
-                <a:spcPct val="114000"/>
-              </a:lnSpc>
-              <a:spcAft>
-                <a:spcPts val="300"/>
-              </a:spcAft>
-            </a:pPr>
-            <a:r>
-              <a:rPr sz="1150" b="1" i="0">
-                <a:solidFill>
-                  <a:srgbClr val="2563EB"/>
-                </a:solidFill>
-                <a:latin typeface="맑은 고딕"/>
-                <a:ea typeface="맑은 고딕"/>
-              </a:rPr>
-              <a:t>포인트  </a:t>
-            </a:r>
-            <a:r>
-              <a:rPr sz="1150" b="0" i="0">
-                <a:solidFill>
-                  <a:srgbClr val="374151"/>
-                </a:solidFill>
-                <a:latin typeface="맑은 고딕"/>
-                <a:ea typeface="맑은 고딕"/>
-              </a:rPr>
-              <a:t>조건을 고정해야 '변화'가 리라이트 효과인지 알 수 있다</a:t>
-            </a:r>
-          </a:p>
-        </p:txBody>
-      </p:sp>
-      <p:sp>
-        <p:nvSpPr>
-          <p:cNvPr id="11" name="Rounded Rectangle 10"/>
+              <a:rPr sz="1250" b="0" i="0">
+                <a:solidFill>
+                  <a:srgbClr val="6B7280"/>
+                </a:solidFill>
+                <a:latin typeface="맑은 고딕"/>
+                <a:ea typeface="맑은 고딕"/>
+              </a:rPr>
+              <a:t>LLM 답변은 같은 질문도 시점·표현·도구·모델에 따라 달라집니다. 1회 측정은 측정이 아닙니다.</a:t>
+            </a:r>
+          </a:p>
+        </p:txBody>
+      </p:sp>
+      <p:sp>
+        <p:nvSpPr>
+          <p:cNvPr id="7" name="Rectangle 6"/>
           <p:cNvSpPr/>
           <p:nvPr/>
         </p:nvSpPr>
         <p:spPr>
           <a:xfrm>
-            <a:off x="6196431" y="1517904"/>
-            <a:ext cx="5446623" cy="2340864"/>
-          </a:xfrm>
-          <a:prstGeom prst="roundRect">
-            <a:avLst>
-              <a:gd name="adj" fmla="val 5500"/>
-            </a:avLst>
+            <a:off x="566928" y="6547104"/>
+            <a:ext cx="182880" cy="25603"/>
+          </a:xfrm>
+          <a:prstGeom prst="rect">
+            <a:avLst/>
           </a:prstGeom>
           <a:solidFill>
-            <a:srgbClr val="F8FAFC"/>
+            <a:srgbClr val="4338CA"/>
           </a:solidFill>
-          <a:ln w="9525">
-            <a:solidFill>
-              <a:srgbClr val="D8E0EA"/>
-            </a:solidFill>
+          <a:ln>
+            <a:noFill/>
           </a:ln>
           <a:effectLst/>
         </p:spPr>
@@ -8869,22 +10598,108 @@
       </p:sp>
       <p:sp>
         <p:nvSpPr>
-          <p:cNvPr id="12" name="Rounded Rectangle 11"/>
+          <p:cNvPr id="8" name="TextBox 7"/>
+          <p:cNvSpPr txBox="1"/>
+          <p:nvPr/>
+        </p:nvSpPr>
+        <p:spPr>
+          <a:xfrm>
+            <a:off x="841248" y="6446520"/>
+            <a:ext cx="11057839" cy="274320"/>
+          </a:xfrm>
+          <a:prstGeom prst="rect">
+            <a:avLst/>
+          </a:prstGeom>
+          <a:noFill/>
+        </p:spPr>
+        <p:txBody>
+          <a:bodyPr wrap="square" anchor="ctr" lIns="0" rIns="0" tIns="0" bIns="0">
+            <a:spAutoFit/>
+          </a:bodyPr>
+          <a:lstStyle/>
+          <a:p>
+            <a:pPr algn="l">
+              <a:lnSpc>
+                <a:spcPct val="114000"/>
+              </a:lnSpc>
+            </a:pPr>
+            <a:r>
+              <a:rPr sz="900" b="0" i="0">
+                <a:solidFill>
+                  <a:srgbClr val="9AA4B2"/>
+                </a:solidFill>
+                <a:latin typeface="맑은 고딕"/>
+                <a:ea typeface="맑은 고딕"/>
+              </a:rPr>
+              <a:t>AI 시대 마케팅, 누가 살아남을까? — 6주 실무 스터디   |   4회차 · GEO 인용되는 브랜드</a:t>
+            </a:r>
+          </a:p>
+        </p:txBody>
+      </p:sp>
+      <p:sp>
+        <p:nvSpPr>
+          <p:cNvPr id="9" name="Rounded Rectangle 8"/>
           <p:cNvSpPr/>
           <p:nvPr/>
         </p:nvSpPr>
         <p:spPr>
           <a:xfrm>
-            <a:off x="6361023" y="1645920"/>
-            <a:ext cx="571500" cy="274320"/>
+            <a:off x="566928" y="1499616"/>
+            <a:ext cx="5419191" cy="2350008"/>
           </a:xfrm>
           <a:prstGeom prst="roundRect">
             <a:avLst>
-              <a:gd name="adj" fmla="val 50000"/>
+              <a:gd name="adj" fmla="val 5000"/>
             </a:avLst>
           </a:prstGeom>
           <a:solidFill>
-            <a:srgbClr val="4F46E5"/>
+            <a:srgbClr val="FFFFFF"/>
+          </a:solidFill>
+          <a:ln w="12700">
+            <a:solidFill>
+              <a:srgbClr val="E3E8EF"/>
+            </a:solidFill>
+          </a:ln>
+          <a:effectLst/>
+        </p:spPr>
+        <p:style>
+          <a:lnRef idx="1">
+            <a:schemeClr val="accent1"/>
+          </a:lnRef>
+          <a:fillRef idx="3">
+            <a:schemeClr val="accent1"/>
+          </a:fillRef>
+          <a:effectRef idx="2">
+            <a:schemeClr val="accent1"/>
+          </a:effectRef>
+          <a:fontRef idx="minor">
+            <a:schemeClr val="lt1"/>
+          </a:fontRef>
+        </p:style>
+        <p:txBody>
+          <a:bodyPr rtlCol="0" anchor="ctr"/>
+          <a:lstStyle/>
+          <a:p>
+            <a:pPr algn="ctr"/>
+          </a:p>
+        </p:txBody>
+      </p:sp>
+      <p:sp>
+        <p:nvSpPr>
+          <p:cNvPr id="10" name="Rectangle 9"/>
+          <p:cNvSpPr/>
+          <p:nvPr/>
+        </p:nvSpPr>
+        <p:spPr>
+          <a:xfrm>
+            <a:off x="566928" y="1499616"/>
+            <a:ext cx="64008" cy="2350008"/>
+          </a:xfrm>
+          <a:prstGeom prst="rect">
+            <a:avLst/>
+          </a:prstGeom>
+          <a:solidFill>
+            <a:srgbClr val="4338CA"/>
           </a:solidFill>
           <a:ln>
             <a:noFill/>
@@ -8915,220 +10730,25 @@
       </p:sp>
       <p:sp>
         <p:nvSpPr>
-          <p:cNvPr id="13" name="TextBox 12"/>
-          <p:cNvSpPr txBox="1"/>
-          <p:nvPr/>
-        </p:nvSpPr>
-        <p:spPr>
-          <a:xfrm>
-            <a:off x="6361023" y="1659636"/>
-            <a:ext cx="571500" cy="274320"/>
-          </a:xfrm>
-          <a:prstGeom prst="rect">
-            <a:avLst/>
-          </a:prstGeom>
-          <a:noFill/>
-        </p:spPr>
-        <p:txBody>
-          <a:bodyPr wrap="square" anchor="ctr" lIns="0" rIns="0" tIns="0" bIns="0">
-            <a:spAutoFit/>
-          </a:bodyPr>
-          <a:lstStyle/>
-          <a:p>
-            <a:pPr algn="ctr">
-              <a:lnSpc>
-                <a:spcPct val="112000"/>
-              </a:lnSpc>
-            </a:pPr>
-            <a:r>
-              <a:rPr sz="1050" b="1" i="0">
-                <a:solidFill>
-                  <a:srgbClr val="FFFFFF"/>
-                </a:solidFill>
-                <a:latin typeface="맑은 고딕"/>
-                <a:ea typeface="맑은 고딕"/>
-              </a:rPr>
-              <a:t>툴</a:t>
-            </a:r>
-          </a:p>
-        </p:txBody>
-      </p:sp>
-      <p:sp>
-        <p:nvSpPr>
-          <p:cNvPr id="14" name="TextBox 13"/>
-          <p:cNvSpPr txBox="1"/>
-          <p:nvPr/>
-        </p:nvSpPr>
-        <p:spPr>
-          <a:xfrm>
-            <a:off x="7060539" y="1632204"/>
-            <a:ext cx="4417923" cy="365760"/>
-          </a:xfrm>
-          <a:prstGeom prst="rect">
-            <a:avLst/>
-          </a:prstGeom>
-          <a:noFill/>
-        </p:spPr>
-        <p:txBody>
-          <a:bodyPr wrap="square" anchor="t" lIns="0" rIns="0" tIns="0" bIns="0">
-            <a:spAutoFit/>
-          </a:bodyPr>
-          <a:lstStyle/>
-          <a:p>
-            <a:pPr algn="l">
-              <a:lnSpc>
-                <a:spcPct val="112000"/>
-              </a:lnSpc>
-            </a:pPr>
-            <a:r>
-              <a:rPr sz="1450" b="1" i="0">
-                <a:solidFill>
-                  <a:srgbClr val="14213D"/>
-                </a:solidFill>
-                <a:latin typeface="맑은 고딕"/>
-                <a:ea typeface="맑은 고딕"/>
-              </a:rPr>
-              <a:t>Perplexity — 인용 변화 관찰 1순위</a:t>
-            </a:r>
-          </a:p>
-        </p:txBody>
-      </p:sp>
-      <p:sp>
-        <p:nvSpPr>
-          <p:cNvPr id="15" name="TextBox 14"/>
-          <p:cNvSpPr txBox="1"/>
-          <p:nvPr/>
-        </p:nvSpPr>
-        <p:spPr>
-          <a:xfrm>
-            <a:off x="6361023" y="2029968"/>
-            <a:ext cx="5117439" cy="1755648"/>
-          </a:xfrm>
-          <a:prstGeom prst="rect">
-            <a:avLst/>
-          </a:prstGeom>
-          <a:noFill/>
-        </p:spPr>
-        <p:txBody>
-          <a:bodyPr wrap="square" anchor="t" lIns="0" rIns="0" tIns="0" bIns="0">
-            <a:spAutoFit/>
-          </a:bodyPr>
-          <a:lstStyle/>
-          <a:p>
-            <a:pPr algn="l">
-              <a:lnSpc>
-                <a:spcPct val="114000"/>
-              </a:lnSpc>
-              <a:spcAft>
-                <a:spcPts val="300"/>
-              </a:spcAft>
-            </a:pPr>
-            <a:r>
-              <a:rPr sz="1150" b="1" i="0">
-                <a:solidFill>
-                  <a:srgbClr val="2563EB"/>
-                </a:solidFill>
-                <a:latin typeface="맑은 고딕"/>
-                <a:ea typeface="맑은 고딕"/>
-              </a:rPr>
-              <a:t>이렇게 쓴다  </a:t>
-            </a:r>
-            <a:r>
-              <a:rPr sz="1150" b="0" i="0">
-                <a:solidFill>
-                  <a:srgbClr val="374151"/>
-                </a:solidFill>
-                <a:latin typeface="맑은 고딕"/>
-                <a:ea typeface="맑은 고딕"/>
-              </a:rPr>
-              <a:t>리라이트 전/후 같은 질문 입력, 출처 목록 비교</a:t>
-            </a:r>
-          </a:p>
-          <a:p>
-            <a:pPr algn="l">
-              <a:lnSpc>
-                <a:spcPct val="114000"/>
-              </a:lnSpc>
-              <a:spcAft>
-                <a:spcPts val="300"/>
-              </a:spcAft>
-            </a:pPr>
-            <a:r>
-              <a:rPr sz="1150" b="1" i="0">
-                <a:solidFill>
-                  <a:srgbClr val="2563EB"/>
-                </a:solidFill>
-                <a:latin typeface="맑은 고딕"/>
-                <a:ea typeface="맑은 고딕"/>
-              </a:rPr>
-              <a:t>보는 것  </a:t>
-            </a:r>
-            <a:r>
-              <a:rPr sz="1150" b="0" i="0">
-                <a:solidFill>
-                  <a:srgbClr val="374151"/>
-                </a:solidFill>
-                <a:latin typeface="맑은 고딕"/>
-                <a:ea typeface="맑은 고딕"/>
-              </a:rPr>
-              <a:t>우리 URL이 출처에 새로 등장했는가</a:t>
-            </a:r>
-          </a:p>
-          <a:p>
-            <a:pPr algn="l">
-              <a:lnSpc>
-                <a:spcPct val="114000"/>
-              </a:lnSpc>
-              <a:spcAft>
-                <a:spcPts val="300"/>
-              </a:spcAft>
-            </a:pPr>
-            <a:r>
-              <a:rPr sz="1150" b="1" i="0">
-                <a:solidFill>
-                  <a:srgbClr val="2563EB"/>
-                </a:solidFill>
-                <a:latin typeface="맑은 고딕"/>
-                <a:ea typeface="맑은 고딕"/>
-              </a:rPr>
-              <a:t>주의  </a:t>
-            </a:r>
-            <a:r>
-              <a:rPr sz="1150" b="0" i="0">
-                <a:solidFill>
-                  <a:srgbClr val="374151"/>
-                </a:solidFill>
-                <a:latin typeface="맑은 고딕"/>
-                <a:ea typeface="맑은 고딕"/>
-              </a:rPr>
-              <a:t>당장 안 바뀌어도 정상 — 색인·반영에 시간이 걸린다</a:t>
-            </a:r>
-          </a:p>
-        </p:txBody>
-      </p:sp>
-      <p:sp>
-        <p:nvSpPr>
-          <p:cNvPr id="16" name="Rounded Rectangle 15"/>
+          <p:cNvPr id="11" name="Rounded Rectangle 10"/>
           <p:cNvSpPr/>
           <p:nvPr/>
         </p:nvSpPr>
         <p:spPr>
           <a:xfrm>
-            <a:off x="548640" y="4059936"/>
-            <a:ext cx="5446623" cy="2340864"/>
+            <a:off x="786384" y="1645920"/>
+            <a:ext cx="581558" cy="274320"/>
           </a:xfrm>
           <a:prstGeom prst="roundRect">
             <a:avLst>
-              <a:gd name="adj" fmla="val 5500"/>
+              <a:gd name="adj" fmla="val 50000"/>
             </a:avLst>
           </a:prstGeom>
           <a:solidFill>
-            <a:srgbClr val="F8FAFC"/>
+            <a:srgbClr val="4338CA"/>
           </a:solidFill>
-          <a:ln w="9525">
-            <a:solidFill>
-              <a:srgbClr val="D8E0EA"/>
-            </a:solidFill>
+          <a:ln>
+            <a:noFill/>
           </a:ln>
           <a:effectLst/>
         </p:spPr>
@@ -9156,22 +10776,261 @@
       </p:sp>
       <p:sp>
         <p:nvSpPr>
-          <p:cNvPr id="17" name="Rounded Rectangle 16"/>
+          <p:cNvPr id="12" name="TextBox 11"/>
+          <p:cNvSpPr txBox="1"/>
+          <p:nvPr/>
+        </p:nvSpPr>
+        <p:spPr>
+          <a:xfrm>
+            <a:off x="786384" y="1656892"/>
+            <a:ext cx="581558" cy="274320"/>
+          </a:xfrm>
+          <a:prstGeom prst="rect">
+            <a:avLst/>
+          </a:prstGeom>
+          <a:noFill/>
+        </p:spPr>
+        <p:txBody>
+          <a:bodyPr wrap="square" anchor="ctr" lIns="0" rIns="0" tIns="0" bIns="0">
+            <a:spAutoFit/>
+          </a:bodyPr>
+          <a:lstStyle/>
+          <a:p>
+            <a:pPr algn="ctr">
+              <a:lnSpc>
+                <a:spcPct val="114000"/>
+              </a:lnSpc>
+            </a:pPr>
+            <a:r>
+              <a:rPr sz="1000" b="1" i="0" spc="20">
+                <a:solidFill>
+                  <a:srgbClr val="FFFFFF"/>
+                </a:solidFill>
+                <a:latin typeface="맑은 고딕"/>
+                <a:ea typeface="맑은 고딕"/>
+              </a:rPr>
+              <a:t>툴</a:t>
+            </a:r>
+          </a:p>
+        </p:txBody>
+      </p:sp>
+      <p:sp>
+        <p:nvSpPr>
+          <p:cNvPr id="13" name="TextBox 12"/>
+          <p:cNvSpPr txBox="1"/>
+          <p:nvPr/>
+        </p:nvSpPr>
+        <p:spPr>
+          <a:xfrm>
+            <a:off x="1495958" y="1627632"/>
+            <a:ext cx="4334713" cy="365760"/>
+          </a:xfrm>
+          <a:prstGeom prst="rect">
+            <a:avLst/>
+          </a:prstGeom>
+          <a:noFill/>
+        </p:spPr>
+        <p:txBody>
+          <a:bodyPr wrap="square" anchor="t" lIns="0" rIns="0" tIns="0" bIns="0">
+            <a:spAutoFit/>
+          </a:bodyPr>
+          <a:lstStyle/>
+          <a:p>
+            <a:pPr algn="l">
+              <a:lnSpc>
+                <a:spcPct val="114000"/>
+              </a:lnSpc>
+            </a:pPr>
+            <a:r>
+              <a:rPr sz="1450" b="1" i="0">
+                <a:solidFill>
+                  <a:srgbClr val="111927"/>
+                </a:solidFill>
+                <a:latin typeface="맑은 고딕"/>
+                <a:ea typeface="맑은 고딕"/>
+              </a:rPr>
+              <a:t>측정 설계 — 고정할 것과 기록할 것</a:t>
+            </a:r>
+          </a:p>
+        </p:txBody>
+      </p:sp>
+      <p:sp>
+        <p:nvSpPr>
+          <p:cNvPr id="14" name="TextBox 13"/>
+          <p:cNvSpPr txBox="1"/>
+          <p:nvPr/>
+        </p:nvSpPr>
+        <p:spPr>
+          <a:xfrm>
+            <a:off x="786384" y="2048256"/>
+            <a:ext cx="5035143" cy="1709928"/>
+          </a:xfrm>
+          <a:prstGeom prst="rect">
+            <a:avLst/>
+          </a:prstGeom>
+          <a:noFill/>
+        </p:spPr>
+        <p:txBody>
+          <a:bodyPr wrap="square" anchor="t" lIns="0" rIns="0" tIns="0" bIns="0">
+            <a:spAutoFit/>
+          </a:bodyPr>
+          <a:lstStyle/>
+          <a:p>
+            <a:pPr algn="l">
+              <a:lnSpc>
+                <a:spcPct val="118000"/>
+              </a:lnSpc>
+              <a:spcAft>
+                <a:spcPts val="350"/>
+              </a:spcAft>
+            </a:pPr>
+            <a:r>
+              <a:rPr sz="1150" b="1" i="0">
+                <a:solidFill>
+                  <a:srgbClr val="4338CA"/>
+                </a:solidFill>
+                <a:latin typeface="맑은 고딕"/>
+                <a:ea typeface="맑은 고딕"/>
+              </a:rPr>
+              <a:t>고정  </a:t>
+            </a:r>
+            <a:r>
+              <a:rPr sz="1150" b="0" i="0">
+                <a:solidFill>
+                  <a:srgbClr val="374151"/>
+                </a:solidFill>
+                <a:latin typeface="맑은 고딕"/>
+                <a:ea typeface="맑은 고딕"/>
+              </a:rPr>
+              <a:t>질문 문장(토씨까지 동일), 도구 목록, 측정 요일</a:t>
+            </a:r>
+          </a:p>
+          <a:p>
+            <a:pPr algn="l">
+              <a:lnSpc>
+                <a:spcPct val="118000"/>
+              </a:lnSpc>
+              <a:spcAft>
+                <a:spcPts val="350"/>
+              </a:spcAft>
+            </a:pPr>
+            <a:r>
+              <a:rPr sz="1150" b="1" i="0">
+                <a:solidFill>
+                  <a:srgbClr val="4338CA"/>
+                </a:solidFill>
+                <a:latin typeface="맑은 고딕"/>
+                <a:ea typeface="맑은 고딕"/>
+              </a:rPr>
+              <a:t>기록  </a:t>
+            </a:r>
+            <a:r>
+              <a:rPr sz="1150" b="0" i="0">
+                <a:solidFill>
+                  <a:srgbClr val="374151"/>
+                </a:solidFill>
+                <a:latin typeface="맑은 고딕"/>
+                <a:ea typeface="맑은 고딕"/>
+              </a:rPr>
+              <a:t>날짜, 도구, 로그인 계정 여부, 답변 전문, 인용 URL</a:t>
+            </a:r>
+          </a:p>
+          <a:p>
+            <a:pPr algn="l">
+              <a:lnSpc>
+                <a:spcPct val="118000"/>
+              </a:lnSpc>
+              <a:spcAft>
+                <a:spcPts val="350"/>
+              </a:spcAft>
+            </a:pPr>
+            <a:r>
+              <a:rPr sz="1150" b="1" i="0">
+                <a:solidFill>
+                  <a:srgbClr val="4338CA"/>
+                </a:solidFill>
+                <a:latin typeface="맑은 고딕"/>
+                <a:ea typeface="맑은 고딕"/>
+              </a:rPr>
+              <a:t>포인트  </a:t>
+            </a:r>
+            <a:r>
+              <a:rPr sz="1150" b="0" i="0">
+                <a:solidFill>
+                  <a:srgbClr val="374151"/>
+                </a:solidFill>
+                <a:latin typeface="맑은 고딕"/>
+                <a:ea typeface="맑은 고딕"/>
+              </a:rPr>
+              <a:t>조건을 고정해야 '변화'가 리라이트 효과인지 알 수 있다</a:t>
+            </a:r>
+          </a:p>
+        </p:txBody>
+      </p:sp>
+      <p:sp>
+        <p:nvSpPr>
+          <p:cNvPr id="15" name="Rounded Rectangle 14"/>
           <p:cNvSpPr/>
           <p:nvPr/>
         </p:nvSpPr>
         <p:spPr>
           <a:xfrm>
-            <a:off x="713232" y="4187952"/>
-            <a:ext cx="571500" cy="274320"/>
+            <a:off x="6205575" y="1499616"/>
+            <a:ext cx="5419191" cy="2350008"/>
           </a:xfrm>
           <a:prstGeom prst="roundRect">
             <a:avLst>
-              <a:gd name="adj" fmla="val 50000"/>
+              <a:gd name="adj" fmla="val 5000"/>
             </a:avLst>
           </a:prstGeom>
           <a:solidFill>
-            <a:srgbClr val="4F46E5"/>
+            <a:srgbClr val="FFFFFF"/>
+          </a:solidFill>
+          <a:ln w="12700">
+            <a:solidFill>
+              <a:srgbClr val="E3E8EF"/>
+            </a:solidFill>
+          </a:ln>
+          <a:effectLst/>
+        </p:spPr>
+        <p:style>
+          <a:lnRef idx="1">
+            <a:schemeClr val="accent1"/>
+          </a:lnRef>
+          <a:fillRef idx="3">
+            <a:schemeClr val="accent1"/>
+          </a:fillRef>
+          <a:effectRef idx="2">
+            <a:schemeClr val="accent1"/>
+          </a:effectRef>
+          <a:fontRef idx="minor">
+            <a:schemeClr val="lt1"/>
+          </a:fontRef>
+        </p:style>
+        <p:txBody>
+          <a:bodyPr rtlCol="0" anchor="ctr"/>
+          <a:lstStyle/>
+          <a:p>
+            <a:pPr algn="ctr"/>
+          </a:p>
+        </p:txBody>
+      </p:sp>
+      <p:sp>
+        <p:nvSpPr>
+          <p:cNvPr id="16" name="Rectangle 15"/>
+          <p:cNvSpPr/>
+          <p:nvPr/>
+        </p:nvSpPr>
+        <p:spPr>
+          <a:xfrm>
+            <a:off x="6205575" y="1499616"/>
+            <a:ext cx="64008" cy="2350008"/>
+          </a:xfrm>
+          <a:prstGeom prst="rect">
+            <a:avLst/>
+          </a:prstGeom>
+          <a:solidFill>
+            <a:srgbClr val="4338CA"/>
           </a:solidFill>
           <a:ln>
             <a:noFill/>
@@ -9202,220 +11061,25 @@
       </p:sp>
       <p:sp>
         <p:nvSpPr>
-          <p:cNvPr id="18" name="TextBox 17"/>
-          <p:cNvSpPr txBox="1"/>
-          <p:nvPr/>
-        </p:nvSpPr>
-        <p:spPr>
-          <a:xfrm>
-            <a:off x="713232" y="4201668"/>
-            <a:ext cx="571500" cy="274320"/>
-          </a:xfrm>
-          <a:prstGeom prst="rect">
-            <a:avLst/>
-          </a:prstGeom>
-          <a:noFill/>
-        </p:spPr>
-        <p:txBody>
-          <a:bodyPr wrap="square" anchor="ctr" lIns="0" rIns="0" tIns="0" bIns="0">
-            <a:spAutoFit/>
-          </a:bodyPr>
-          <a:lstStyle/>
-          <a:p>
-            <a:pPr algn="ctr">
-              <a:lnSpc>
-                <a:spcPct val="112000"/>
-              </a:lnSpc>
-            </a:pPr>
-            <a:r>
-              <a:rPr sz="1050" b="1" i="0">
-                <a:solidFill>
-                  <a:srgbClr val="FFFFFF"/>
-                </a:solidFill>
-                <a:latin typeface="맑은 고딕"/>
-                <a:ea typeface="맑은 고딕"/>
-              </a:rPr>
-              <a:t>툴</a:t>
-            </a:r>
-          </a:p>
-        </p:txBody>
-      </p:sp>
-      <p:sp>
-        <p:nvSpPr>
-          <p:cNvPr id="19" name="TextBox 18"/>
-          <p:cNvSpPr txBox="1"/>
-          <p:nvPr/>
-        </p:nvSpPr>
-        <p:spPr>
-          <a:xfrm>
-            <a:off x="1412748" y="4174236"/>
-            <a:ext cx="4417923" cy="365760"/>
-          </a:xfrm>
-          <a:prstGeom prst="rect">
-            <a:avLst/>
-          </a:prstGeom>
-          <a:noFill/>
-        </p:spPr>
-        <p:txBody>
-          <a:bodyPr wrap="square" anchor="t" lIns="0" rIns="0" tIns="0" bIns="0">
-            <a:spAutoFit/>
-          </a:bodyPr>
-          <a:lstStyle/>
-          <a:p>
-            <a:pPr algn="l">
-              <a:lnSpc>
-                <a:spcPct val="112000"/>
-              </a:lnSpc>
-            </a:pPr>
-            <a:r>
-              <a:rPr sz="1450" b="1" i="0">
-                <a:solidFill>
-                  <a:srgbClr val="14213D"/>
-                </a:solidFill>
-                <a:latin typeface="맑은 고딕"/>
-                <a:ea typeface="맑은 고딕"/>
-              </a:rPr>
-              <a:t>ChatGPT Search — 변동성 체험 도구</a:t>
-            </a:r>
-          </a:p>
-        </p:txBody>
-      </p:sp>
-      <p:sp>
-        <p:nvSpPr>
-          <p:cNvPr id="20" name="TextBox 19"/>
-          <p:cNvSpPr txBox="1"/>
-          <p:nvPr/>
-        </p:nvSpPr>
-        <p:spPr>
-          <a:xfrm>
-            <a:off x="713232" y="4572000"/>
-            <a:ext cx="5117439" cy="1755648"/>
-          </a:xfrm>
-          <a:prstGeom prst="rect">
-            <a:avLst/>
-          </a:prstGeom>
-          <a:noFill/>
-        </p:spPr>
-        <p:txBody>
-          <a:bodyPr wrap="square" anchor="t" lIns="0" rIns="0" tIns="0" bIns="0">
-            <a:spAutoFit/>
-          </a:bodyPr>
-          <a:lstStyle/>
-          <a:p>
-            <a:pPr algn="l">
-              <a:lnSpc>
-                <a:spcPct val="114000"/>
-              </a:lnSpc>
-              <a:spcAft>
-                <a:spcPts val="300"/>
-              </a:spcAft>
-            </a:pPr>
-            <a:r>
-              <a:rPr sz="1150" b="1" i="0">
-                <a:solidFill>
-                  <a:srgbClr val="2563EB"/>
-                </a:solidFill>
-                <a:latin typeface="맑은 고딕"/>
-                <a:ea typeface="맑은 고딕"/>
-              </a:rPr>
-              <a:t>이렇게 쓴다  </a:t>
-            </a:r>
-            <a:r>
-              <a:rPr sz="1150" b="0" i="0">
-                <a:solidFill>
-                  <a:srgbClr val="374151"/>
-                </a:solidFill>
-                <a:latin typeface="맑은 고딕"/>
-                <a:ea typeface="맑은 고딕"/>
-              </a:rPr>
-              <a:t>같은 질문을 새 대화에서 3회 반복 실행</a:t>
-            </a:r>
-          </a:p>
-          <a:p>
-            <a:pPr algn="l">
-              <a:lnSpc>
-                <a:spcPct val="114000"/>
-              </a:lnSpc>
-              <a:spcAft>
-                <a:spcPts val="300"/>
-              </a:spcAft>
-            </a:pPr>
-            <a:r>
-              <a:rPr sz="1150" b="1" i="0">
-                <a:solidFill>
-                  <a:srgbClr val="2563EB"/>
-                </a:solidFill>
-                <a:latin typeface="맑은 고딕"/>
-                <a:ea typeface="맑은 고딕"/>
-              </a:rPr>
-              <a:t>보는 것  </a:t>
-            </a:r>
-            <a:r>
-              <a:rPr sz="1150" b="0" i="0">
-                <a:solidFill>
-                  <a:srgbClr val="374151"/>
-                </a:solidFill>
-                <a:latin typeface="맑은 고딕"/>
-                <a:ea typeface="맑은 고딕"/>
-              </a:rPr>
-              <a:t>3회 중 몇 회 언급되는가 (언급률로 기록)</a:t>
-            </a:r>
-          </a:p>
-          <a:p>
-            <a:pPr algn="l">
-              <a:lnSpc>
-                <a:spcPct val="114000"/>
-              </a:lnSpc>
-              <a:spcAft>
-                <a:spcPts val="300"/>
-              </a:spcAft>
-            </a:pPr>
-            <a:r>
-              <a:rPr sz="1150" b="1" i="0">
-                <a:solidFill>
-                  <a:srgbClr val="2563EB"/>
-                </a:solidFill>
-                <a:latin typeface="맑은 고딕"/>
-                <a:ea typeface="맑은 고딕"/>
-              </a:rPr>
-              <a:t>포인트  </a:t>
-            </a:r>
-            <a:r>
-              <a:rPr sz="1150" b="0" i="0">
-                <a:solidFill>
-                  <a:srgbClr val="374151"/>
-                </a:solidFill>
-                <a:latin typeface="맑은 고딕"/>
-                <a:ea typeface="맑은 고딕"/>
-              </a:rPr>
-              <a:t>'한 번 나왔다'가 아니라 'n회 중 몇 회'가 올바른 지표</a:t>
-            </a:r>
-          </a:p>
-        </p:txBody>
-      </p:sp>
-      <p:sp>
-        <p:nvSpPr>
-          <p:cNvPr id="21" name="Rounded Rectangle 20"/>
+          <p:cNvPr id="17" name="Rounded Rectangle 16"/>
           <p:cNvSpPr/>
           <p:nvPr/>
         </p:nvSpPr>
         <p:spPr>
           <a:xfrm>
-            <a:off x="6196431" y="4059936"/>
-            <a:ext cx="5446623" cy="2340864"/>
+            <a:off x="6425031" y="1645920"/>
+            <a:ext cx="581558" cy="274320"/>
           </a:xfrm>
           <a:prstGeom prst="roundRect">
             <a:avLst>
-              <a:gd name="adj" fmla="val 5500"/>
+              <a:gd name="adj" fmla="val 50000"/>
             </a:avLst>
           </a:prstGeom>
           <a:solidFill>
-            <a:srgbClr val="F8FAFC"/>
+            <a:srgbClr val="4338CA"/>
           </a:solidFill>
-          <a:ln w="9525">
-            <a:solidFill>
-              <a:srgbClr val="D8E0EA"/>
-            </a:solidFill>
+          <a:ln>
+            <a:noFill/>
           </a:ln>
           <a:effectLst/>
         </p:spPr>
@@ -9443,22 +11107,261 @@
       </p:sp>
       <p:sp>
         <p:nvSpPr>
-          <p:cNvPr id="22" name="Rounded Rectangle 21"/>
+          <p:cNvPr id="18" name="TextBox 17"/>
+          <p:cNvSpPr txBox="1"/>
+          <p:nvPr/>
+        </p:nvSpPr>
+        <p:spPr>
+          <a:xfrm>
+            <a:off x="6425031" y="1656892"/>
+            <a:ext cx="581558" cy="274320"/>
+          </a:xfrm>
+          <a:prstGeom prst="rect">
+            <a:avLst/>
+          </a:prstGeom>
+          <a:noFill/>
+        </p:spPr>
+        <p:txBody>
+          <a:bodyPr wrap="square" anchor="ctr" lIns="0" rIns="0" tIns="0" bIns="0">
+            <a:spAutoFit/>
+          </a:bodyPr>
+          <a:lstStyle/>
+          <a:p>
+            <a:pPr algn="ctr">
+              <a:lnSpc>
+                <a:spcPct val="114000"/>
+              </a:lnSpc>
+            </a:pPr>
+            <a:r>
+              <a:rPr sz="1000" b="1" i="0" spc="20">
+                <a:solidFill>
+                  <a:srgbClr val="FFFFFF"/>
+                </a:solidFill>
+                <a:latin typeface="맑은 고딕"/>
+                <a:ea typeface="맑은 고딕"/>
+              </a:rPr>
+              <a:t>툴</a:t>
+            </a:r>
+          </a:p>
+        </p:txBody>
+      </p:sp>
+      <p:sp>
+        <p:nvSpPr>
+          <p:cNvPr id="19" name="TextBox 18"/>
+          <p:cNvSpPr txBox="1"/>
+          <p:nvPr/>
+        </p:nvSpPr>
+        <p:spPr>
+          <a:xfrm>
+            <a:off x="7134605" y="1627632"/>
+            <a:ext cx="4334713" cy="365760"/>
+          </a:xfrm>
+          <a:prstGeom prst="rect">
+            <a:avLst/>
+          </a:prstGeom>
+          <a:noFill/>
+        </p:spPr>
+        <p:txBody>
+          <a:bodyPr wrap="square" anchor="t" lIns="0" rIns="0" tIns="0" bIns="0">
+            <a:spAutoFit/>
+          </a:bodyPr>
+          <a:lstStyle/>
+          <a:p>
+            <a:pPr algn="l">
+              <a:lnSpc>
+                <a:spcPct val="114000"/>
+              </a:lnSpc>
+            </a:pPr>
+            <a:r>
+              <a:rPr sz="1450" b="1" i="0">
+                <a:solidFill>
+                  <a:srgbClr val="111927"/>
+                </a:solidFill>
+                <a:latin typeface="맑은 고딕"/>
+                <a:ea typeface="맑은 고딕"/>
+              </a:rPr>
+              <a:t>Perplexity — 인용 변화 관찰 1순위</a:t>
+            </a:r>
+          </a:p>
+        </p:txBody>
+      </p:sp>
+      <p:sp>
+        <p:nvSpPr>
+          <p:cNvPr id="20" name="TextBox 19"/>
+          <p:cNvSpPr txBox="1"/>
+          <p:nvPr/>
+        </p:nvSpPr>
+        <p:spPr>
+          <a:xfrm>
+            <a:off x="6425031" y="2048256"/>
+            <a:ext cx="5035143" cy="1709928"/>
+          </a:xfrm>
+          <a:prstGeom prst="rect">
+            <a:avLst/>
+          </a:prstGeom>
+          <a:noFill/>
+        </p:spPr>
+        <p:txBody>
+          <a:bodyPr wrap="square" anchor="t" lIns="0" rIns="0" tIns="0" bIns="0">
+            <a:spAutoFit/>
+          </a:bodyPr>
+          <a:lstStyle/>
+          <a:p>
+            <a:pPr algn="l">
+              <a:lnSpc>
+                <a:spcPct val="118000"/>
+              </a:lnSpc>
+              <a:spcAft>
+                <a:spcPts val="350"/>
+              </a:spcAft>
+            </a:pPr>
+            <a:r>
+              <a:rPr sz="1150" b="1" i="0">
+                <a:solidFill>
+                  <a:srgbClr val="4338CA"/>
+                </a:solidFill>
+                <a:latin typeface="맑은 고딕"/>
+                <a:ea typeface="맑은 고딕"/>
+              </a:rPr>
+              <a:t>이렇게 쓴다  </a:t>
+            </a:r>
+            <a:r>
+              <a:rPr sz="1150" b="0" i="0">
+                <a:solidFill>
+                  <a:srgbClr val="374151"/>
+                </a:solidFill>
+                <a:latin typeface="맑은 고딕"/>
+                <a:ea typeface="맑은 고딕"/>
+              </a:rPr>
+              <a:t>리라이트 전/후 같은 질문 입력, 출처 목록 비교</a:t>
+            </a:r>
+          </a:p>
+          <a:p>
+            <a:pPr algn="l">
+              <a:lnSpc>
+                <a:spcPct val="118000"/>
+              </a:lnSpc>
+              <a:spcAft>
+                <a:spcPts val="350"/>
+              </a:spcAft>
+            </a:pPr>
+            <a:r>
+              <a:rPr sz="1150" b="1" i="0">
+                <a:solidFill>
+                  <a:srgbClr val="4338CA"/>
+                </a:solidFill>
+                <a:latin typeface="맑은 고딕"/>
+                <a:ea typeface="맑은 고딕"/>
+              </a:rPr>
+              <a:t>보는 것  </a:t>
+            </a:r>
+            <a:r>
+              <a:rPr sz="1150" b="0" i="0">
+                <a:solidFill>
+                  <a:srgbClr val="374151"/>
+                </a:solidFill>
+                <a:latin typeface="맑은 고딕"/>
+                <a:ea typeface="맑은 고딕"/>
+              </a:rPr>
+              <a:t>우리 URL이 출처에 새로 등장했는가</a:t>
+            </a:r>
+          </a:p>
+          <a:p>
+            <a:pPr algn="l">
+              <a:lnSpc>
+                <a:spcPct val="118000"/>
+              </a:lnSpc>
+              <a:spcAft>
+                <a:spcPts val="350"/>
+              </a:spcAft>
+            </a:pPr>
+            <a:r>
+              <a:rPr sz="1150" b="1" i="0">
+                <a:solidFill>
+                  <a:srgbClr val="4338CA"/>
+                </a:solidFill>
+                <a:latin typeface="맑은 고딕"/>
+                <a:ea typeface="맑은 고딕"/>
+              </a:rPr>
+              <a:t>주의  </a:t>
+            </a:r>
+            <a:r>
+              <a:rPr sz="1150" b="0" i="0">
+                <a:solidFill>
+                  <a:srgbClr val="374151"/>
+                </a:solidFill>
+                <a:latin typeface="맑은 고딕"/>
+                <a:ea typeface="맑은 고딕"/>
+              </a:rPr>
+              <a:t>당장 안 바뀌어도 정상 — 색인·반영에 시간이 걸린다</a:t>
+            </a:r>
+          </a:p>
+        </p:txBody>
+      </p:sp>
+      <p:sp>
+        <p:nvSpPr>
+          <p:cNvPr id="21" name="Rounded Rectangle 20"/>
           <p:cNvSpPr/>
           <p:nvPr/>
         </p:nvSpPr>
         <p:spPr>
           <a:xfrm>
-            <a:off x="6361023" y="4187952"/>
-            <a:ext cx="571500" cy="274320"/>
+            <a:off x="566928" y="4069080"/>
+            <a:ext cx="5419191" cy="2350008"/>
           </a:xfrm>
           <a:prstGeom prst="roundRect">
             <a:avLst>
-              <a:gd name="adj" fmla="val 50000"/>
+              <a:gd name="adj" fmla="val 5000"/>
             </a:avLst>
           </a:prstGeom>
           <a:solidFill>
-            <a:srgbClr val="4F46E5"/>
+            <a:srgbClr val="FFFFFF"/>
+          </a:solidFill>
+          <a:ln w="12700">
+            <a:solidFill>
+              <a:srgbClr val="E3E8EF"/>
+            </a:solidFill>
+          </a:ln>
+          <a:effectLst/>
+        </p:spPr>
+        <p:style>
+          <a:lnRef idx="1">
+            <a:schemeClr val="accent1"/>
+          </a:lnRef>
+          <a:fillRef idx="3">
+            <a:schemeClr val="accent1"/>
+          </a:fillRef>
+          <a:effectRef idx="2">
+            <a:schemeClr val="accent1"/>
+          </a:effectRef>
+          <a:fontRef idx="minor">
+            <a:schemeClr val="lt1"/>
+          </a:fontRef>
+        </p:style>
+        <p:txBody>
+          <a:bodyPr rtlCol="0" anchor="ctr"/>
+          <a:lstStyle/>
+          <a:p>
+            <a:pPr algn="ctr"/>
+          </a:p>
+        </p:txBody>
+      </p:sp>
+      <p:sp>
+        <p:nvSpPr>
+          <p:cNvPr id="22" name="Rectangle 21"/>
+          <p:cNvSpPr/>
+          <p:nvPr/>
+        </p:nvSpPr>
+        <p:spPr>
+          <a:xfrm>
+            <a:off x="566928" y="4069080"/>
+            <a:ext cx="64008" cy="2350008"/>
+          </a:xfrm>
+          <a:prstGeom prst="rect">
+            <a:avLst/>
+          </a:prstGeom>
+          <a:solidFill>
+            <a:srgbClr val="4338CA"/>
           </a:solidFill>
           <a:ln>
             <a:noFill/>
@@ -9489,14 +11392,60 @@
       </p:sp>
       <p:sp>
         <p:nvSpPr>
-          <p:cNvPr id="23" name="TextBox 22"/>
+          <p:cNvPr id="23" name="Rounded Rectangle 22"/>
+          <p:cNvSpPr/>
+          <p:nvPr/>
+        </p:nvSpPr>
+        <p:spPr>
+          <a:xfrm>
+            <a:off x="786384" y="4215384"/>
+            <a:ext cx="581558" cy="274320"/>
+          </a:xfrm>
+          <a:prstGeom prst="roundRect">
+            <a:avLst>
+              <a:gd name="adj" fmla="val 50000"/>
+            </a:avLst>
+          </a:prstGeom>
+          <a:solidFill>
+            <a:srgbClr val="4338CA"/>
+          </a:solidFill>
+          <a:ln>
+            <a:noFill/>
+          </a:ln>
+          <a:effectLst/>
+        </p:spPr>
+        <p:style>
+          <a:lnRef idx="1">
+            <a:schemeClr val="accent1"/>
+          </a:lnRef>
+          <a:fillRef idx="3">
+            <a:schemeClr val="accent1"/>
+          </a:fillRef>
+          <a:effectRef idx="2">
+            <a:schemeClr val="accent1"/>
+          </a:effectRef>
+          <a:fontRef idx="minor">
+            <a:schemeClr val="lt1"/>
+          </a:fontRef>
+        </p:style>
+        <p:txBody>
+          <a:bodyPr rtlCol="0" anchor="ctr"/>
+          <a:lstStyle/>
+          <a:p>
+            <a:pPr algn="ctr"/>
+          </a:p>
+        </p:txBody>
+      </p:sp>
+      <p:sp>
+        <p:nvSpPr>
+          <p:cNvPr id="24" name="TextBox 23"/>
           <p:cNvSpPr txBox="1"/>
           <p:nvPr/>
         </p:nvSpPr>
         <p:spPr>
           <a:xfrm>
-            <a:off x="6361023" y="4201668"/>
-            <a:ext cx="571500" cy="274320"/>
+            <a:off x="786384" y="4226356"/>
+            <a:ext cx="581558" cy="274320"/>
           </a:xfrm>
           <a:prstGeom prst="rect">
             <a:avLst/>
@@ -9511,11 +11460,11 @@
           <a:p>
             <a:pPr algn="ctr">
               <a:lnSpc>
-                <a:spcPct val="112000"/>
+                <a:spcPct val="114000"/>
               </a:lnSpc>
             </a:pPr>
             <a:r>
-              <a:rPr sz="1050" b="1" i="0">
+              <a:rPr sz="1000" b="1" i="0" spc="20">
                 <a:solidFill>
                   <a:srgbClr val="FFFFFF"/>
                 </a:solidFill>
@@ -9523,46 +11472,6 @@
                 <a:ea typeface="맑은 고딕"/>
               </a:rPr>
               <a:t>툴</a:t>
-            </a:r>
-          </a:p>
-        </p:txBody>
-      </p:sp>
-      <p:sp>
-        <p:nvSpPr>
-          <p:cNvPr id="24" name="TextBox 23"/>
-          <p:cNvSpPr txBox="1"/>
-          <p:nvPr/>
-        </p:nvSpPr>
-        <p:spPr>
-          <a:xfrm>
-            <a:off x="7060539" y="4174236"/>
-            <a:ext cx="4417923" cy="365760"/>
-          </a:xfrm>
-          <a:prstGeom prst="rect">
-            <a:avLst/>
-          </a:prstGeom>
-          <a:noFill/>
-        </p:spPr>
-        <p:txBody>
-          <a:bodyPr wrap="square" anchor="t" lIns="0" rIns="0" tIns="0" bIns="0">
-            <a:spAutoFit/>
-          </a:bodyPr>
-          <a:lstStyle/>
-          <a:p>
-            <a:pPr algn="l">
-              <a:lnSpc>
-                <a:spcPct val="112000"/>
-              </a:lnSpc>
-            </a:pPr>
-            <a:r>
-              <a:rPr sz="1450" b="1" i="0">
-                <a:solidFill>
-                  <a:srgbClr val="14213D"/>
-                </a:solidFill>
-                <a:latin typeface="맑은 고딕"/>
-                <a:ea typeface="맑은 고딕"/>
-              </a:rPr>
-              <a:t>로그 시트 — 6주의 자산</a:t>
             </a:r>
           </a:p>
         </p:txBody>
@@ -9575,8 +11484,8 @@
         </p:nvSpPr>
         <p:spPr>
           <a:xfrm>
-            <a:off x="6361023" y="4572000"/>
-            <a:ext cx="5117439" cy="1755648"/>
+            <a:off x="1495958" y="4197096"/>
+            <a:ext cx="4334713" cy="365760"/>
           </a:xfrm>
           <a:prstGeom prst="rect">
             <a:avLst/>
@@ -9593,14 +11502,54 @@
               <a:lnSpc>
                 <a:spcPct val="114000"/>
               </a:lnSpc>
+            </a:pPr>
+            <a:r>
+              <a:rPr sz="1450" b="1" i="0">
+                <a:solidFill>
+                  <a:srgbClr val="111927"/>
+                </a:solidFill>
+                <a:latin typeface="맑은 고딕"/>
+                <a:ea typeface="맑은 고딕"/>
+              </a:rPr>
+              <a:t>ChatGPT Search — 변동성 체험 도구</a:t>
+            </a:r>
+          </a:p>
+        </p:txBody>
+      </p:sp>
+      <p:sp>
+        <p:nvSpPr>
+          <p:cNvPr id="26" name="TextBox 25"/>
+          <p:cNvSpPr txBox="1"/>
+          <p:nvPr/>
+        </p:nvSpPr>
+        <p:spPr>
+          <a:xfrm>
+            <a:off x="786384" y="4617720"/>
+            <a:ext cx="5035143" cy="1709928"/>
+          </a:xfrm>
+          <a:prstGeom prst="rect">
+            <a:avLst/>
+          </a:prstGeom>
+          <a:noFill/>
+        </p:spPr>
+        <p:txBody>
+          <a:bodyPr wrap="square" anchor="t" lIns="0" rIns="0" tIns="0" bIns="0">
+            <a:spAutoFit/>
+          </a:bodyPr>
+          <a:lstStyle/>
+          <a:p>
+            <a:pPr algn="l">
+              <a:lnSpc>
+                <a:spcPct val="118000"/>
+              </a:lnSpc>
               <a:spcAft>
-                <a:spcPts val="300"/>
+                <a:spcPts val="350"/>
               </a:spcAft>
             </a:pPr>
             <a:r>
               <a:rPr sz="1150" b="1" i="0">
                 <a:solidFill>
-                  <a:srgbClr val="2563EB"/>
+                  <a:srgbClr val="4338CA"/>
                 </a:solidFill>
                 <a:latin typeface="맑은 고딕"/>
                 <a:ea typeface="맑은 고딕"/>
@@ -9615,27 +11564,328 @@
                 <a:latin typeface="맑은 고딕"/>
                 <a:ea typeface="맑은 고딕"/>
               </a:rPr>
-              <a:t>질문 × 도구 × 날짜 매트릭스로 언급/인용/오류 기록</a:t>
-            </a:r>
-          </a:p>
+              <a:t>같은 질문을 새 대화에서 3회 반복 실행</a:t>
+            </a:r>
+          </a:p>
+          <a:p>
+            <a:pPr algn="l">
+              <a:lnSpc>
+                <a:spcPct val="118000"/>
+              </a:lnSpc>
+              <a:spcAft>
+                <a:spcPts val="350"/>
+              </a:spcAft>
+            </a:pPr>
+            <a:r>
+              <a:rPr sz="1150" b="1" i="0">
+                <a:solidFill>
+                  <a:srgbClr val="4338CA"/>
+                </a:solidFill>
+                <a:latin typeface="맑은 고딕"/>
+                <a:ea typeface="맑은 고딕"/>
+              </a:rPr>
+              <a:t>보는 것  </a:t>
+            </a:r>
+            <a:r>
+              <a:rPr sz="1150" b="0" i="0">
+                <a:solidFill>
+                  <a:srgbClr val="374151"/>
+                </a:solidFill>
+                <a:latin typeface="맑은 고딕"/>
+                <a:ea typeface="맑은 고딕"/>
+              </a:rPr>
+              <a:t>3회 중 몇 회 언급되는가 (언급률로 기록)</a:t>
+            </a:r>
+          </a:p>
+          <a:p>
+            <a:pPr algn="l">
+              <a:lnSpc>
+                <a:spcPct val="118000"/>
+              </a:lnSpc>
+              <a:spcAft>
+                <a:spcPts val="350"/>
+              </a:spcAft>
+            </a:pPr>
+            <a:r>
+              <a:rPr sz="1150" b="1" i="0">
+                <a:solidFill>
+                  <a:srgbClr val="4338CA"/>
+                </a:solidFill>
+                <a:latin typeface="맑은 고딕"/>
+                <a:ea typeface="맑은 고딕"/>
+              </a:rPr>
+              <a:t>포인트  </a:t>
+            </a:r>
+            <a:r>
+              <a:rPr sz="1150" b="0" i="0">
+                <a:solidFill>
+                  <a:srgbClr val="374151"/>
+                </a:solidFill>
+                <a:latin typeface="맑은 고딕"/>
+                <a:ea typeface="맑은 고딕"/>
+              </a:rPr>
+              <a:t>'한 번 나왔다'가 아니라 'n회 중 몇 회'가 올바른 지표</a:t>
+            </a:r>
+          </a:p>
+        </p:txBody>
+      </p:sp>
+      <p:sp>
+        <p:nvSpPr>
+          <p:cNvPr id="27" name="Rounded Rectangle 26"/>
+          <p:cNvSpPr/>
+          <p:nvPr/>
+        </p:nvSpPr>
+        <p:spPr>
+          <a:xfrm>
+            <a:off x="6205575" y="4069080"/>
+            <a:ext cx="5419191" cy="2350008"/>
+          </a:xfrm>
+          <a:prstGeom prst="roundRect">
+            <a:avLst>
+              <a:gd name="adj" fmla="val 5000"/>
+            </a:avLst>
+          </a:prstGeom>
+          <a:solidFill>
+            <a:srgbClr val="FFFFFF"/>
+          </a:solidFill>
+          <a:ln w="12700">
+            <a:solidFill>
+              <a:srgbClr val="E3E8EF"/>
+            </a:solidFill>
+          </a:ln>
+          <a:effectLst/>
+        </p:spPr>
+        <p:style>
+          <a:lnRef idx="1">
+            <a:schemeClr val="accent1"/>
+          </a:lnRef>
+          <a:fillRef idx="3">
+            <a:schemeClr val="accent1"/>
+          </a:fillRef>
+          <a:effectRef idx="2">
+            <a:schemeClr val="accent1"/>
+          </a:effectRef>
+          <a:fontRef idx="minor">
+            <a:schemeClr val="lt1"/>
+          </a:fontRef>
+        </p:style>
+        <p:txBody>
+          <a:bodyPr rtlCol="0" anchor="ctr"/>
+          <a:lstStyle/>
+          <a:p>
+            <a:pPr algn="ctr"/>
+          </a:p>
+        </p:txBody>
+      </p:sp>
+      <p:sp>
+        <p:nvSpPr>
+          <p:cNvPr id="28" name="Rectangle 27"/>
+          <p:cNvSpPr/>
+          <p:nvPr/>
+        </p:nvSpPr>
+        <p:spPr>
+          <a:xfrm>
+            <a:off x="6205575" y="4069080"/>
+            <a:ext cx="64008" cy="2350008"/>
+          </a:xfrm>
+          <a:prstGeom prst="rect">
+            <a:avLst/>
+          </a:prstGeom>
+          <a:solidFill>
+            <a:srgbClr val="4338CA"/>
+          </a:solidFill>
+          <a:ln>
+            <a:noFill/>
+          </a:ln>
+          <a:effectLst/>
+        </p:spPr>
+        <p:style>
+          <a:lnRef idx="1">
+            <a:schemeClr val="accent1"/>
+          </a:lnRef>
+          <a:fillRef idx="3">
+            <a:schemeClr val="accent1"/>
+          </a:fillRef>
+          <a:effectRef idx="2">
+            <a:schemeClr val="accent1"/>
+          </a:effectRef>
+          <a:fontRef idx="minor">
+            <a:schemeClr val="lt1"/>
+          </a:fontRef>
+        </p:style>
+        <p:txBody>
+          <a:bodyPr rtlCol="0" anchor="ctr"/>
+          <a:lstStyle/>
+          <a:p>
+            <a:pPr algn="ctr"/>
+          </a:p>
+        </p:txBody>
+      </p:sp>
+      <p:sp>
+        <p:nvSpPr>
+          <p:cNvPr id="29" name="Rounded Rectangle 28"/>
+          <p:cNvSpPr/>
+          <p:nvPr/>
+        </p:nvSpPr>
+        <p:spPr>
+          <a:xfrm>
+            <a:off x="6425031" y="4215384"/>
+            <a:ext cx="581558" cy="274320"/>
+          </a:xfrm>
+          <a:prstGeom prst="roundRect">
+            <a:avLst>
+              <a:gd name="adj" fmla="val 50000"/>
+            </a:avLst>
+          </a:prstGeom>
+          <a:solidFill>
+            <a:srgbClr val="4338CA"/>
+          </a:solidFill>
+          <a:ln>
+            <a:noFill/>
+          </a:ln>
+          <a:effectLst/>
+        </p:spPr>
+        <p:style>
+          <a:lnRef idx="1">
+            <a:schemeClr val="accent1"/>
+          </a:lnRef>
+          <a:fillRef idx="3">
+            <a:schemeClr val="accent1"/>
+          </a:fillRef>
+          <a:effectRef idx="2">
+            <a:schemeClr val="accent1"/>
+          </a:effectRef>
+          <a:fontRef idx="minor">
+            <a:schemeClr val="lt1"/>
+          </a:fontRef>
+        </p:style>
+        <p:txBody>
+          <a:bodyPr rtlCol="0" anchor="ctr"/>
+          <a:lstStyle/>
+          <a:p>
+            <a:pPr algn="ctr"/>
+          </a:p>
+        </p:txBody>
+      </p:sp>
+      <p:sp>
+        <p:nvSpPr>
+          <p:cNvPr id="30" name="TextBox 29"/>
+          <p:cNvSpPr txBox="1"/>
+          <p:nvPr/>
+        </p:nvSpPr>
+        <p:spPr>
+          <a:xfrm>
+            <a:off x="6425031" y="4226356"/>
+            <a:ext cx="581558" cy="274320"/>
+          </a:xfrm>
+          <a:prstGeom prst="rect">
+            <a:avLst/>
+          </a:prstGeom>
+          <a:noFill/>
+        </p:spPr>
+        <p:txBody>
+          <a:bodyPr wrap="square" anchor="ctr" lIns="0" rIns="0" tIns="0" bIns="0">
+            <a:spAutoFit/>
+          </a:bodyPr>
+          <a:lstStyle/>
+          <a:p>
+            <a:pPr algn="ctr">
+              <a:lnSpc>
+                <a:spcPct val="114000"/>
+              </a:lnSpc>
+            </a:pPr>
+            <a:r>
+              <a:rPr sz="1000" b="1" i="0" spc="20">
+                <a:solidFill>
+                  <a:srgbClr val="FFFFFF"/>
+                </a:solidFill>
+                <a:latin typeface="맑은 고딕"/>
+                <a:ea typeface="맑은 고딕"/>
+              </a:rPr>
+              <a:t>툴</a:t>
+            </a:r>
+          </a:p>
+        </p:txBody>
+      </p:sp>
+      <p:sp>
+        <p:nvSpPr>
+          <p:cNvPr id="31" name="TextBox 30"/>
+          <p:cNvSpPr txBox="1"/>
+          <p:nvPr/>
+        </p:nvSpPr>
+        <p:spPr>
+          <a:xfrm>
+            <a:off x="7134605" y="4197096"/>
+            <a:ext cx="4334713" cy="365760"/>
+          </a:xfrm>
+          <a:prstGeom prst="rect">
+            <a:avLst/>
+          </a:prstGeom>
+          <a:noFill/>
+        </p:spPr>
+        <p:txBody>
+          <a:bodyPr wrap="square" anchor="t" lIns="0" rIns="0" tIns="0" bIns="0">
+            <a:spAutoFit/>
+          </a:bodyPr>
+          <a:lstStyle/>
           <a:p>
             <a:pPr algn="l">
               <a:lnSpc>
                 <a:spcPct val="114000"/>
               </a:lnSpc>
+            </a:pPr>
+            <a:r>
+              <a:rPr sz="1450" b="1" i="0">
+                <a:solidFill>
+                  <a:srgbClr val="111927"/>
+                </a:solidFill>
+                <a:latin typeface="맑은 고딕"/>
+                <a:ea typeface="맑은 고딕"/>
+              </a:rPr>
+              <a:t>로그 시트 — 6주의 자산</a:t>
+            </a:r>
+          </a:p>
+        </p:txBody>
+      </p:sp>
+      <p:sp>
+        <p:nvSpPr>
+          <p:cNvPr id="32" name="TextBox 31"/>
+          <p:cNvSpPr txBox="1"/>
+          <p:nvPr/>
+        </p:nvSpPr>
+        <p:spPr>
+          <a:xfrm>
+            <a:off x="6425031" y="4617720"/>
+            <a:ext cx="5035143" cy="1709928"/>
+          </a:xfrm>
+          <a:prstGeom prst="rect">
+            <a:avLst/>
+          </a:prstGeom>
+          <a:noFill/>
+        </p:spPr>
+        <p:txBody>
+          <a:bodyPr wrap="square" anchor="t" lIns="0" rIns="0" tIns="0" bIns="0">
+            <a:spAutoFit/>
+          </a:bodyPr>
+          <a:lstStyle/>
+          <a:p>
+            <a:pPr algn="l">
+              <a:lnSpc>
+                <a:spcPct val="118000"/>
+              </a:lnSpc>
               <a:spcAft>
-                <a:spcPts val="300"/>
+                <a:spcPts val="350"/>
               </a:spcAft>
             </a:pPr>
             <a:r>
               <a:rPr sz="1150" b="1" i="0">
                 <a:solidFill>
-                  <a:srgbClr val="2563EB"/>
-                </a:solidFill>
-                <a:latin typeface="맑은 고딕"/>
-                <a:ea typeface="맑은 고딕"/>
-              </a:rPr>
-              <a:t>보는 것  </a:t>
+                  <a:srgbClr val="4338CA"/>
+                </a:solidFill>
+                <a:latin typeface="맑은 고딕"/>
+                <a:ea typeface="맑은 고딕"/>
+              </a:rPr>
+              <a:t>이렇게 쓴다  </a:t>
             </a:r>
             <a:r>
               <a:rPr sz="1150" b="0" i="0">
@@ -9645,22 +11895,52 @@
                 <a:latin typeface="맑은 고딕"/>
                 <a:ea typeface="맑은 고딕"/>
               </a:rPr>
-              <a:t>주 단위 추세 — 오늘의 스냅샷이 아니라 흐름</a:t>
+              <a:t>질문 × 도구 × 날짜 매트릭스로 언급/인용/오류 기록</a:t>
             </a:r>
           </a:p>
           <a:p>
             <a:pPr algn="l">
               <a:lnSpc>
-                <a:spcPct val="114000"/>
+                <a:spcPct val="118000"/>
               </a:lnSpc>
               <a:spcAft>
-                <a:spcPts val="300"/>
+                <a:spcPts val="350"/>
               </a:spcAft>
             </a:pPr>
             <a:r>
               <a:rPr sz="1150" b="1" i="0">
                 <a:solidFill>
-                  <a:srgbClr val="2563EB"/>
+                  <a:srgbClr val="4338CA"/>
+                </a:solidFill>
+                <a:latin typeface="맑은 고딕"/>
+                <a:ea typeface="맑은 고딕"/>
+              </a:rPr>
+              <a:t>보는 것  </a:t>
+            </a:r>
+            <a:r>
+              <a:rPr sz="1150" b="0" i="0">
+                <a:solidFill>
+                  <a:srgbClr val="374151"/>
+                </a:solidFill>
+                <a:latin typeface="맑은 고딕"/>
+                <a:ea typeface="맑은 고딕"/>
+              </a:rPr>
+              <a:t>주 단위 추세 — 오늘의 스냅샷이 아니라 흐름</a:t>
+            </a:r>
+          </a:p>
+          <a:p>
+            <a:pPr algn="l">
+              <a:lnSpc>
+                <a:spcPct val="118000"/>
+              </a:lnSpc>
+              <a:spcAft>
+                <a:spcPts val="350"/>
+              </a:spcAft>
+            </a:pPr>
+            <a:r>
+              <a:rPr sz="1150" b="1" i="0">
+                <a:solidFill>
+                  <a:srgbClr val="4338CA"/>
                 </a:solidFill>
                 <a:latin typeface="맑은 고딕"/>
                 <a:ea typeface="맑은 고딕"/>
@@ -9706,14 +11986,14 @@
         </p:nvSpPr>
         <p:spPr>
           <a:xfrm>
-            <a:off x="548640" y="475488"/>
-            <a:ext cx="91440" cy="475488"/>
+            <a:off x="0" y="0"/>
+            <a:ext cx="12191695" cy="6858000"/>
           </a:xfrm>
           <a:prstGeom prst="rect">
             <a:avLst/>
           </a:prstGeom>
           <a:solidFill>
-            <a:srgbClr val="2563EB"/>
+            <a:srgbClr val="F6F7F9"/>
           </a:solidFill>
           <a:ln>
             <a:noFill/>
@@ -9744,14 +12024,104 @@
       </p:sp>
       <p:sp>
         <p:nvSpPr>
-          <p:cNvPr id="3" name="TextBox 2"/>
+          <p:cNvPr id="3" name="Rectangle 2"/>
+          <p:cNvSpPr/>
+          <p:nvPr/>
+        </p:nvSpPr>
+        <p:spPr>
+          <a:xfrm>
+            <a:off x="0" y="0"/>
+            <a:ext cx="12191695" cy="128016"/>
+          </a:xfrm>
+          <a:prstGeom prst="rect">
+            <a:avLst/>
+          </a:prstGeom>
+          <a:solidFill>
+            <a:srgbClr val="4338CA"/>
+          </a:solidFill>
+          <a:ln>
+            <a:noFill/>
+          </a:ln>
+          <a:effectLst/>
+        </p:spPr>
+        <p:style>
+          <a:lnRef idx="1">
+            <a:schemeClr val="accent1"/>
+          </a:lnRef>
+          <a:fillRef idx="3">
+            <a:schemeClr val="accent1"/>
+          </a:fillRef>
+          <a:effectRef idx="2">
+            <a:schemeClr val="accent1"/>
+          </a:effectRef>
+          <a:fontRef idx="minor">
+            <a:schemeClr val="lt1"/>
+          </a:fontRef>
+        </p:style>
+        <p:txBody>
+          <a:bodyPr rtlCol="0" anchor="ctr"/>
+          <a:lstStyle/>
+          <a:p>
+            <a:pPr algn="ctr"/>
+          </a:p>
+        </p:txBody>
+      </p:sp>
+      <p:sp>
+        <p:nvSpPr>
+          <p:cNvPr id="4" name="Rounded Rectangle 3"/>
+          <p:cNvSpPr/>
+          <p:nvPr/>
+        </p:nvSpPr>
+        <p:spPr>
+          <a:xfrm>
+            <a:off x="566928" y="457200"/>
+            <a:ext cx="82296" cy="457200"/>
+          </a:xfrm>
+          <a:prstGeom prst="roundRect">
+            <a:avLst>
+              <a:gd name="adj" fmla="val 50000"/>
+            </a:avLst>
+          </a:prstGeom>
+          <a:solidFill>
+            <a:srgbClr val="4338CA"/>
+          </a:solidFill>
+          <a:ln>
+            <a:noFill/>
+          </a:ln>
+          <a:effectLst/>
+        </p:spPr>
+        <p:style>
+          <a:lnRef idx="1">
+            <a:schemeClr val="accent1"/>
+          </a:lnRef>
+          <a:fillRef idx="3">
+            <a:schemeClr val="accent1"/>
+          </a:fillRef>
+          <a:effectRef idx="2">
+            <a:schemeClr val="accent1"/>
+          </a:effectRef>
+          <a:fontRef idx="minor">
+            <a:schemeClr val="lt1"/>
+          </a:fontRef>
+        </p:style>
+        <p:txBody>
+          <a:bodyPr rtlCol="0" anchor="ctr"/>
+          <a:lstStyle/>
+          <a:p>
+            <a:pPr algn="ctr"/>
+          </a:p>
+        </p:txBody>
+      </p:sp>
+      <p:sp>
+        <p:nvSpPr>
+          <p:cNvPr id="5" name="TextBox 4"/>
           <p:cNvSpPr txBox="1"/>
           <p:nvPr/>
         </p:nvSpPr>
         <p:spPr>
           <a:xfrm>
-            <a:off x="786384" y="402336"/>
-            <a:ext cx="9326880" cy="640080"/>
+            <a:off x="804672" y="384048"/>
+            <a:ext cx="9144000" cy="603504"/>
           </a:xfrm>
           <a:prstGeom prst="rect">
             <a:avLst/>
@@ -9766,13 +12136,13 @@
           <a:p>
             <a:pPr algn="l">
               <a:lnSpc>
-                <a:spcPct val="112000"/>
+                <a:spcPct val="114000"/>
               </a:lnSpc>
             </a:pPr>
             <a:r>
-              <a:rPr sz="2300" b="1" i="0">
-                <a:solidFill>
-                  <a:srgbClr val="14213D"/>
+              <a:rPr sz="2200" b="1" i="0">
+                <a:solidFill>
+                  <a:srgbClr val="111927"/>
                 </a:solidFill>
                 <a:latin typeface="맑은 고딕"/>
                 <a:ea typeface="맑은 고딕"/>
@@ -9784,14 +12154,98 @@
       </p:sp>
       <p:sp>
         <p:nvSpPr>
-          <p:cNvPr id="4" name="TextBox 3"/>
+          <p:cNvPr id="6" name="Rectangle 5"/>
+          <p:cNvSpPr/>
+          <p:nvPr/>
+        </p:nvSpPr>
+        <p:spPr>
+          <a:xfrm>
+            <a:off x="566928" y="6547104"/>
+            <a:ext cx="182880" cy="25603"/>
+          </a:xfrm>
+          <a:prstGeom prst="rect">
+            <a:avLst/>
+          </a:prstGeom>
+          <a:solidFill>
+            <a:srgbClr val="4338CA"/>
+          </a:solidFill>
+          <a:ln>
+            <a:noFill/>
+          </a:ln>
+          <a:effectLst/>
+        </p:spPr>
+        <p:style>
+          <a:lnRef idx="1">
+            <a:schemeClr val="accent1"/>
+          </a:lnRef>
+          <a:fillRef idx="3">
+            <a:schemeClr val="accent1"/>
+          </a:fillRef>
+          <a:effectRef idx="2">
+            <a:schemeClr val="accent1"/>
+          </a:effectRef>
+          <a:fontRef idx="minor">
+            <a:schemeClr val="lt1"/>
+          </a:fontRef>
+        </p:style>
+        <p:txBody>
+          <a:bodyPr rtlCol="0" anchor="ctr"/>
+          <a:lstStyle/>
+          <a:p>
+            <a:pPr algn="ctr"/>
+          </a:p>
+        </p:txBody>
+      </p:sp>
+      <p:sp>
+        <p:nvSpPr>
+          <p:cNvPr id="7" name="TextBox 6"/>
           <p:cNvSpPr txBox="1"/>
           <p:nvPr/>
         </p:nvSpPr>
         <p:spPr>
           <a:xfrm>
-            <a:off x="548640" y="6510528"/>
-            <a:ext cx="11094415" cy="274320"/>
+            <a:off x="841248" y="6446520"/>
+            <a:ext cx="11057839" cy="274320"/>
+          </a:xfrm>
+          <a:prstGeom prst="rect">
+            <a:avLst/>
+          </a:prstGeom>
+          <a:noFill/>
+        </p:spPr>
+        <p:txBody>
+          <a:bodyPr wrap="square" anchor="ctr" lIns="0" rIns="0" tIns="0" bIns="0">
+            <a:spAutoFit/>
+          </a:bodyPr>
+          <a:lstStyle/>
+          <a:p>
+            <a:pPr algn="l">
+              <a:lnSpc>
+                <a:spcPct val="114000"/>
+              </a:lnSpc>
+            </a:pPr>
+            <a:r>
+              <a:rPr sz="900" b="0" i="0">
+                <a:solidFill>
+                  <a:srgbClr val="9AA4B2"/>
+                </a:solidFill>
+                <a:latin typeface="맑은 고딕"/>
+                <a:ea typeface="맑은 고딕"/>
+              </a:rPr>
+              <a:t>AI 시대 마케팅, 누가 살아남을까? — 6주 실무 스터디   |   4회차 · GEO 인용되는 브랜드</a:t>
+            </a:r>
+          </a:p>
+        </p:txBody>
+      </p:sp>
+      <p:sp>
+        <p:nvSpPr>
+          <p:cNvPr id="8" name="TextBox 7"/>
+          <p:cNvSpPr txBox="1"/>
+          <p:nvPr/>
+        </p:nvSpPr>
+        <p:spPr>
+          <a:xfrm>
+            <a:off x="713232" y="1225295"/>
+            <a:ext cx="10607040" cy="4709159"/>
           </a:xfrm>
           <a:prstGeom prst="rect">
             <a:avLst/>
@@ -9806,79 +12260,29 @@
           <a:p>
             <a:pPr algn="l">
               <a:lnSpc>
-                <a:spcPct val="112000"/>
-              </a:lnSpc>
-            </a:pPr>
-            <a:r>
-              <a:rPr sz="950" b="0" i="0">
-                <a:solidFill>
-                  <a:srgbClr val="94A3B8"/>
-                </a:solidFill>
-                <a:latin typeface="맑은 고딕"/>
-                <a:ea typeface="맑은 고딕"/>
-              </a:rPr>
-              <a:t>AI 시대 마케팅, 누가 살아남을까? — 6주 실무 스터디   |   4회차 · GEO 인용되는 브랜드</a:t>
-            </a:r>
-            <a:r>
-              <a:rPr sz="950" b="0" i="0">
-                <a:solidFill>
-                  <a:srgbClr val="94A3B8"/>
-                </a:solidFill>
-                <a:latin typeface="맑은 고딕"/>
-                <a:ea typeface="맑은 고딕"/>
-              </a:rPr>
-              <a:t/>
-            </a:r>
-          </a:p>
-        </p:txBody>
-      </p:sp>
-      <p:sp>
-        <p:nvSpPr>
-          <p:cNvPr id="5" name="TextBox 4"/>
-          <p:cNvSpPr txBox="1"/>
-          <p:nvPr/>
-        </p:nvSpPr>
-        <p:spPr>
-          <a:xfrm>
-            <a:off x="685800" y="1225295"/>
-            <a:ext cx="10698480" cy="4736592"/>
-          </a:xfrm>
-          <a:prstGeom prst="rect">
-            <a:avLst/>
-          </a:prstGeom>
-          <a:noFill/>
-        </p:spPr>
-        <p:txBody>
-          <a:bodyPr wrap="square" anchor="t" lIns="0" rIns="0" tIns="0" bIns="0">
-            <a:spAutoFit/>
-          </a:bodyPr>
-          <a:lstStyle/>
-          <a:p>
-            <a:pPr algn="l">
-              <a:lnSpc>
-                <a:spcPct val="118000"/>
+                <a:spcPct val="120000"/>
               </a:lnSpc>
               <a:spcBef>
-                <a:spcPts val="600"/>
+                <a:spcPts val="700"/>
               </a:spcBef>
               <a:spcAft>
                 <a:spcPts val="500"/>
               </a:spcAft>
             </a:pPr>
             <a:r>
-              <a:rPr sz="1150" b="0" i="0">
-                <a:solidFill>
-                  <a:srgbClr val="2563EB"/>
-                </a:solidFill>
-                <a:latin typeface="맑은 고딕"/>
-                <a:ea typeface="맑은 고딕"/>
-              </a:rPr>
-              <a:t>●  </a:t>
+              <a:rPr sz="950" b="0" i="0">
+                <a:solidFill>
+                  <a:srgbClr val="4338CA"/>
+                </a:solidFill>
+                <a:latin typeface="맑은 고딕"/>
+                <a:ea typeface="맑은 고딕"/>
+              </a:rPr>
+              <a:t>■  </a:t>
             </a:r>
             <a:r>
               <a:rPr sz="1550" b="1" i="0">
                 <a:solidFill>
-                  <a:srgbClr val="1F2937"/>
+                  <a:srgbClr val="111927"/>
                 </a:solidFill>
                 <a:latin typeface="맑은 고딕"/>
                 <a:ea typeface="맑은 고딕"/>
@@ -9889,29 +12293,29 @@
           <a:p>
             <a:pPr algn="l">
               <a:lnSpc>
-                <a:spcPct val="118000"/>
+                <a:spcPct val="120000"/>
               </a:lnSpc>
               <a:spcBef>
-                <a:spcPts val="600"/>
+                <a:spcPts val="700"/>
               </a:spcBef>
               <a:spcAft>
                 <a:spcPts val="500"/>
               </a:spcAft>
             </a:pPr>
             <a:r>
-              <a:rPr sz="1150" b="0" i="0">
-                <a:solidFill>
-                  <a:srgbClr val="2563EB"/>
-                </a:solidFill>
-                <a:latin typeface="맑은 고딕"/>
-                <a:ea typeface="맑은 고딕"/>
-              </a:rPr>
-              <a:t>●  </a:t>
+              <a:rPr sz="950" b="0" i="0">
+                <a:solidFill>
+                  <a:srgbClr val="4338CA"/>
+                </a:solidFill>
+                <a:latin typeface="맑은 고딕"/>
+                <a:ea typeface="맑은 고딕"/>
+              </a:rPr>
+              <a:t>■  </a:t>
             </a:r>
             <a:r>
               <a:rPr sz="1550" b="1" i="0">
                 <a:solidFill>
-                  <a:srgbClr val="1F2937"/>
+                  <a:srgbClr val="111927"/>
                 </a:solidFill>
                 <a:latin typeface="맑은 고딕"/>
                 <a:ea typeface="맑은 고딕"/>
@@ -9922,7 +12326,7 @@
           <a:p>
             <a:pPr algn="l">
               <a:lnSpc>
-                <a:spcPct val="115000"/>
+                <a:spcPct val="116000"/>
               </a:lnSpc>
               <a:spcBef>
                 <a:spcPts val="100"/>
@@ -9934,7 +12338,7 @@
             <a:r>
               <a:rPr sz="1250" b="0" i="0">
                 <a:solidFill>
-                  <a:srgbClr val="9CA3AF"/>
+                  <a:srgbClr val="9AA4B2"/>
                 </a:solidFill>
                 <a:latin typeface="맑은 고딕"/>
                 <a:ea typeface="맑은 고딕"/>
@@ -9944,7 +12348,7 @@
             <a:r>
               <a:rPr sz="1300" b="0" i="0">
                 <a:solidFill>
-                  <a:srgbClr val="4B5563"/>
+                  <a:srgbClr val="374151"/>
                 </a:solidFill>
                 <a:latin typeface="맑은 고딕"/>
                 <a:ea typeface="맑은 고딕"/>
@@ -9955,7 +12359,7 @@
           <a:p>
             <a:pPr algn="l">
               <a:lnSpc>
-                <a:spcPct val="115000"/>
+                <a:spcPct val="116000"/>
               </a:lnSpc>
               <a:spcBef>
                 <a:spcPts val="100"/>
@@ -9967,7 +12371,7 @@
             <a:r>
               <a:rPr sz="1250" b="0" i="0">
                 <a:solidFill>
-                  <a:srgbClr val="9CA3AF"/>
+                  <a:srgbClr val="9AA4B2"/>
                 </a:solidFill>
                 <a:latin typeface="맑은 고딕"/>
                 <a:ea typeface="맑은 고딕"/>
@@ -9977,7 +12381,7 @@
             <a:r>
               <a:rPr sz="1300" b="0" i="0">
                 <a:solidFill>
-                  <a:srgbClr val="4B5563"/>
+                  <a:srgbClr val="374151"/>
                 </a:solidFill>
                 <a:latin typeface="맑은 고딕"/>
                 <a:ea typeface="맑은 고딕"/>
@@ -9988,29 +12392,29 @@
           <a:p>
             <a:pPr algn="l">
               <a:lnSpc>
-                <a:spcPct val="118000"/>
+                <a:spcPct val="120000"/>
               </a:lnSpc>
               <a:spcBef>
-                <a:spcPts val="600"/>
+                <a:spcPts val="700"/>
               </a:spcBef>
               <a:spcAft>
                 <a:spcPts val="500"/>
               </a:spcAft>
             </a:pPr>
             <a:r>
-              <a:rPr sz="1150" b="0" i="0">
-                <a:solidFill>
-                  <a:srgbClr val="2563EB"/>
-                </a:solidFill>
-                <a:latin typeface="맑은 고딕"/>
-                <a:ea typeface="맑은 고딕"/>
-              </a:rPr>
-              <a:t>●  </a:t>
+              <a:rPr sz="950" b="0" i="0">
+                <a:solidFill>
+                  <a:srgbClr val="4338CA"/>
+                </a:solidFill>
+                <a:latin typeface="맑은 고딕"/>
+                <a:ea typeface="맑은 고딕"/>
+              </a:rPr>
+              <a:t>■  </a:t>
             </a:r>
             <a:r>
               <a:rPr sz="1550" b="1" i="0">
                 <a:solidFill>
-                  <a:srgbClr val="1F2937"/>
+                  <a:srgbClr val="111927"/>
                 </a:solidFill>
                 <a:latin typeface="맑은 고딕"/>
                 <a:ea typeface="맑은 고딕"/>
@@ -10021,7 +12425,7 @@
           <a:p>
             <a:pPr algn="l">
               <a:lnSpc>
-                <a:spcPct val="115000"/>
+                <a:spcPct val="116000"/>
               </a:lnSpc>
               <a:spcBef>
                 <a:spcPts val="100"/>
@@ -10033,7 +12437,7 @@
             <a:r>
               <a:rPr sz="1250" b="0" i="0">
                 <a:solidFill>
-                  <a:srgbClr val="9CA3AF"/>
+                  <a:srgbClr val="9AA4B2"/>
                 </a:solidFill>
                 <a:latin typeface="맑은 고딕"/>
                 <a:ea typeface="맑은 고딕"/>
@@ -10043,7 +12447,7 @@
             <a:r>
               <a:rPr sz="1300" b="0" i="0">
                 <a:solidFill>
-                  <a:srgbClr val="4B5563"/>
+                  <a:srgbClr val="374151"/>
                 </a:solidFill>
                 <a:latin typeface="맑은 고딕"/>
                 <a:ea typeface="맑은 고딕"/>
